--- a/Presentation/Smart_Parking_Presentation_Basic.pptx
+++ b/Presentation/Smart_Parking_Presentation_Basic.pptx
@@ -4,6 +4,9 @@
   <p:sldMasterIdLst>
     <p:sldMasterId id="2147483648" r:id="rId1"/>
   </p:sldMasterIdLst>
+  <p:notesMasterIdLst>
+    <p:notesMasterId r:id="rId13"/>
+  </p:notesMasterIdLst>
   <p:sldIdLst>
     <p:sldId id="256" r:id="rId2"/>
     <p:sldId id="257" r:id="rId3"/>
@@ -17,9 +20,6 @@
     <p:sldId id="265" r:id="rId11"/>
     <p:sldId id="266" r:id="rId12"/>
   </p:sldIdLst>
-  <p:notesMasterIdLst>
-    <p:notesMasterId r:id="rId13"/>
-  </p:notesMasterIdLst>
   <p:sldSz cx="12192000" cy="6858000"/>
   <p:notesSz cx="6858000" cy="12192000"/>
   <p:defaultTextStyle>
@@ -114,6 +114,11 @@
       </a:defRPr>
     </a:lvl9pPr>
   </p:defaultTextStyle>
+  <p:extLst>
+    <p:ext uri="{EFAFB233-063F-42B5-8137-9DF3F51BA10A}">
+      <p15:sldGuideLst xmlns:p15="http://schemas.microsoft.com/office/powerpoint/2012/main"/>
+    </p:ext>
+  </p:extLst>
 </p:presentation>
 </file>
 
@@ -139,234 +144,10 @@
           <a:chExt cx="0" cy="0"/>
         </a:xfrm>
       </p:grpSpPr>
-      <p:sp>
-        <p:nvSpPr>
-          <p:cNvPr id="2" name="Header Placeholder 1"/>
-          <p:cNvSpPr>
-            <a:spLocks noGrp="1"/>
-          </p:cNvSpPr>
-          <p:nvPr>
-            <p:ph type="hdr" sz="quarter"/>
-          </p:nvPr>
-        </p:nvSpPr>
-        <p:spPr>
-          <a:xfrm>
-            <a:off x="0" y="0"/>
-            <a:ext cx="2971800" cy="458788"/>
-          </a:xfrm>
-          <a:prstGeom prst="rect">
-            <a:avLst/>
-          </a:prstGeom>
-        </p:spPr>
-        <p:txBody>
-          <a:bodyPr vert="horz" lIns="91440" tIns="45720" rIns="91440" bIns="45720" rtlCol="0"/>
-          <a:lstStyle>
-            <a:lvl1pPr algn="l">
-              <a:defRPr sz="1200"/>
-            </a:lvl1pPr>
-          </a:lstStyle>
-          <a:p>
-            <a:endParaRPr lang="en-US"/>
-          </a:p>
-        </p:txBody>
-      </p:sp>
-      <p:sp>
-        <p:nvSpPr>
-          <p:cNvPr id="3" name="Date Placeholder 2"/>
-          <p:cNvSpPr>
-            <a:spLocks noGrp="1"/>
-          </p:cNvSpPr>
-          <p:nvPr>
-            <p:ph type="dt" idx="1"/>
-          </p:nvPr>
-        </p:nvSpPr>
-        <p:spPr>
-          <a:xfrm>
-            <a:off x="3884613" y="0"/>
-            <a:ext cx="2971800" cy="458788"/>
-          </a:xfrm>
-          <a:prstGeom prst="rect">
-            <a:avLst/>
-          </a:prstGeom>
-        </p:spPr>
-        <p:txBody>
-          <a:bodyPr vert="horz" lIns="91440" tIns="45720" rIns="91440" bIns="45720" rtlCol="0"/>
-          <a:lstStyle>
-            <a:lvl1pPr algn="r">
-              <a:defRPr sz="1200"/>
-            </a:lvl1pPr>
-          </a:lstStyle>
-          <a:p>
-            <a:fld id="{5282F153-3F37-0F45-9E97-73ACFA13230C}" type="datetimeFigureOut">
-              <a:rPr lang="en-US"/>
-              <a:t>7/23/19</a:t>
-            </a:fld>
-            <a:endParaRPr lang="en-US"/>
-          </a:p>
-        </p:txBody>
-      </p:sp>
-      <p:sp>
-        <p:nvSpPr>
-          <p:cNvPr id="4" name="Slide Image Placeholder 3"/>
-          <p:cNvSpPr>
-            <a:spLocks noGrp="1" noRot="1" noChangeAspect="1"/>
-          </p:cNvSpPr>
-          <p:nvPr>
-            <p:ph type="sldImg" idx="2"/>
-          </p:nvPr>
-        </p:nvSpPr>
-        <p:spPr>
-          <a:xfrm>
-            <a:off x="685800" y="1143000"/>
-            <a:ext cx="5486400" cy="3086100"/>
-          </a:xfrm>
-          <a:prstGeom prst="rect">
-            <a:avLst/>
-          </a:prstGeom>
-          <a:noFill/>
-          <a:ln w="12700">
-            <a:solidFill>
-              <a:prstClr val="black"/>
-            </a:solidFill>
-          </a:ln>
-        </p:spPr>
-        <p:txBody>
-          <a:bodyPr vert="horz" lIns="91440" tIns="45720" rIns="91440" bIns="45720" rtlCol="0" anchor="ctr"/>
-          <a:lstStyle/>
-          <a:p>
-            <a:endParaRPr lang="en-US"/>
-          </a:p>
-        </p:txBody>
-      </p:sp>
-      <p:sp>
-        <p:nvSpPr>
-          <p:cNvPr id="5" name="Notes Placeholder 4"/>
-          <p:cNvSpPr>
-            <a:spLocks noGrp="1"/>
-          </p:cNvSpPr>
-          <p:nvPr>
-            <p:ph type="body" sz="quarter" idx="3"/>
-          </p:nvPr>
-        </p:nvSpPr>
-        <p:spPr>
-          <a:xfrm>
-            <a:off x="685800" y="4400550"/>
-            <a:ext cx="5486400" cy="3600450"/>
-          </a:xfrm>
-          <a:prstGeom prst="rect">
-            <a:avLst/>
-          </a:prstGeom>
-        </p:spPr>
-        <p:txBody>
-          <a:bodyPr vert="horz" lIns="91440" tIns="45720" rIns="91440" bIns="45720" rtlCol="0"/>
-          <a:lstStyle/>
-          <a:p>
-            <a:pPr lvl="0"/>
-            <a:r>
-              <a:rPr lang="en-US"/>
-              <a:t>Click to edit Master text styles</a:t>
-            </a:r>
-          </a:p>
-          <a:p>
-            <a:pPr lvl="1"/>
-            <a:r>
-              <a:rPr lang="en-US"/>
-              <a:t>Second level</a:t>
-            </a:r>
-          </a:p>
-          <a:p>
-            <a:pPr lvl="2"/>
-            <a:r>
-              <a:rPr lang="en-US"/>
-              <a:t>Third level</a:t>
-            </a:r>
-          </a:p>
-          <a:p>
-            <a:pPr lvl="3"/>
-            <a:r>
-              <a:rPr lang="en-US"/>
-              <a:t>Fourth level</a:t>
-            </a:r>
-          </a:p>
-          <a:p>
-            <a:pPr lvl="4"/>
-            <a:r>
-              <a:rPr lang="en-US"/>
-              <a:t>Fifth level</a:t>
-            </a:r>
-          </a:p>
-        </p:txBody>
-      </p:sp>
-      <p:sp>
-        <p:nvSpPr>
-          <p:cNvPr id="6" name="Footer Placeholder 5"/>
-          <p:cNvSpPr>
-            <a:spLocks noGrp="1"/>
-          </p:cNvSpPr>
-          <p:nvPr>
-            <p:ph type="ftr" sz="quarter" idx="4"/>
-          </p:nvPr>
-        </p:nvSpPr>
-        <p:spPr>
-          <a:xfrm>
-            <a:off x="0" y="8685213"/>
-            <a:ext cx="2971800" cy="458787"/>
-          </a:xfrm>
-          <a:prstGeom prst="rect">
-            <a:avLst/>
-          </a:prstGeom>
-        </p:spPr>
-        <p:txBody>
-          <a:bodyPr vert="horz" lIns="91440" tIns="45720" rIns="91440" bIns="45720" rtlCol="0" anchor="b"/>
-          <a:lstStyle>
-            <a:lvl1pPr algn="l">
-              <a:defRPr sz="1200"/>
-            </a:lvl1pPr>
-          </a:lstStyle>
-          <a:p>
-            <a:endParaRPr lang="en-US"/>
-          </a:p>
-        </p:txBody>
-      </p:sp>
-      <p:sp>
-        <p:nvSpPr>
-          <p:cNvPr id="7" name="Slide Number Placeholder 6"/>
-          <p:cNvSpPr>
-            <a:spLocks noGrp="1"/>
-          </p:cNvSpPr>
-          <p:nvPr>
-            <p:ph type="sldNum" sz="quarter" idx="5"/>
-          </p:nvPr>
-        </p:nvSpPr>
-        <p:spPr>
-          <a:xfrm>
-            <a:off x="3884613" y="8685213"/>
-            <a:ext cx="2971800" cy="458787"/>
-          </a:xfrm>
-          <a:prstGeom prst="rect">
-            <a:avLst/>
-          </a:prstGeom>
-        </p:spPr>
-        <p:txBody>
-          <a:bodyPr vert="horz" lIns="91440" tIns="45720" rIns="91440" bIns="45720" rtlCol="0" anchor="b"/>
-          <a:lstStyle>
-            <a:lvl1pPr algn="r">
-              <a:defRPr sz="1200"/>
-            </a:lvl1pPr>
-          </a:lstStyle>
-          <a:p>
-            <a:fld id="{CE5E9CC1-C706-0F49-92D6-E571CC5EEA8F}" type="slidenum">
-              <a:rPr lang="en-US"/>
-              <a:t>‹#›</a:t>
-            </a:fld>
-            <a:endParaRPr lang="en-US"/>
-          </a:p>
-        </p:txBody>
-      </p:sp>
     </p:spTree>
     <p:extLst>
       <p:ext uri="{BB962C8B-B14F-4D97-AF65-F5344CB8AC3E}">
-        <p14:creationId xmlns:p14="http://schemas.microsoft.com/office/powerpoint/2010/main" val="1024086991"/>
+        <p14:creationId xmlns:p14="http://schemas.microsoft.com/office/powerpoint/2010/main" val="1730260603"/>
       </p:ext>
     </p:extLst>
   </p:cSld>
@@ -510,10 +291,6 @@
           <a:bodyPr/>
           <a:lstStyle/>
           <a:p>
-            <a:r>
-              <a:rPr lang="en-US" dirty="0"/>
-              <a:t/>
-            </a:r>
             <a:endParaRPr lang="en-US" dirty="0"/>
           </a:p>
         </p:txBody>
@@ -598,10 +375,6 @@
           <a:bodyPr/>
           <a:lstStyle/>
           <a:p>
-            <a:r>
-              <a:rPr lang="en-US" dirty="0"/>
-              <a:t/>
-            </a:r>
             <a:endParaRPr lang="en-US" dirty="0"/>
           </a:p>
         </p:txBody>
@@ -686,10 +459,6 @@
           <a:bodyPr/>
           <a:lstStyle/>
           <a:p>
-            <a:r>
-              <a:rPr lang="en-US" dirty="0"/>
-              <a:t/>
-            </a:r>
             <a:endParaRPr lang="en-US" dirty="0"/>
           </a:p>
         </p:txBody>
@@ -774,10 +543,6 @@
           <a:bodyPr/>
           <a:lstStyle/>
           <a:p>
-            <a:r>
-              <a:rPr lang="en-US" dirty="0"/>
-              <a:t/>
-            </a:r>
             <a:endParaRPr lang="en-US" dirty="0"/>
           </a:p>
         </p:txBody>
@@ -862,10 +627,6 @@
           <a:bodyPr/>
           <a:lstStyle/>
           <a:p>
-            <a:r>
-              <a:rPr lang="en-US" dirty="0"/>
-              <a:t/>
-            </a:r>
             <a:endParaRPr lang="en-US" dirty="0"/>
           </a:p>
         </p:txBody>
@@ -950,10 +711,6 @@
           <a:bodyPr/>
           <a:lstStyle/>
           <a:p>
-            <a:r>
-              <a:rPr lang="en-US" dirty="0"/>
-              <a:t/>
-            </a:r>
             <a:endParaRPr lang="en-US" dirty="0"/>
           </a:p>
         </p:txBody>
@@ -1038,10 +795,6 @@
           <a:bodyPr/>
           <a:lstStyle/>
           <a:p>
-            <a:r>
-              <a:rPr lang="en-US" dirty="0"/>
-              <a:t/>
-            </a:r>
             <a:endParaRPr lang="en-US" dirty="0"/>
           </a:p>
         </p:txBody>
@@ -1126,10 +879,6 @@
           <a:bodyPr/>
           <a:lstStyle/>
           <a:p>
-            <a:r>
-              <a:rPr lang="en-US" dirty="0"/>
-              <a:t/>
-            </a:r>
             <a:endParaRPr lang="en-US" dirty="0"/>
           </a:p>
         </p:txBody>
@@ -1214,10 +963,6 @@
           <a:bodyPr/>
           <a:lstStyle/>
           <a:p>
-            <a:r>
-              <a:rPr lang="en-US" dirty="0"/>
-              <a:t/>
-            </a:r>
             <a:endParaRPr lang="en-US" dirty="0"/>
           </a:p>
         </p:txBody>
@@ -1302,10 +1047,6 @@
           <a:bodyPr/>
           <a:lstStyle/>
           <a:p>
-            <a:r>
-              <a:rPr lang="en-US" dirty="0"/>
-              <a:t/>
-            </a:r>
             <a:endParaRPr lang="en-US" dirty="0"/>
           </a:p>
         </p:txBody>
@@ -1390,10 +1131,6 @@
           <a:bodyPr/>
           <a:lstStyle/>
           <a:p>
-            <a:r>
-              <a:rPr lang="en-US" dirty="0"/>
-              <a:t/>
-            </a:r>
             <a:endParaRPr lang="en-US" dirty="0"/>
           </a:p>
         </p:txBody>
@@ -1467,6 +1204,11 @@
 <file path=ppt/slideMasters/slideMaster1.xml><?xml version="1.0" encoding="utf-8"?>
 <p:sldMaster xmlns:a="http://schemas.openxmlformats.org/drawingml/2006/main" xmlns:r="http://schemas.openxmlformats.org/officeDocument/2006/relationships" xmlns:p="http://schemas.openxmlformats.org/presentationml/2006/main">
   <p:cSld>
+    <p:bg>
+      <p:bgRef idx="1001">
+        <a:schemeClr val="bg1"/>
+      </p:bgRef>
+    </p:bg>
     <p:spTree>
       <p:nvGrpSpPr>
         <p:cNvPr id="1" name=""/>
@@ -1749,6 +1491,7 @@
         <a:solidFill>
           <a:srgbClr val="FFFFFF"/>
         </a:solidFill>
+        <a:effectLst/>
       </p:bgPr>
     </p:bg>
     <p:spTree>
@@ -1788,7 +1531,7 @@
           </a:bodyPr>
           <a:lstStyle/>
           <a:p>
-            <a:pPr indent="0" marL="0">
+            <a:pPr marL="0" indent="0">
               <a:buNone/>
             </a:pPr>
             <a:r>
@@ -1805,7 +1548,7 @@
             <a:endParaRPr lang="en-US" sz="3600" dirty="0"/>
           </a:p>
           <a:p>
-            <a:pPr indent="0" marL="0">
+            <a:pPr marL="0" indent="0">
               <a:buNone/>
             </a:pPr>
             <a:r>
@@ -1822,7 +1565,7 @@
             <a:endParaRPr lang="en-US" sz="3600" dirty="0"/>
           </a:p>
           <a:p>
-            <a:pPr indent="0" marL="0">
+            <a:pPr marL="0" indent="0">
               <a:buNone/>
             </a:pPr>
             <a:r>
@@ -1861,7 +1604,7 @@
           <a:bodyPr wrap="square" lIns="0" tIns="0" rIns="0" bIns="0" rtlCol="0" anchor="ctr"/>
           <a:lstStyle/>
           <a:p>
-            <a:pPr indent="0" marL="0">
+            <a:pPr marL="0" indent="0">
               <a:buNone/>
             </a:pPr>
             <a:r>
@@ -1902,7 +1645,7 @@
           </a:bodyPr>
           <a:lstStyle/>
           <a:p>
-            <a:pPr indent="0" marL="0">
+            <a:pPr marL="0" indent="0">
               <a:buNone/>
             </a:pPr>
             <a:r>
@@ -1919,7 +1662,7 @@
             <a:endParaRPr lang="en-US" sz="1250" dirty="0"/>
           </a:p>
           <a:p>
-            <a:pPr indent="0" marL="0">
+            <a:pPr marL="0" indent="0">
               <a:buNone/>
             </a:pPr>
             <a:r>
@@ -1987,7 +1730,7 @@
           </a:bodyPr>
           <a:lstStyle/>
           <a:p>
-            <a:pPr algn="ctr" indent="0" marL="0">
+            <a:pPr marL="0" indent="0" algn="ctr">
               <a:buNone/>
             </a:pPr>
             <a:r>
@@ -2028,7 +1771,7 @@
           </a:bodyPr>
           <a:lstStyle/>
           <a:p>
-            <a:pPr algn="ctr" indent="0" marL="0">
+            <a:pPr marL="0" indent="0" algn="ctr">
               <a:buNone/>
             </a:pPr>
             <a:r>
@@ -2067,7 +1810,7 @@
           <a:bodyPr wrap="square" lIns="0" tIns="0" rIns="0" bIns="0" rtlCol="0" anchor="ctr"/>
           <a:lstStyle/>
           <a:p>
-            <a:pPr algn="r" indent="0" marL="0">
+            <a:pPr marL="0" indent="0" algn="r">
               <a:buNone/>
             </a:pPr>
             <a:r>
@@ -2133,7 +1876,7 @@
           </a:bodyPr>
           <a:lstStyle/>
           <a:p>
-            <a:pPr indent="0" marL="0">
+            <a:pPr marL="0" indent="0">
               <a:buNone/>
             </a:pPr>
             <a:r>
@@ -2172,7 +1915,7 @@
           <a:bodyPr wrap="square" lIns="0" tIns="0" rIns="0" bIns="0" rtlCol="0" anchor="ctr"/>
           <a:lstStyle/>
           <a:p>
-            <a:pPr indent="0" marL="0">
+            <a:pPr marL="0" indent="0">
               <a:buNone/>
             </a:pPr>
             <a:r>
@@ -2236,7 +1979,7 @@
           </a:bodyPr>
           <a:lstStyle/>
           <a:p>
-            <a:pPr indent="0" marL="0">
+            <a:pPr marL="0" indent="0">
               <a:buNone/>
             </a:pPr>
             <a:r>
@@ -2414,7 +2157,7 @@
           </a:bodyPr>
           <a:lstStyle/>
           <a:p>
-            <a:pPr indent="0" marL="0">
+            <a:pPr marL="0" indent="0">
               <a:buNone/>
             </a:pPr>
             <a:r>
@@ -2567,7 +2310,7 @@
           <a:bodyPr wrap="square" lIns="0" tIns="0" rIns="0" bIns="0" rtlCol="0" anchor="ctr"/>
           <a:lstStyle/>
           <a:p>
-            <a:pPr algn="r" indent="0" marL="0">
+            <a:pPr marL="0" indent="0" algn="r">
               <a:buNone/>
             </a:pPr>
             <a:r>
@@ -2633,7 +2376,7 @@
           </a:bodyPr>
           <a:lstStyle/>
           <a:p>
-            <a:pPr indent="0" marL="0">
+            <a:pPr marL="0" indent="0">
               <a:buNone/>
             </a:pPr>
             <a:r>
@@ -2672,7 +2415,7 @@
           <a:bodyPr wrap="square" lIns="0" tIns="0" rIns="0" bIns="0" rtlCol="0" anchor="ctr"/>
           <a:lstStyle/>
           <a:p>
-            <a:pPr indent="0" marL="0">
+            <a:pPr marL="0" indent="0">
               <a:buNone/>
             </a:pPr>
             <a:r>
@@ -2736,7 +2479,7 @@
           </a:bodyPr>
           <a:lstStyle/>
           <a:p>
-            <a:pPr indent="0" marL="0">
+            <a:pPr marL="0" indent="0">
               <a:buNone/>
             </a:pPr>
             <a:r>
@@ -2878,7 +2621,7 @@
           </a:bodyPr>
           <a:lstStyle/>
           <a:p>
-            <a:pPr indent="0" marL="0">
+            <a:pPr marL="0" indent="0">
               <a:buNone/>
             </a:pPr>
             <a:r>
@@ -3015,7 +2758,7 @@
           </a:bodyPr>
           <a:lstStyle/>
           <a:p>
-            <a:pPr algn="ctr" indent="0" marL="0">
+            <a:pPr marL="0" indent="0" algn="ctr">
               <a:buNone/>
             </a:pPr>
             <a:r>
@@ -3054,7 +2797,7 @@
           <a:bodyPr wrap="square" lIns="0" tIns="0" rIns="0" bIns="0" rtlCol="0" anchor="ctr"/>
           <a:lstStyle/>
           <a:p>
-            <a:pPr algn="r" indent="0" marL="0">
+            <a:pPr marL="0" indent="0" algn="r">
               <a:buNone/>
             </a:pPr>
             <a:r>
@@ -3120,7 +2863,7 @@
           </a:bodyPr>
           <a:lstStyle/>
           <a:p>
-            <a:pPr indent="0" marL="0">
+            <a:pPr marL="0" indent="0">
               <a:buNone/>
             </a:pPr>
             <a:r>
@@ -3159,7 +2902,7 @@
           <a:bodyPr wrap="square" lIns="0" tIns="0" rIns="0" bIns="0" rtlCol="0" anchor="ctr"/>
           <a:lstStyle/>
           <a:p>
-            <a:pPr indent="0" marL="0">
+            <a:pPr marL="0" indent="0">
               <a:buNone/>
             </a:pPr>
             <a:r>
@@ -3337,7 +3080,7 @@
           </a:bodyPr>
           <a:lstStyle/>
           <a:p>
-            <a:pPr indent="0" marL="0">
+            <a:pPr marL="0" indent="0">
               <a:buNone/>
             </a:pPr>
             <a:r>
@@ -3405,7 +3148,7 @@
           </a:bodyPr>
           <a:lstStyle/>
           <a:p>
-            <a:pPr algn="ctr" indent="0" marL="0">
+            <a:pPr marL="0" indent="0" algn="ctr">
               <a:buNone/>
             </a:pPr>
             <a:r>
@@ -3446,7 +3189,7 @@
           </a:bodyPr>
           <a:lstStyle/>
           <a:p>
-            <a:pPr algn="ctr" indent="0" marL="0">
+            <a:pPr marL="0" indent="0" algn="ctr">
               <a:buNone/>
             </a:pPr>
             <a:r>
@@ -3485,7 +3228,7 @@
           <a:bodyPr wrap="square" lIns="0" tIns="0" rIns="0" bIns="0" rtlCol="0" anchor="ctr"/>
           <a:lstStyle/>
           <a:p>
-            <a:pPr algn="r" indent="0" marL="0">
+            <a:pPr marL="0" indent="0" algn="r">
               <a:buNone/>
             </a:pPr>
             <a:r>
@@ -3551,7 +3294,7 @@
           </a:bodyPr>
           <a:lstStyle/>
           <a:p>
-            <a:pPr indent="0" marL="0">
+            <a:pPr marL="0" indent="0">
               <a:buNone/>
             </a:pPr>
             <a:r>
@@ -3590,7 +3333,7 @@
           <a:bodyPr wrap="square" lIns="0" tIns="0" rIns="0" bIns="0" rtlCol="0" anchor="ctr"/>
           <a:lstStyle/>
           <a:p>
-            <a:pPr indent="0" marL="0">
+            <a:pPr marL="0" indent="0">
               <a:buNone/>
             </a:pPr>
             <a:r>
@@ -3654,7 +3397,7 @@
           </a:bodyPr>
           <a:lstStyle/>
           <a:p>
-            <a:pPr indent="0" marL="0">
+            <a:pPr marL="0" indent="0">
               <a:buNone/>
             </a:pPr>
             <a:r>
@@ -3832,7 +3575,7 @@
           </a:bodyPr>
           <a:lstStyle/>
           <a:p>
-            <a:pPr indent="0" marL="0">
+            <a:pPr marL="0" indent="0">
               <a:buNone/>
             </a:pPr>
             <a:r>
@@ -3985,7 +3728,7 @@
           <a:bodyPr wrap="square" lIns="0" tIns="0" rIns="0" bIns="0" rtlCol="0" anchor="ctr"/>
           <a:lstStyle/>
           <a:p>
-            <a:pPr algn="ctr" indent="0" marL="0">
+            <a:pPr marL="0" indent="0" algn="ctr">
               <a:buNone/>
             </a:pPr>
             <a:r>
@@ -4024,7 +3767,7 @@
           <a:bodyPr wrap="square" lIns="0" tIns="0" rIns="0" bIns="0" rtlCol="0" anchor="ctr"/>
           <a:lstStyle/>
           <a:p>
-            <a:pPr algn="r" indent="0" marL="0">
+            <a:pPr marL="0" indent="0" algn="r">
               <a:buNone/>
             </a:pPr>
             <a:r>
@@ -4090,7 +3833,7 @@
           </a:bodyPr>
           <a:lstStyle/>
           <a:p>
-            <a:pPr indent="0" marL="0">
+            <a:pPr marL="0" indent="0">
               <a:buNone/>
             </a:pPr>
             <a:r>
@@ -4129,7 +3872,7 @@
           <a:bodyPr wrap="square" lIns="0" tIns="0" rIns="0" bIns="0" rtlCol="0" anchor="ctr"/>
           <a:lstStyle/>
           <a:p>
-            <a:pPr indent="0" marL="0">
+            <a:pPr marL="0" indent="0">
               <a:buNone/>
             </a:pPr>
             <a:r>
@@ -4193,7 +3936,7 @@
           </a:bodyPr>
           <a:lstStyle/>
           <a:p>
-            <a:pPr indent="0" marL="0">
+            <a:pPr marL="0" indent="0">
               <a:buNone/>
             </a:pPr>
             <a:r>
@@ -4317,7 +4060,7 @@
           </a:bodyPr>
           <a:lstStyle/>
           <a:p>
-            <a:pPr indent="0" marL="0">
+            <a:pPr marL="0" indent="0">
               <a:buNone/>
             </a:pPr>
             <a:r>
@@ -4441,7 +4184,7 @@
           </a:bodyPr>
           <a:lstStyle/>
           <a:p>
-            <a:pPr indent="0" marL="0">
+            <a:pPr marL="0" indent="0">
               <a:buNone/>
             </a:pPr>
             <a:r>
@@ -4583,7 +4326,7 @@
           </a:bodyPr>
           <a:lstStyle/>
           <a:p>
-            <a:pPr indent="0" marL="0">
+            <a:pPr marL="0" indent="0">
               <a:buNone/>
             </a:pPr>
             <a:r>
@@ -4609,7 +4352,7 @@
         </p:nvSpPr>
         <p:spPr>
           <a:xfrm>
-            <a:off x="4343400" y="4965192"/>
+            <a:off x="4343400" y="5178437"/>
             <a:ext cx="6949440" cy="868680"/>
           </a:xfrm>
           <a:prstGeom prst="rect">
@@ -4620,7 +4363,7 @@
         </p:spPr>
         <p:txBody>
           <a:bodyPr wrap="square" lIns="381" tIns="381" rIns="381" bIns="381" rtlCol="0" anchor="ctr">
-            <a:normAutofit/>
+            <a:normAutofit fontScale="92500" lnSpcReduction="20000"/>
           </a:bodyPr>
           <a:lstStyle/>
           <a:p>
@@ -4736,7 +4479,7 @@
           <a:bodyPr wrap="square" lIns="0" tIns="0" rIns="0" bIns="0" rtlCol="0" anchor="ctr"/>
           <a:lstStyle/>
           <a:p>
-            <a:pPr algn="r" indent="0" marL="0">
+            <a:pPr marL="0" indent="0" algn="r">
               <a:buNone/>
             </a:pPr>
             <a:r>
@@ -4802,7 +4545,7 @@
           </a:bodyPr>
           <a:lstStyle/>
           <a:p>
-            <a:pPr indent="0" marL="0">
+            <a:pPr marL="0" indent="0">
               <a:buNone/>
             </a:pPr>
             <a:r>
@@ -4841,7 +4584,7 @@
           <a:bodyPr wrap="square" lIns="0" tIns="0" rIns="0" bIns="0" rtlCol="0" anchor="ctr"/>
           <a:lstStyle/>
           <a:p>
-            <a:pPr indent="0" marL="0">
+            <a:pPr marL="0" indent="0">
               <a:buNone/>
             </a:pPr>
             <a:r>
@@ -4932,7 +4675,7 @@
           </a:bodyPr>
           <a:lstStyle/>
           <a:p>
-            <a:pPr algn="ctr" indent="0" marL="0">
+            <a:pPr marL="0" indent="0" algn="ctr">
               <a:buNone/>
             </a:pPr>
             <a:r>
@@ -4973,7 +4716,7 @@
           </a:bodyPr>
           <a:lstStyle/>
           <a:p>
-            <a:pPr algn="ctr" indent="0" marL="0">
+            <a:pPr marL="0" indent="0" algn="ctr">
               <a:buNone/>
             </a:pPr>
             <a:r>
@@ -5014,7 +4757,7 @@
           </a:bodyPr>
           <a:lstStyle/>
           <a:p>
-            <a:pPr indent="0" marL="0">
+            <a:pPr marL="0" indent="0">
               <a:buNone/>
             </a:pPr>
             <a:r>
@@ -5167,7 +4910,7 @@
           <a:bodyPr wrap="square" lIns="0" tIns="0" rIns="0" bIns="0" rtlCol="0" anchor="ctr"/>
           <a:lstStyle/>
           <a:p>
-            <a:pPr algn="r" indent="0" marL="0">
+            <a:pPr marL="0" indent="0" algn="r">
               <a:buNone/>
             </a:pPr>
             <a:r>
@@ -5233,7 +4976,7 @@
           </a:bodyPr>
           <a:lstStyle/>
           <a:p>
-            <a:pPr indent="0" marL="0">
+            <a:pPr marL="0" indent="0">
               <a:buNone/>
             </a:pPr>
             <a:r>
@@ -5272,7 +5015,7 @@
           <a:bodyPr wrap="square" lIns="0" tIns="0" rIns="0" bIns="0" rtlCol="0" anchor="ctr"/>
           <a:lstStyle/>
           <a:p>
-            <a:pPr indent="0" marL="0">
+            <a:pPr marL="0" indent="0">
               <a:buNone/>
             </a:pPr>
             <a:r>
@@ -5363,7 +5106,7 @@
           </a:bodyPr>
           <a:lstStyle/>
           <a:p>
-            <a:pPr algn="ctr" indent="0" marL="0">
+            <a:pPr marL="0" indent="0" algn="ctr">
               <a:buNone/>
             </a:pPr>
             <a:r>
@@ -5404,7 +5147,7 @@
           </a:bodyPr>
           <a:lstStyle/>
           <a:p>
-            <a:pPr algn="ctr" indent="0" marL="0">
+            <a:pPr marL="0" indent="0" algn="ctr">
               <a:buNone/>
             </a:pPr>
             <a:r>
@@ -5445,7 +5188,7 @@
           </a:bodyPr>
           <a:lstStyle/>
           <a:p>
-            <a:pPr algn="ctr" indent="0" marL="0">
+            <a:pPr marL="0" indent="0" algn="ctr">
               <a:buNone/>
             </a:pPr>
             <a:r>
@@ -5484,7 +5227,7 @@
           <a:bodyPr wrap="square" lIns="0" tIns="0" rIns="0" bIns="0" rtlCol="0" anchor="ctr"/>
           <a:lstStyle/>
           <a:p>
-            <a:pPr algn="r" indent="0" marL="0">
+            <a:pPr marL="0" indent="0" algn="r">
               <a:buNone/>
             </a:pPr>
             <a:r>
@@ -5550,7 +5293,7 @@
           </a:bodyPr>
           <a:lstStyle/>
           <a:p>
-            <a:pPr indent="0" marL="0">
+            <a:pPr marL="0" indent="0">
               <a:buNone/>
             </a:pPr>
             <a:r>
@@ -5589,7 +5332,7 @@
           <a:bodyPr wrap="square" lIns="0" tIns="0" rIns="0" bIns="0" rtlCol="0" anchor="ctr"/>
           <a:lstStyle/>
           <a:p>
-            <a:pPr indent="0" marL="0">
+            <a:pPr marL="0" indent="0">
               <a:buNone/>
             </a:pPr>
             <a:r>
@@ -5680,7 +5423,7 @@
           </a:bodyPr>
           <a:lstStyle/>
           <a:p>
-            <a:pPr algn="ctr" indent="0" marL="0">
+            <a:pPr marL="0" indent="0" algn="ctr">
               <a:buNone/>
             </a:pPr>
             <a:r>
@@ -5721,7 +5464,7 @@
           </a:bodyPr>
           <a:lstStyle/>
           <a:p>
-            <a:pPr algn="ctr" indent="0" marL="0">
+            <a:pPr marL="0" indent="0" algn="ctr">
               <a:buNone/>
             </a:pPr>
             <a:r>
@@ -5762,7 +5505,7 @@
           </a:bodyPr>
           <a:lstStyle/>
           <a:p>
-            <a:pPr indent="0" marL="0">
+            <a:pPr marL="0" indent="0">
               <a:buNone/>
             </a:pPr>
             <a:r>
@@ -5897,7 +5640,7 @@
           <a:bodyPr wrap="square" lIns="0" tIns="0" rIns="0" bIns="0" rtlCol="0" anchor="ctr"/>
           <a:lstStyle/>
           <a:p>
-            <a:pPr algn="r" indent="0" marL="0">
+            <a:pPr marL="0" indent="0" algn="r">
               <a:buNone/>
             </a:pPr>
             <a:r>
@@ -5963,7 +5706,7 @@
           </a:bodyPr>
           <a:lstStyle/>
           <a:p>
-            <a:pPr indent="0" marL="0">
+            <a:pPr marL="0" indent="0">
               <a:buNone/>
             </a:pPr>
             <a:r>
@@ -6002,7 +5745,7 @@
           <a:bodyPr wrap="square" lIns="0" tIns="0" rIns="0" bIns="0" rtlCol="0" anchor="ctr"/>
           <a:lstStyle/>
           <a:p>
-            <a:pPr indent="0" marL="0">
+            <a:pPr marL="0" indent="0">
               <a:buNone/>
             </a:pPr>
             <a:r>
@@ -6093,7 +5836,7 @@
           </a:bodyPr>
           <a:lstStyle/>
           <a:p>
-            <a:pPr algn="ctr" indent="0" marL="0">
+            <a:pPr marL="0" indent="0" algn="ctr">
               <a:buNone/>
             </a:pPr>
             <a:r>
@@ -6134,7 +5877,7 @@
           </a:bodyPr>
           <a:lstStyle/>
           <a:p>
-            <a:pPr algn="ctr" indent="0" marL="0">
+            <a:pPr marL="0" indent="0" algn="ctr">
               <a:buNone/>
             </a:pPr>
             <a:r>
@@ -6175,7 +5918,7 @@
           </a:bodyPr>
           <a:lstStyle/>
           <a:p>
-            <a:pPr indent="0" marL="0">
+            <a:pPr marL="0" indent="0">
               <a:buNone/>
             </a:pPr>
             <a:r>
@@ -6214,7 +5957,7 @@
           <a:bodyPr wrap="square" lIns="0" tIns="0" rIns="0" bIns="0" rtlCol="0" anchor="ctr"/>
           <a:lstStyle/>
           <a:p>
-            <a:pPr indent="0" marL="0">
+            <a:pPr marL="0" indent="0">
               <a:buNone/>
             </a:pPr>
             <a:r>
@@ -6331,7 +6074,7 @@
           <a:bodyPr wrap="square" lIns="0" tIns="0" rIns="0" bIns="0" rtlCol="0" anchor="ctr"/>
           <a:lstStyle/>
           <a:p>
-            <a:pPr indent="0" marL="0">
+            <a:pPr marL="0" indent="0">
               <a:buNone/>
             </a:pPr>
             <a:r>
@@ -6448,7 +6191,7 @@
           <a:bodyPr wrap="square" lIns="0" tIns="0" rIns="0" bIns="0" rtlCol="0" anchor="ctr"/>
           <a:lstStyle/>
           <a:p>
-            <a:pPr algn="r" indent="0" marL="0">
+            <a:pPr marL="0" indent="0" algn="r">
               <a:buNone/>
             </a:pPr>
             <a:r>
@@ -6514,7 +6257,7 @@
           </a:bodyPr>
           <a:lstStyle/>
           <a:p>
-            <a:pPr indent="0" marL="0">
+            <a:pPr marL="0" indent="0">
               <a:buNone/>
             </a:pPr>
             <a:r>
@@ -6553,7 +6296,7 @@
           <a:bodyPr wrap="square" lIns="0" tIns="0" rIns="0" bIns="0" rtlCol="0" anchor="ctr"/>
           <a:lstStyle/>
           <a:p>
-            <a:pPr indent="0" marL="0">
+            <a:pPr marL="0" indent="0">
               <a:buNone/>
             </a:pPr>
             <a:r>
@@ -6644,7 +6387,7 @@
           </a:bodyPr>
           <a:lstStyle/>
           <a:p>
-            <a:pPr algn="ctr" indent="0" marL="0">
+            <a:pPr marL="0" indent="0" algn="ctr">
               <a:buNone/>
             </a:pPr>
             <a:r>
@@ -6685,7 +6428,7 @@
           </a:bodyPr>
           <a:lstStyle/>
           <a:p>
-            <a:pPr algn="ctr" indent="0" marL="0">
+            <a:pPr marL="0" indent="0" algn="ctr">
               <a:buNone/>
             </a:pPr>
             <a:r>
@@ -6726,7 +6469,7 @@
           </a:bodyPr>
           <a:lstStyle/>
           <a:p>
-            <a:pPr indent="0" marL="0">
+            <a:pPr marL="0" indent="0">
               <a:buNone/>
             </a:pPr>
             <a:r>
@@ -6767,7 +6510,7 @@
           </a:bodyPr>
           <a:lstStyle/>
           <a:p>
-            <a:pPr indent="0" marL="0">
+            <a:pPr marL="0" indent="0">
               <a:buNone/>
             </a:pPr>
             <a:r>
@@ -6806,7 +6549,7 @@
           <a:bodyPr wrap="square" lIns="0" tIns="0" rIns="0" bIns="0" rtlCol="0" anchor="ctr"/>
           <a:lstStyle/>
           <a:p>
-            <a:pPr algn="r" indent="0" marL="0">
+            <a:pPr marL="0" indent="0" algn="r">
               <a:buNone/>
             </a:pPr>
             <a:r>
@@ -7125,4 +6868,299 @@
     </a:ext>
   </a:extLst>
 </a:theme>
+</file>
+
+<file path=ppt/theme/theme2.xml><?xml version="1.0" encoding="utf-8"?>
+<a:theme xmlns:a="http://schemas.openxmlformats.org/drawingml/2006/main" name="Office Theme">
+  <a:themeElements>
+    <a:clrScheme name="Office">
+      <a:dk1>
+        <a:sysClr val="windowText" lastClr="000000"/>
+      </a:dk1>
+      <a:lt1>
+        <a:sysClr val="window" lastClr="FFFFFF"/>
+      </a:lt1>
+      <a:dk2>
+        <a:srgbClr val="44546A"/>
+      </a:dk2>
+      <a:lt2>
+        <a:srgbClr val="E7E6E6"/>
+      </a:lt2>
+      <a:accent1>
+        <a:srgbClr val="4472C4"/>
+      </a:accent1>
+      <a:accent2>
+        <a:srgbClr val="ED7D31"/>
+      </a:accent2>
+      <a:accent3>
+        <a:srgbClr val="A5A5A5"/>
+      </a:accent3>
+      <a:accent4>
+        <a:srgbClr val="FFC000"/>
+      </a:accent4>
+      <a:accent5>
+        <a:srgbClr val="5B9BD5"/>
+      </a:accent5>
+      <a:accent6>
+        <a:srgbClr val="70AD47"/>
+      </a:accent6>
+      <a:hlink>
+        <a:srgbClr val="0563C1"/>
+      </a:hlink>
+      <a:folHlink>
+        <a:srgbClr val="954F72"/>
+      </a:folHlink>
+    </a:clrScheme>
+    <a:fontScheme name="Office">
+      <a:majorFont>
+        <a:latin typeface="Calibri Light" panose="020F0302020204030204"/>
+        <a:ea typeface=""/>
+        <a:cs typeface=""/>
+        <a:font script="Jpan" typeface="游ゴシック Light"/>
+        <a:font script="Hang" typeface="맑은 고딕"/>
+        <a:font script="Hans" typeface="等线 Light"/>
+        <a:font script="Hant" typeface="新細明體"/>
+        <a:font script="Arab" typeface="Times New Roman"/>
+        <a:font script="Hebr" typeface="Times New Roman"/>
+        <a:font script="Thai" typeface="Angsana New"/>
+        <a:font script="Ethi" typeface="Nyala"/>
+        <a:font script="Beng" typeface="Vrinda"/>
+        <a:font script="Gujr" typeface="Shruti"/>
+        <a:font script="Khmr" typeface="MoolBoran"/>
+        <a:font script="Knda" typeface="Tunga"/>
+        <a:font script="Guru" typeface="Raavi"/>
+        <a:font script="Cans" typeface="Euphemia"/>
+        <a:font script="Cher" typeface="Plantagenet Cherokee"/>
+        <a:font script="Yiii" typeface="Microsoft Yi Baiti"/>
+        <a:font script="Tibt" typeface="Microsoft Himalaya"/>
+        <a:font script="Thaa" typeface="MV Boli"/>
+        <a:font script="Deva" typeface="Mangal"/>
+        <a:font script="Telu" typeface="Gautami"/>
+        <a:font script="Taml" typeface="Latha"/>
+        <a:font script="Syrc" typeface="Estrangelo Edessa"/>
+        <a:font script="Orya" typeface="Kalinga"/>
+        <a:font script="Mlym" typeface="Kartika"/>
+        <a:font script="Laoo" typeface="DokChampa"/>
+        <a:font script="Sinh" typeface="Iskoola Pota"/>
+        <a:font script="Mong" typeface="Mongolian Baiti"/>
+        <a:font script="Viet" typeface="Times New Roman"/>
+        <a:font script="Uigh" typeface="Microsoft Uighur"/>
+        <a:font script="Geor" typeface="Sylfaen"/>
+        <a:font script="Armn" typeface="Arial"/>
+        <a:font script="Bugi" typeface="Leelawadee UI"/>
+        <a:font script="Bopo" typeface="Microsoft JhengHei"/>
+        <a:font script="Java" typeface="Javanese Text"/>
+        <a:font script="Lisu" typeface="Segoe UI"/>
+        <a:font script="Mymr" typeface="Myanmar Text"/>
+        <a:font script="Nkoo" typeface="Ebrima"/>
+        <a:font script="Olck" typeface="Nirmala UI"/>
+        <a:font script="Osma" typeface="Ebrima"/>
+        <a:font script="Phag" typeface="Phagspa"/>
+        <a:font script="Syrn" typeface="Estrangelo Edessa"/>
+        <a:font script="Syrj" typeface="Estrangelo Edessa"/>
+        <a:font script="Syre" typeface="Estrangelo Edessa"/>
+        <a:font script="Sora" typeface="Nirmala UI"/>
+        <a:font script="Tale" typeface="Microsoft Tai Le"/>
+        <a:font script="Talu" typeface="Microsoft New Tai Lue"/>
+        <a:font script="Tfng" typeface="Ebrima"/>
+      </a:majorFont>
+      <a:minorFont>
+        <a:latin typeface="Calibri" panose="020F0502020204030204"/>
+        <a:ea typeface=""/>
+        <a:cs typeface=""/>
+        <a:font script="Jpan" typeface="游ゴシック"/>
+        <a:font script="Hang" typeface="맑은 고딕"/>
+        <a:font script="Hans" typeface="等线"/>
+        <a:font script="Hant" typeface="新細明體"/>
+        <a:font script="Arab" typeface="Arial"/>
+        <a:font script="Hebr" typeface="Arial"/>
+        <a:font script="Thai" typeface="Cordia New"/>
+        <a:font script="Ethi" typeface="Nyala"/>
+        <a:font script="Beng" typeface="Vrinda"/>
+        <a:font script="Gujr" typeface="Shruti"/>
+        <a:font script="Khmr" typeface="DaunPenh"/>
+        <a:font script="Knda" typeface="Tunga"/>
+        <a:font script="Guru" typeface="Raavi"/>
+        <a:font script="Cans" typeface="Euphemia"/>
+        <a:font script="Cher" typeface="Plantagenet Cherokee"/>
+        <a:font script="Yiii" typeface="Microsoft Yi Baiti"/>
+        <a:font script="Tibt" typeface="Microsoft Himalaya"/>
+        <a:font script="Thaa" typeface="MV Boli"/>
+        <a:font script="Deva" typeface="Mangal"/>
+        <a:font script="Telu" typeface="Gautami"/>
+        <a:font script="Taml" typeface="Latha"/>
+        <a:font script="Syrc" typeface="Estrangelo Edessa"/>
+        <a:font script="Orya" typeface="Kalinga"/>
+        <a:font script="Mlym" typeface="Kartika"/>
+        <a:font script="Laoo" typeface="DokChampa"/>
+        <a:font script="Sinh" typeface="Iskoola Pota"/>
+        <a:font script="Mong" typeface="Mongolian Baiti"/>
+        <a:font script="Viet" typeface="Arial"/>
+        <a:font script="Uigh" typeface="Microsoft Uighur"/>
+        <a:font script="Geor" typeface="Sylfaen"/>
+        <a:font script="Armn" typeface="Arial"/>
+        <a:font script="Bugi" typeface="Leelawadee UI"/>
+        <a:font script="Bopo" typeface="Microsoft JhengHei"/>
+        <a:font script="Java" typeface="Javanese Text"/>
+        <a:font script="Lisu" typeface="Segoe UI"/>
+        <a:font script="Mymr" typeface="Myanmar Text"/>
+        <a:font script="Nkoo" typeface="Ebrima"/>
+        <a:font script="Olck" typeface="Nirmala UI"/>
+        <a:font script="Osma" typeface="Ebrima"/>
+        <a:font script="Phag" typeface="Phagspa"/>
+        <a:font script="Syrn" typeface="Estrangelo Edessa"/>
+        <a:font script="Syrj" typeface="Estrangelo Edessa"/>
+        <a:font script="Syre" typeface="Estrangelo Edessa"/>
+        <a:font script="Sora" typeface="Nirmala UI"/>
+        <a:font script="Tale" typeface="Microsoft Tai Le"/>
+        <a:font script="Talu" typeface="Microsoft New Tai Lue"/>
+        <a:font script="Tfng" typeface="Ebrima"/>
+      </a:minorFont>
+    </a:fontScheme>
+    <a:fmtScheme name="Office">
+      <a:fillStyleLst>
+        <a:solidFill>
+          <a:schemeClr val="phClr"/>
+        </a:solidFill>
+        <a:gradFill rotWithShape="1">
+          <a:gsLst>
+            <a:gs pos="0">
+              <a:schemeClr val="phClr">
+                <a:lumMod val="110000"/>
+                <a:satMod val="105000"/>
+                <a:tint val="67000"/>
+              </a:schemeClr>
+            </a:gs>
+            <a:gs pos="50000">
+              <a:schemeClr val="phClr">
+                <a:lumMod val="105000"/>
+                <a:satMod val="103000"/>
+                <a:tint val="73000"/>
+              </a:schemeClr>
+            </a:gs>
+            <a:gs pos="100000">
+              <a:schemeClr val="phClr">
+                <a:lumMod val="105000"/>
+                <a:satMod val="109000"/>
+                <a:tint val="81000"/>
+              </a:schemeClr>
+            </a:gs>
+          </a:gsLst>
+          <a:lin ang="5400000" scaled="0"/>
+        </a:gradFill>
+        <a:gradFill rotWithShape="1">
+          <a:gsLst>
+            <a:gs pos="0">
+              <a:schemeClr val="phClr">
+                <a:satMod val="103000"/>
+                <a:lumMod val="102000"/>
+                <a:tint val="94000"/>
+              </a:schemeClr>
+            </a:gs>
+            <a:gs pos="50000">
+              <a:schemeClr val="phClr">
+                <a:satMod val="110000"/>
+                <a:lumMod val="100000"/>
+                <a:shade val="100000"/>
+              </a:schemeClr>
+            </a:gs>
+            <a:gs pos="100000">
+              <a:schemeClr val="phClr">
+                <a:lumMod val="99000"/>
+                <a:satMod val="120000"/>
+                <a:shade val="78000"/>
+              </a:schemeClr>
+            </a:gs>
+          </a:gsLst>
+          <a:lin ang="5400000" scaled="0"/>
+        </a:gradFill>
+      </a:fillStyleLst>
+      <a:lnStyleLst>
+        <a:ln w="6350" cap="flat" cmpd="sng" algn="ctr">
+          <a:solidFill>
+            <a:schemeClr val="phClr"/>
+          </a:solidFill>
+          <a:prstDash val="solid"/>
+          <a:miter lim="800000"/>
+        </a:ln>
+        <a:ln w="12700" cap="flat" cmpd="sng" algn="ctr">
+          <a:solidFill>
+            <a:schemeClr val="phClr"/>
+          </a:solidFill>
+          <a:prstDash val="solid"/>
+          <a:miter lim="800000"/>
+        </a:ln>
+        <a:ln w="19050" cap="flat" cmpd="sng" algn="ctr">
+          <a:solidFill>
+            <a:schemeClr val="phClr"/>
+          </a:solidFill>
+          <a:prstDash val="solid"/>
+          <a:miter lim="800000"/>
+        </a:ln>
+      </a:lnStyleLst>
+      <a:effectStyleLst>
+        <a:effectStyle>
+          <a:effectLst/>
+        </a:effectStyle>
+        <a:effectStyle>
+          <a:effectLst/>
+        </a:effectStyle>
+        <a:effectStyle>
+          <a:effectLst>
+            <a:outerShdw blurRad="57150" dist="19050" dir="5400000" algn="ctr" rotWithShape="0">
+              <a:srgbClr val="000000">
+                <a:alpha val="63000"/>
+              </a:srgbClr>
+            </a:outerShdw>
+          </a:effectLst>
+        </a:effectStyle>
+      </a:effectStyleLst>
+      <a:bgFillStyleLst>
+        <a:solidFill>
+          <a:schemeClr val="phClr"/>
+        </a:solidFill>
+        <a:solidFill>
+          <a:schemeClr val="phClr">
+            <a:tint val="95000"/>
+            <a:satMod val="170000"/>
+          </a:schemeClr>
+        </a:solidFill>
+        <a:gradFill rotWithShape="1">
+          <a:gsLst>
+            <a:gs pos="0">
+              <a:schemeClr val="phClr">
+                <a:tint val="93000"/>
+                <a:satMod val="150000"/>
+                <a:shade val="98000"/>
+                <a:lumMod val="102000"/>
+              </a:schemeClr>
+            </a:gs>
+            <a:gs pos="50000">
+              <a:schemeClr val="phClr">
+                <a:tint val="98000"/>
+                <a:satMod val="130000"/>
+                <a:shade val="90000"/>
+                <a:lumMod val="103000"/>
+              </a:schemeClr>
+            </a:gs>
+            <a:gs pos="100000">
+              <a:schemeClr val="phClr">
+                <a:shade val="63000"/>
+                <a:satMod val="120000"/>
+              </a:schemeClr>
+            </a:gs>
+          </a:gsLst>
+          <a:lin ang="5400000" scaled="0"/>
+        </a:gradFill>
+      </a:bgFillStyleLst>
+    </a:fmtScheme>
+  </a:themeElements>
+  <a:objectDefaults/>
+  <a:extraClrSchemeLst/>
+  <a:extLst>
+    <a:ext uri="{05A4C25C-085E-4340-85A3-A5531E510DB2}">
+      <thm15:themeFamily xmlns:thm15="http://schemas.microsoft.com/office/thememl/2012/main" name="Office Theme" id="{62F939B6-93AF-4DB8-9C6B-D6C7DFDC589F}" vid="{4A3C46E8-61CC-4603-A589-7422A47A8E4A}"/>
+    </a:ext>
+  </a:extLst>
+</a:theme>
 </file>
--- a/Presentation/Smart_Parking_Presentation_Basic.pptx
+++ b/Presentation/Smart_Parking_Presentation_Basic.pptx
@@ -5,20 +5,24 @@
     <p:sldMasterId id="2147483648" r:id="rId1"/>
   </p:sldMasterIdLst>
   <p:notesMasterIdLst>
-    <p:notesMasterId r:id="rId13"/>
+    <p:notesMasterId r:id="rId17"/>
   </p:notesMasterIdLst>
   <p:sldIdLst>
     <p:sldId id="256" r:id="rId2"/>
     <p:sldId id="257" r:id="rId3"/>
-    <p:sldId id="258" r:id="rId4"/>
-    <p:sldId id="259" r:id="rId5"/>
-    <p:sldId id="260" r:id="rId6"/>
-    <p:sldId id="261" r:id="rId7"/>
-    <p:sldId id="262" r:id="rId8"/>
-    <p:sldId id="263" r:id="rId9"/>
-    <p:sldId id="264" r:id="rId10"/>
-    <p:sldId id="265" r:id="rId11"/>
-    <p:sldId id="266" r:id="rId12"/>
+    <p:sldId id="270" r:id="rId4"/>
+    <p:sldId id="258" r:id="rId5"/>
+    <p:sldId id="259" r:id="rId6"/>
+    <p:sldId id="260" r:id="rId7"/>
+    <p:sldId id="261" r:id="rId8"/>
+    <p:sldId id="262" r:id="rId9"/>
+    <p:sldId id="263" r:id="rId10"/>
+    <p:sldId id="269" r:id="rId11"/>
+    <p:sldId id="264" r:id="rId12"/>
+    <p:sldId id="267" r:id="rId13"/>
+    <p:sldId id="265" r:id="rId14"/>
+    <p:sldId id="268" r:id="rId15"/>
+    <p:sldId id="266" r:id="rId16"/>
   </p:sldIdLst>
   <p:sldSz cx="12192000" cy="6858000"/>
   <p:notesSz cx="6858000" cy="12192000"/>
@@ -336,7 +340,13 @@
   <p:cSld>
     <p:spTree>
       <p:nvGrpSpPr>
-        <p:cNvPr id="1" name=""/>
+        <p:cNvPr id="1" name="">
+          <a:extLst>
+            <a:ext uri="{FF2B5EF4-FFF2-40B4-BE49-F238E27FC236}">
+              <a16:creationId xmlns:a16="http://schemas.microsoft.com/office/drawing/2014/main" id="{106F452F-E252-68EE-0F69-9D334A851882}"/>
+            </a:ext>
+          </a:extLst>
+        </p:cNvPr>
         <p:cNvGrpSpPr/>
         <p:nvPr/>
       </p:nvGrpSpPr>
@@ -350,7 +360,13 @@
       </p:grpSpPr>
       <p:sp>
         <p:nvSpPr>
-          <p:cNvPr id="2" name="Slide Image Placeholder 1"/>
+          <p:cNvPr id="2" name="Slide Image Placeholder 1">
+            <a:extLst>
+              <a:ext uri="{FF2B5EF4-FFF2-40B4-BE49-F238E27FC236}">
+                <a16:creationId xmlns:a16="http://schemas.microsoft.com/office/drawing/2014/main" id="{BB599262-529F-3ED4-0656-30630D06BEBB}"/>
+              </a:ext>
+            </a:extLst>
+          </p:cNvPr>
           <p:cNvSpPr>
             <a:spLocks noGrp="1" noRot="1" noChangeAspect="1"/>
           </p:cNvSpPr>
@@ -362,7 +378,13 @@
       </p:sp>
       <p:sp>
         <p:nvSpPr>
-          <p:cNvPr id="3" name="Notes Placeholder 2"/>
+          <p:cNvPr id="3" name="Notes Placeholder 2">
+            <a:extLst>
+              <a:ext uri="{FF2B5EF4-FFF2-40B4-BE49-F238E27FC236}">
+                <a16:creationId xmlns:a16="http://schemas.microsoft.com/office/drawing/2014/main" id="{28B919B3-E244-9606-CD70-F07E501D8083}"/>
+              </a:ext>
+            </a:extLst>
+          </p:cNvPr>
           <p:cNvSpPr>
             <a:spLocks noGrp="1"/>
           </p:cNvSpPr>
@@ -381,7 +403,13 @@
       </p:sp>
       <p:sp>
         <p:nvSpPr>
-          <p:cNvPr id="4" name="Slide Number Placeholder 3"/>
+          <p:cNvPr id="4" name="Slide Number Placeholder 3">
+            <a:extLst>
+              <a:ext uri="{FF2B5EF4-FFF2-40B4-BE49-F238E27FC236}">
+                <a16:creationId xmlns:a16="http://schemas.microsoft.com/office/drawing/2014/main" id="{EBD56652-7239-2D4B-FF78-C3E0E94B0224}"/>
+              </a:ext>
+            </a:extLst>
+          </p:cNvPr>
           <p:cNvSpPr>
             <a:spLocks noGrp="1"/>
           </p:cNvSpPr>
@@ -405,7 +433,7 @@
     </p:spTree>
     <p:extLst>
       <p:ext uri="{BB962C8B-B14F-4D97-AF65-F5344CB8AC3E}">
-        <p14:creationId xmlns:p14="http://schemas.microsoft.com/office/powerpoint/2010/main" val="1024086991"/>
+        <p14:creationId xmlns:p14="http://schemas.microsoft.com/office/powerpoint/2010/main" val="3097526744"/>
       </p:ext>
     </p:extLst>
   </p:cSld>
@@ -481,6 +509,390 @@
             <a:fld id="{F7021451-1387-4CA6-816F-3879F97B5CBC}" type="slidenum">
               <a:rPr lang="en-US"/>
               <a:t>11</a:t>
+            </a:fld>
+            <a:endParaRPr lang="en-US"/>
+          </a:p>
+        </p:txBody>
+      </p:sp>
+    </p:spTree>
+    <p:extLst>
+      <p:ext uri="{BB962C8B-B14F-4D97-AF65-F5344CB8AC3E}">
+        <p14:creationId xmlns:p14="http://schemas.microsoft.com/office/powerpoint/2010/main" val="1024086991"/>
+      </p:ext>
+    </p:extLst>
+  </p:cSld>
+  <p:clrMapOvr>
+    <a:masterClrMapping/>
+  </p:clrMapOvr>
+</p:notes>
+</file>
+
+<file path=ppt/notesSlides/notesSlide12.xml><?xml version="1.0" encoding="utf-8"?>
+<p:notes xmlns:a="http://schemas.openxmlformats.org/drawingml/2006/main" xmlns:r="http://schemas.openxmlformats.org/officeDocument/2006/relationships" xmlns:p="http://schemas.openxmlformats.org/presentationml/2006/main">
+  <p:cSld>
+    <p:spTree>
+      <p:nvGrpSpPr>
+        <p:cNvPr id="1" name="">
+          <a:extLst>
+            <a:ext uri="{FF2B5EF4-FFF2-40B4-BE49-F238E27FC236}">
+              <a16:creationId xmlns:a16="http://schemas.microsoft.com/office/drawing/2014/main" id="{6BEDF4BC-B121-3781-8081-AC569735B3CC}"/>
+            </a:ext>
+          </a:extLst>
+        </p:cNvPr>
+        <p:cNvGrpSpPr/>
+        <p:nvPr/>
+      </p:nvGrpSpPr>
+      <p:grpSpPr>
+        <a:xfrm>
+          <a:off x="0" y="0"/>
+          <a:ext cx="0" cy="0"/>
+          <a:chOff x="0" y="0"/>
+          <a:chExt cx="0" cy="0"/>
+        </a:xfrm>
+      </p:grpSpPr>
+      <p:sp>
+        <p:nvSpPr>
+          <p:cNvPr id="2" name="Slide Image Placeholder 1">
+            <a:extLst>
+              <a:ext uri="{FF2B5EF4-FFF2-40B4-BE49-F238E27FC236}">
+                <a16:creationId xmlns:a16="http://schemas.microsoft.com/office/drawing/2014/main" id="{CE049B0A-9C04-84D4-73A6-7143801037D9}"/>
+              </a:ext>
+            </a:extLst>
+          </p:cNvPr>
+          <p:cNvSpPr>
+            <a:spLocks noGrp="1" noRot="1" noChangeAspect="1"/>
+          </p:cNvSpPr>
+          <p:nvPr>
+            <p:ph type="sldImg"/>
+          </p:nvPr>
+        </p:nvSpPr>
+        <p:spPr/>
+      </p:sp>
+      <p:sp>
+        <p:nvSpPr>
+          <p:cNvPr id="3" name="Notes Placeholder 2">
+            <a:extLst>
+              <a:ext uri="{FF2B5EF4-FFF2-40B4-BE49-F238E27FC236}">
+                <a16:creationId xmlns:a16="http://schemas.microsoft.com/office/drawing/2014/main" id="{979E17A2-C641-4C91-3C7D-7AC0AFC70C37}"/>
+              </a:ext>
+            </a:extLst>
+          </p:cNvPr>
+          <p:cNvSpPr>
+            <a:spLocks noGrp="1"/>
+          </p:cNvSpPr>
+          <p:nvPr>
+            <p:ph type="body" idx="1"/>
+          </p:nvPr>
+        </p:nvSpPr>
+        <p:spPr/>
+        <p:txBody>
+          <a:bodyPr/>
+          <a:lstStyle/>
+          <a:p>
+            <a:endParaRPr lang="en-US" dirty="0"/>
+          </a:p>
+        </p:txBody>
+      </p:sp>
+      <p:sp>
+        <p:nvSpPr>
+          <p:cNvPr id="4" name="Slide Number Placeholder 3">
+            <a:extLst>
+              <a:ext uri="{FF2B5EF4-FFF2-40B4-BE49-F238E27FC236}">
+                <a16:creationId xmlns:a16="http://schemas.microsoft.com/office/drawing/2014/main" id="{2D3FFF4B-342D-F286-2543-BD88BA3F7887}"/>
+              </a:ext>
+            </a:extLst>
+          </p:cNvPr>
+          <p:cNvSpPr>
+            <a:spLocks noGrp="1"/>
+          </p:cNvSpPr>
+          <p:nvPr>
+            <p:ph type="sldNum" sz="quarter" idx="10"/>
+          </p:nvPr>
+        </p:nvSpPr>
+        <p:spPr/>
+        <p:txBody>
+          <a:bodyPr/>
+          <a:lstStyle/>
+          <a:p>
+            <a:fld id="{F7021451-1387-4CA6-816F-3879F97B5CBC}" type="slidenum">
+              <a:rPr lang="en-US"/>
+              <a:t>12</a:t>
+            </a:fld>
+            <a:endParaRPr lang="en-US"/>
+          </a:p>
+        </p:txBody>
+      </p:sp>
+    </p:spTree>
+    <p:extLst>
+      <p:ext uri="{BB962C8B-B14F-4D97-AF65-F5344CB8AC3E}">
+        <p14:creationId xmlns:p14="http://schemas.microsoft.com/office/powerpoint/2010/main" val="2786249214"/>
+      </p:ext>
+    </p:extLst>
+  </p:cSld>
+  <p:clrMapOvr>
+    <a:masterClrMapping/>
+  </p:clrMapOvr>
+</p:notes>
+</file>
+
+<file path=ppt/notesSlides/notesSlide13.xml><?xml version="1.0" encoding="utf-8"?>
+<p:notes xmlns:a="http://schemas.openxmlformats.org/drawingml/2006/main" xmlns:r="http://schemas.openxmlformats.org/officeDocument/2006/relationships" xmlns:p="http://schemas.openxmlformats.org/presentationml/2006/main">
+  <p:cSld>
+    <p:spTree>
+      <p:nvGrpSpPr>
+        <p:cNvPr id="1" name=""/>
+        <p:cNvGrpSpPr/>
+        <p:nvPr/>
+      </p:nvGrpSpPr>
+      <p:grpSpPr>
+        <a:xfrm>
+          <a:off x="0" y="0"/>
+          <a:ext cx="0" cy="0"/>
+          <a:chOff x="0" y="0"/>
+          <a:chExt cx="0" cy="0"/>
+        </a:xfrm>
+      </p:grpSpPr>
+      <p:sp>
+        <p:nvSpPr>
+          <p:cNvPr id="2" name="Slide Image Placeholder 1"/>
+          <p:cNvSpPr>
+            <a:spLocks noGrp="1" noRot="1" noChangeAspect="1"/>
+          </p:cNvSpPr>
+          <p:nvPr>
+            <p:ph type="sldImg"/>
+          </p:nvPr>
+        </p:nvSpPr>
+        <p:spPr/>
+      </p:sp>
+      <p:sp>
+        <p:nvSpPr>
+          <p:cNvPr id="3" name="Notes Placeholder 2"/>
+          <p:cNvSpPr>
+            <a:spLocks noGrp="1"/>
+          </p:cNvSpPr>
+          <p:nvPr>
+            <p:ph type="body" idx="1"/>
+          </p:nvPr>
+        </p:nvSpPr>
+        <p:spPr/>
+        <p:txBody>
+          <a:bodyPr/>
+          <a:lstStyle/>
+          <a:p>
+            <a:endParaRPr lang="en-US" dirty="0"/>
+          </a:p>
+        </p:txBody>
+      </p:sp>
+      <p:sp>
+        <p:nvSpPr>
+          <p:cNvPr id="4" name="Slide Number Placeholder 3"/>
+          <p:cNvSpPr>
+            <a:spLocks noGrp="1"/>
+          </p:cNvSpPr>
+          <p:nvPr>
+            <p:ph type="sldNum" sz="quarter" idx="10"/>
+          </p:nvPr>
+        </p:nvSpPr>
+        <p:spPr/>
+        <p:txBody>
+          <a:bodyPr/>
+          <a:lstStyle/>
+          <a:p>
+            <a:fld id="{F7021451-1387-4CA6-816F-3879F97B5CBC}" type="slidenum">
+              <a:rPr lang="en-US"/>
+              <a:t>13</a:t>
+            </a:fld>
+            <a:endParaRPr lang="en-US"/>
+          </a:p>
+        </p:txBody>
+      </p:sp>
+    </p:spTree>
+    <p:extLst>
+      <p:ext uri="{BB962C8B-B14F-4D97-AF65-F5344CB8AC3E}">
+        <p14:creationId xmlns:p14="http://schemas.microsoft.com/office/powerpoint/2010/main" val="1024086991"/>
+      </p:ext>
+    </p:extLst>
+  </p:cSld>
+  <p:clrMapOvr>
+    <a:masterClrMapping/>
+  </p:clrMapOvr>
+</p:notes>
+</file>
+
+<file path=ppt/notesSlides/notesSlide14.xml><?xml version="1.0" encoding="utf-8"?>
+<p:notes xmlns:a="http://schemas.openxmlformats.org/drawingml/2006/main" xmlns:r="http://schemas.openxmlformats.org/officeDocument/2006/relationships" xmlns:p="http://schemas.openxmlformats.org/presentationml/2006/main">
+  <p:cSld>
+    <p:spTree>
+      <p:nvGrpSpPr>
+        <p:cNvPr id="1" name="">
+          <a:extLst>
+            <a:ext uri="{FF2B5EF4-FFF2-40B4-BE49-F238E27FC236}">
+              <a16:creationId xmlns:a16="http://schemas.microsoft.com/office/drawing/2014/main" id="{BD9A9C50-AA79-3502-EEFB-102012123DB3}"/>
+            </a:ext>
+          </a:extLst>
+        </p:cNvPr>
+        <p:cNvGrpSpPr/>
+        <p:nvPr/>
+      </p:nvGrpSpPr>
+      <p:grpSpPr>
+        <a:xfrm>
+          <a:off x="0" y="0"/>
+          <a:ext cx="0" cy="0"/>
+          <a:chOff x="0" y="0"/>
+          <a:chExt cx="0" cy="0"/>
+        </a:xfrm>
+      </p:grpSpPr>
+      <p:sp>
+        <p:nvSpPr>
+          <p:cNvPr id="2" name="Slide Image Placeholder 1">
+            <a:extLst>
+              <a:ext uri="{FF2B5EF4-FFF2-40B4-BE49-F238E27FC236}">
+                <a16:creationId xmlns:a16="http://schemas.microsoft.com/office/drawing/2014/main" id="{7E7F9AD7-D86F-8C7F-E18C-42BDB108B5E1}"/>
+              </a:ext>
+            </a:extLst>
+          </p:cNvPr>
+          <p:cNvSpPr>
+            <a:spLocks noGrp="1" noRot="1" noChangeAspect="1"/>
+          </p:cNvSpPr>
+          <p:nvPr>
+            <p:ph type="sldImg"/>
+          </p:nvPr>
+        </p:nvSpPr>
+        <p:spPr/>
+      </p:sp>
+      <p:sp>
+        <p:nvSpPr>
+          <p:cNvPr id="3" name="Notes Placeholder 2">
+            <a:extLst>
+              <a:ext uri="{FF2B5EF4-FFF2-40B4-BE49-F238E27FC236}">
+                <a16:creationId xmlns:a16="http://schemas.microsoft.com/office/drawing/2014/main" id="{53E299F7-1DFB-9CB7-A576-2F11B0FC7BCE}"/>
+              </a:ext>
+            </a:extLst>
+          </p:cNvPr>
+          <p:cNvSpPr>
+            <a:spLocks noGrp="1"/>
+          </p:cNvSpPr>
+          <p:nvPr>
+            <p:ph type="body" idx="1"/>
+          </p:nvPr>
+        </p:nvSpPr>
+        <p:spPr/>
+        <p:txBody>
+          <a:bodyPr/>
+          <a:lstStyle/>
+          <a:p>
+            <a:endParaRPr lang="en-US" dirty="0"/>
+          </a:p>
+        </p:txBody>
+      </p:sp>
+      <p:sp>
+        <p:nvSpPr>
+          <p:cNvPr id="4" name="Slide Number Placeholder 3">
+            <a:extLst>
+              <a:ext uri="{FF2B5EF4-FFF2-40B4-BE49-F238E27FC236}">
+                <a16:creationId xmlns:a16="http://schemas.microsoft.com/office/drawing/2014/main" id="{B540B4A6-9957-27B8-DEC3-1D2AA9D168C1}"/>
+              </a:ext>
+            </a:extLst>
+          </p:cNvPr>
+          <p:cNvSpPr>
+            <a:spLocks noGrp="1"/>
+          </p:cNvSpPr>
+          <p:nvPr>
+            <p:ph type="sldNum" sz="quarter" idx="10"/>
+          </p:nvPr>
+        </p:nvSpPr>
+        <p:spPr/>
+        <p:txBody>
+          <a:bodyPr/>
+          <a:lstStyle/>
+          <a:p>
+            <a:fld id="{F7021451-1387-4CA6-816F-3879F97B5CBC}" type="slidenum">
+              <a:rPr lang="en-US"/>
+              <a:t>14</a:t>
+            </a:fld>
+            <a:endParaRPr lang="en-US"/>
+          </a:p>
+        </p:txBody>
+      </p:sp>
+    </p:spTree>
+    <p:extLst>
+      <p:ext uri="{BB962C8B-B14F-4D97-AF65-F5344CB8AC3E}">
+        <p14:creationId xmlns:p14="http://schemas.microsoft.com/office/powerpoint/2010/main" val="918772134"/>
+      </p:ext>
+    </p:extLst>
+  </p:cSld>
+  <p:clrMapOvr>
+    <a:masterClrMapping/>
+  </p:clrMapOvr>
+</p:notes>
+</file>
+
+<file path=ppt/notesSlides/notesSlide15.xml><?xml version="1.0" encoding="utf-8"?>
+<p:notes xmlns:a="http://schemas.openxmlformats.org/drawingml/2006/main" xmlns:r="http://schemas.openxmlformats.org/officeDocument/2006/relationships" xmlns:p="http://schemas.openxmlformats.org/presentationml/2006/main">
+  <p:cSld>
+    <p:spTree>
+      <p:nvGrpSpPr>
+        <p:cNvPr id="1" name=""/>
+        <p:cNvGrpSpPr/>
+        <p:nvPr/>
+      </p:nvGrpSpPr>
+      <p:grpSpPr>
+        <a:xfrm>
+          <a:off x="0" y="0"/>
+          <a:ext cx="0" cy="0"/>
+          <a:chOff x="0" y="0"/>
+          <a:chExt cx="0" cy="0"/>
+        </a:xfrm>
+      </p:grpSpPr>
+      <p:sp>
+        <p:nvSpPr>
+          <p:cNvPr id="2" name="Slide Image Placeholder 1"/>
+          <p:cNvSpPr>
+            <a:spLocks noGrp="1" noRot="1" noChangeAspect="1"/>
+          </p:cNvSpPr>
+          <p:nvPr>
+            <p:ph type="sldImg"/>
+          </p:nvPr>
+        </p:nvSpPr>
+        <p:spPr/>
+      </p:sp>
+      <p:sp>
+        <p:nvSpPr>
+          <p:cNvPr id="3" name="Notes Placeholder 2"/>
+          <p:cNvSpPr>
+            <a:spLocks noGrp="1"/>
+          </p:cNvSpPr>
+          <p:nvPr>
+            <p:ph type="body" idx="1"/>
+          </p:nvPr>
+        </p:nvSpPr>
+        <p:spPr/>
+        <p:txBody>
+          <a:bodyPr/>
+          <a:lstStyle/>
+          <a:p>
+            <a:endParaRPr lang="en-US" dirty="0"/>
+          </a:p>
+        </p:txBody>
+      </p:sp>
+      <p:sp>
+        <p:nvSpPr>
+          <p:cNvPr id="4" name="Slide Number Placeholder 3"/>
+          <p:cNvSpPr>
+            <a:spLocks noGrp="1"/>
+          </p:cNvSpPr>
+          <p:nvPr>
+            <p:ph type="sldNum" sz="quarter" idx="10"/>
+          </p:nvPr>
+        </p:nvSpPr>
+        <p:spPr/>
+        <p:txBody>
+          <a:bodyPr/>
+          <a:lstStyle/>
+          <a:p>
+            <a:fld id="{F7021451-1387-4CA6-816F-3879F97B5CBC}" type="slidenum">
+              <a:rPr lang="en-US"/>
+              <a:t>15</a:t>
             </a:fld>
             <a:endParaRPr lang="en-US"/>
           </a:p>
@@ -588,7 +1000,13 @@
   <p:cSld>
     <p:spTree>
       <p:nvGrpSpPr>
-        <p:cNvPr id="1" name=""/>
+        <p:cNvPr id="1" name="">
+          <a:extLst>
+            <a:ext uri="{FF2B5EF4-FFF2-40B4-BE49-F238E27FC236}">
+              <a16:creationId xmlns:a16="http://schemas.microsoft.com/office/drawing/2014/main" id="{EB507564-7012-DC00-6C0A-9B4CB004DFB9}"/>
+            </a:ext>
+          </a:extLst>
+        </p:cNvPr>
         <p:cNvGrpSpPr/>
         <p:nvPr/>
       </p:nvGrpSpPr>
@@ -602,7 +1020,13 @@
       </p:grpSpPr>
       <p:sp>
         <p:nvSpPr>
-          <p:cNvPr id="2" name="Slide Image Placeholder 1"/>
+          <p:cNvPr id="2" name="Slide Image Placeholder 1">
+            <a:extLst>
+              <a:ext uri="{FF2B5EF4-FFF2-40B4-BE49-F238E27FC236}">
+                <a16:creationId xmlns:a16="http://schemas.microsoft.com/office/drawing/2014/main" id="{2C3A9524-E6B9-4605-6448-9D28C57B24D7}"/>
+              </a:ext>
+            </a:extLst>
+          </p:cNvPr>
           <p:cNvSpPr>
             <a:spLocks noGrp="1" noRot="1" noChangeAspect="1"/>
           </p:cNvSpPr>
@@ -614,7 +1038,13 @@
       </p:sp>
       <p:sp>
         <p:nvSpPr>
-          <p:cNvPr id="3" name="Notes Placeholder 2"/>
+          <p:cNvPr id="3" name="Notes Placeholder 2">
+            <a:extLst>
+              <a:ext uri="{FF2B5EF4-FFF2-40B4-BE49-F238E27FC236}">
+                <a16:creationId xmlns:a16="http://schemas.microsoft.com/office/drawing/2014/main" id="{11375F81-A4AE-D9F4-50AE-01127533094F}"/>
+              </a:ext>
+            </a:extLst>
+          </p:cNvPr>
           <p:cNvSpPr>
             <a:spLocks noGrp="1"/>
           </p:cNvSpPr>
@@ -633,7 +1063,13 @@
       </p:sp>
       <p:sp>
         <p:nvSpPr>
-          <p:cNvPr id="4" name="Slide Number Placeholder 3"/>
+          <p:cNvPr id="4" name="Slide Number Placeholder 3">
+            <a:extLst>
+              <a:ext uri="{FF2B5EF4-FFF2-40B4-BE49-F238E27FC236}">
+                <a16:creationId xmlns:a16="http://schemas.microsoft.com/office/drawing/2014/main" id="{AC11905D-A5CF-6D6C-4C4A-197B0140BDAB}"/>
+              </a:ext>
+            </a:extLst>
+          </p:cNvPr>
           <p:cNvSpPr>
             <a:spLocks noGrp="1"/>
           </p:cNvSpPr>
@@ -657,7 +1093,7 @@
     </p:spTree>
     <p:extLst>
       <p:ext uri="{BB962C8B-B14F-4D97-AF65-F5344CB8AC3E}">
-        <p14:creationId xmlns:p14="http://schemas.microsoft.com/office/powerpoint/2010/main" val="1024086991"/>
+        <p14:creationId xmlns:p14="http://schemas.microsoft.com/office/powerpoint/2010/main" val="1871314093"/>
       </p:ext>
     </p:extLst>
   </p:cSld>
@@ -1527,7 +1963,7 @@
         </p:spPr>
         <p:txBody>
           <a:bodyPr wrap="square" lIns="0" tIns="0" rIns="0" bIns="0" rtlCol="0" anchor="ctr">
-            <a:normAutofit/>
+            <a:normAutofit fontScale="92500"/>
           </a:bodyPr>
           <a:lstStyle/>
           <a:p>
@@ -1657,16 +2093,10 @@
                 <a:ea typeface="Roboto" pitchFamily="34" charset="-122"/>
                 <a:cs typeface="Roboto" pitchFamily="34" charset="-120"/>
               </a:rPr>
-              <a:t>Members: Nguyễn Sỹ Minh Mẫn, Đỗ Thành Triết, Trần Đăng Khoa, Bùi Đình Long</a:t>
-            </a:r>
-            <a:endParaRPr lang="en-US" sz="1250" dirty="0"/>
-          </a:p>
-          <a:p>
-            <a:pPr marL="0" indent="0">
-              <a:buNone/>
-            </a:pPr>
-            <a:r>
-              <a:rPr lang="en-US" sz="1250" dirty="0">
+              <a:t>Members: </a:t>
+            </a:r>
+            <a:r>
+              <a:rPr lang="en-US" sz="1250" b="1" dirty="0">
                 <a:solidFill>
                   <a:srgbClr val="5B6472"/>
                 </a:solidFill>
@@ -1674,7 +2104,29 @@
                 <a:ea typeface="Roboto" pitchFamily="34" charset="-122"/>
                 <a:cs typeface="Roboto" pitchFamily="34" charset="-120"/>
               </a:rPr>
-              <a:t>Instructor: [Insert instructor name]</a:t>
+              <a:t>Nguyễn Sỹ Minh Mẫn, Đỗ Thành Triết, Trần Đăng Khoa, Bùi Đình Long</a:t>
+            </a:r>
+            <a:endParaRPr lang="en-US" sz="1250" b="1" dirty="0"/>
+          </a:p>
+          <a:p>
+            <a:r>
+              <a:rPr lang="en-US" sz="1250" dirty="0">
+                <a:solidFill>
+                  <a:srgbClr val="5B6472"/>
+                </a:solidFill>
+                <a:latin typeface="Roboto" pitchFamily="34" charset="0"/>
+                <a:ea typeface="Roboto" pitchFamily="34" charset="-122"/>
+                <a:cs typeface="Roboto" pitchFamily="34" charset="-120"/>
+              </a:rPr>
+              <a:t>Instructor: </a:t>
+            </a:r>
+            <a:r>
+              <a:rPr lang="en-US" sz="1250" dirty="0"/>
+              <a:t>Nguyễn </a:t>
+            </a:r>
+            <a:r>
+              <a:rPr lang="en-US" sz="1250"/>
+              <a:t>Đức Lợi – Class: SE2045</a:t>
             </a:r>
             <a:endParaRPr lang="en-US" sz="1250" dirty="0"/>
           </a:p>
@@ -1828,6 +2280,99 @@
           </a:p>
         </p:txBody>
       </p:sp>
+      <p:pic>
+        <p:nvPicPr>
+          <p:cNvPr id="9" name="Picture 8" descr="44,671 Vehicle Barriers Royalty-Free Images, Stock Photos ...">
+            <a:extLst>
+              <a:ext uri="{FF2B5EF4-FFF2-40B4-BE49-F238E27FC236}">
+                <a16:creationId xmlns:a16="http://schemas.microsoft.com/office/drawing/2014/main" id="{34ABDC93-9FC1-DD5A-3C04-797647E78983}"/>
+              </a:ext>
+            </a:extLst>
+          </p:cNvPr>
+          <p:cNvPicPr>
+            <a:picLocks noChangeAspect="1"/>
+          </p:cNvPicPr>
+          <p:nvPr/>
+        </p:nvPicPr>
+        <p:blipFill>
+          <a:blip r:embed="rId3"/>
+          <a:srcRect r="25593" b="7286"/>
+          <a:stretch>
+            <a:fillRect/>
+          </a:stretch>
+        </p:blipFill>
+        <p:spPr>
+          <a:xfrm>
+            <a:off x="6782867" y="1005839"/>
+            <a:ext cx="4526363" cy="4049239"/>
+          </a:xfrm>
+          <a:prstGeom prst="rect">
+            <a:avLst/>
+          </a:prstGeom>
+        </p:spPr>
+      </p:pic>
+      <p:sp>
+        <p:nvSpPr>
+          <p:cNvPr id="12" name="TextBox 11">
+            <a:extLst>
+              <a:ext uri="{FF2B5EF4-FFF2-40B4-BE49-F238E27FC236}">
+                <a16:creationId xmlns:a16="http://schemas.microsoft.com/office/drawing/2014/main" id="{07B7053D-E9B6-6809-7A1A-122AF571359F}"/>
+              </a:ext>
+            </a:extLst>
+          </p:cNvPr>
+          <p:cNvSpPr txBox="1"/>
+          <p:nvPr/>
+        </p:nvSpPr>
+        <p:spPr>
+          <a:xfrm>
+            <a:off x="3048000" y="3244334"/>
+            <a:ext cx="6096000" cy="369332"/>
+          </a:xfrm>
+          <a:prstGeom prst="rect">
+            <a:avLst/>
+          </a:prstGeom>
+          <a:noFill/>
+        </p:spPr>
+        <p:txBody>
+          <a:bodyPr wrap="square">
+            <a:spAutoFit/>
+          </a:bodyPr>
+          <a:lstStyle/>
+          <a:p>
+            <a:endParaRPr lang="en-US" dirty="0"/>
+          </a:p>
+        </p:txBody>
+      </p:sp>
+      <p:pic>
+        <p:nvPicPr>
+          <p:cNvPr id="14" name="Picture 13">
+            <a:extLst>
+              <a:ext uri="{FF2B5EF4-FFF2-40B4-BE49-F238E27FC236}">
+                <a16:creationId xmlns:a16="http://schemas.microsoft.com/office/drawing/2014/main" id="{C1B3E397-EE3F-D7D1-195F-6316A93A56C6}"/>
+              </a:ext>
+            </a:extLst>
+          </p:cNvPr>
+          <p:cNvPicPr>
+            <a:picLocks noChangeAspect="1"/>
+          </p:cNvPicPr>
+          <p:nvPr/>
+        </p:nvPicPr>
+        <p:blipFill>
+          <a:blip r:embed="rId4"/>
+          <a:stretch>
+            <a:fillRect/>
+          </a:stretch>
+        </p:blipFill>
+        <p:spPr>
+          <a:xfrm>
+            <a:off x="685800" y="4444019"/>
+            <a:ext cx="2356685" cy="920580"/>
+          </a:xfrm>
+          <a:prstGeom prst="rect">
+            <a:avLst/>
+          </a:prstGeom>
+        </p:spPr>
+      </p:pic>
     </p:spTree>
   </p:cSld>
   <p:clrMapOvr>
@@ -1837,6 +2382,1468 @@
 </file>
 
 <file path=ppt/slides/slide10.xml><?xml version="1.0" encoding="utf-8"?>
+<p:sld xmlns:a="http://schemas.openxmlformats.org/drawingml/2006/main" xmlns:r="http://schemas.openxmlformats.org/officeDocument/2006/relationships" xmlns:p="http://schemas.openxmlformats.org/presentationml/2006/main">
+  <p:cSld>
+    <p:spTree>
+      <p:nvGrpSpPr>
+        <p:cNvPr id="1" name="">
+          <a:extLst>
+            <a:ext uri="{FF2B5EF4-FFF2-40B4-BE49-F238E27FC236}">
+              <a16:creationId xmlns:a16="http://schemas.microsoft.com/office/drawing/2014/main" id="{F7F14933-0581-C9C9-3F85-121DBEEBE0BD}"/>
+            </a:ext>
+          </a:extLst>
+        </p:cNvPr>
+        <p:cNvGrpSpPr/>
+        <p:nvPr/>
+      </p:nvGrpSpPr>
+      <p:grpSpPr>
+        <a:xfrm>
+          <a:off x="0" y="0"/>
+          <a:ext cx="0" cy="0"/>
+          <a:chOff x="0" y="0"/>
+          <a:chExt cx="0" cy="0"/>
+        </a:xfrm>
+      </p:grpSpPr>
+      <p:sp>
+        <p:nvSpPr>
+          <p:cNvPr id="2" name="Text 0">
+            <a:extLst>
+              <a:ext uri="{FF2B5EF4-FFF2-40B4-BE49-F238E27FC236}">
+                <a16:creationId xmlns:a16="http://schemas.microsoft.com/office/drawing/2014/main" id="{E38B6EA9-84E9-4150-3325-B333B1279095}"/>
+              </a:ext>
+            </a:extLst>
+          </p:cNvPr>
+          <p:cNvSpPr/>
+          <p:nvPr/>
+        </p:nvSpPr>
+        <p:spPr>
+          <a:xfrm>
+            <a:off x="502920" y="320040"/>
+            <a:ext cx="11155680" cy="411480"/>
+          </a:xfrm>
+          <a:prstGeom prst="rect">
+            <a:avLst/>
+          </a:prstGeom>
+          <a:noFill/>
+          <a:ln/>
+        </p:spPr>
+        <p:txBody>
+          <a:bodyPr wrap="square" lIns="0" tIns="0" rIns="0" bIns="0" rtlCol="0" anchor="ctr">
+            <a:normAutofit lnSpcReduction="10000"/>
+          </a:bodyPr>
+          <a:lstStyle/>
+          <a:p>
+            <a:pPr marL="0" indent="0">
+              <a:buNone/>
+            </a:pPr>
+            <a:r>
+              <a:rPr lang="en-US" sz="3000" b="1" dirty="0">
+                <a:solidFill>
+                  <a:srgbClr val="0B1F3A"/>
+                </a:solidFill>
+                <a:latin typeface="Montserrat" pitchFamily="34" charset="0"/>
+                <a:ea typeface="Montserrat" pitchFamily="34" charset="-122"/>
+                <a:cs typeface="Montserrat" pitchFamily="34" charset="-120"/>
+              </a:rPr>
+              <a:t>System ERD</a:t>
+            </a:r>
+            <a:endParaRPr lang="en-US" sz="3000" dirty="0"/>
+          </a:p>
+        </p:txBody>
+      </p:sp>
+      <p:sp>
+        <p:nvSpPr>
+          <p:cNvPr id="3" name="Text 1">
+            <a:extLst>
+              <a:ext uri="{FF2B5EF4-FFF2-40B4-BE49-F238E27FC236}">
+                <a16:creationId xmlns:a16="http://schemas.microsoft.com/office/drawing/2014/main" id="{3A5E8256-557B-7D70-E80C-120E1ED5E5B3}"/>
+              </a:ext>
+            </a:extLst>
+          </p:cNvPr>
+          <p:cNvSpPr/>
+          <p:nvPr/>
+        </p:nvSpPr>
+        <p:spPr>
+          <a:xfrm>
+            <a:off x="530352" y="777240"/>
+            <a:ext cx="10972800" cy="228600"/>
+          </a:xfrm>
+          <a:prstGeom prst="rect">
+            <a:avLst/>
+          </a:prstGeom>
+          <a:noFill/>
+          <a:ln/>
+        </p:spPr>
+        <p:txBody>
+          <a:bodyPr wrap="square" lIns="0" tIns="0" rIns="0" bIns="0" rtlCol="0" anchor="ctr"/>
+          <a:lstStyle/>
+          <a:p>
+            <a:pPr marL="0" indent="0">
+              <a:buNone/>
+            </a:pPr>
+            <a:r>
+              <a:rPr lang="en-US" sz="1250" dirty="0">
+                <a:solidFill>
+                  <a:srgbClr val="5B6472"/>
+                </a:solidFill>
+                <a:latin typeface="Roboto" pitchFamily="34" charset="0"/>
+                <a:ea typeface="Roboto" pitchFamily="34" charset="-122"/>
+                <a:cs typeface="Roboto" pitchFamily="34" charset="-120"/>
+              </a:rPr>
+              <a:t>Step-by-step operation from detection to gate control.</a:t>
+            </a:r>
+            <a:endParaRPr lang="en-US" sz="1250" dirty="0"/>
+          </a:p>
+        </p:txBody>
+      </p:sp>
+      <p:sp>
+        <p:nvSpPr>
+          <p:cNvPr id="4" name="Shape 2">
+            <a:extLst>
+              <a:ext uri="{FF2B5EF4-FFF2-40B4-BE49-F238E27FC236}">
+                <a16:creationId xmlns:a16="http://schemas.microsoft.com/office/drawing/2014/main" id="{29BCB63A-9E65-D013-DD65-98A045DC5F91}"/>
+              </a:ext>
+            </a:extLst>
+          </p:cNvPr>
+          <p:cNvSpPr/>
+          <p:nvPr/>
+        </p:nvSpPr>
+        <p:spPr>
+          <a:xfrm>
+            <a:off x="502920" y="1078992"/>
+            <a:ext cx="11155680" cy="0"/>
+          </a:xfrm>
+          <a:prstGeom prst="line">
+            <a:avLst/>
+          </a:prstGeom>
+          <a:noFill/>
+          <a:ln w="12700">
+            <a:solidFill>
+              <a:srgbClr val="B9C2CF"/>
+            </a:solidFill>
+            <a:prstDash val="solid"/>
+          </a:ln>
+        </p:spPr>
+      </p:sp>
+      <p:sp>
+        <p:nvSpPr>
+          <p:cNvPr id="13" name="Text 11">
+            <a:extLst>
+              <a:ext uri="{FF2B5EF4-FFF2-40B4-BE49-F238E27FC236}">
+                <a16:creationId xmlns:a16="http://schemas.microsoft.com/office/drawing/2014/main" id="{E79D8D6E-4D78-6D70-C111-21A14F64B675}"/>
+              </a:ext>
+            </a:extLst>
+          </p:cNvPr>
+          <p:cNvSpPr/>
+          <p:nvPr/>
+        </p:nvSpPr>
+        <p:spPr>
+          <a:xfrm>
+            <a:off x="502920" y="6547104"/>
+            <a:ext cx="11155680" cy="182880"/>
+          </a:xfrm>
+          <a:prstGeom prst="rect">
+            <a:avLst/>
+          </a:prstGeom>
+          <a:noFill/>
+          <a:ln/>
+        </p:spPr>
+        <p:txBody>
+          <a:bodyPr wrap="square" lIns="0" tIns="0" rIns="0" bIns="0" rtlCol="0" anchor="ctr"/>
+          <a:lstStyle/>
+          <a:p>
+            <a:pPr marL="0" indent="0" algn="r">
+              <a:buNone/>
+            </a:pPr>
+            <a:r>
+              <a:rPr lang="en-US" sz="850" dirty="0">
+                <a:solidFill>
+                  <a:srgbClr val="7B8491"/>
+                </a:solidFill>
+                <a:latin typeface="Roboto" pitchFamily="34" charset="0"/>
+                <a:ea typeface="Roboto" pitchFamily="34" charset="-122"/>
+                <a:cs typeface="Roboto" pitchFamily="34" charset="-120"/>
+              </a:rPr>
+              <a:t>Smart Parking System  |  10</a:t>
+            </a:r>
+            <a:endParaRPr lang="en-US" sz="850" dirty="0"/>
+          </a:p>
+        </p:txBody>
+      </p:sp>
+      <p:sp>
+        <p:nvSpPr>
+          <p:cNvPr id="5" name="Shape 3">
+            <a:extLst>
+              <a:ext uri="{FF2B5EF4-FFF2-40B4-BE49-F238E27FC236}">
+                <a16:creationId xmlns:a16="http://schemas.microsoft.com/office/drawing/2014/main" id="{36B52A22-B25B-51F5-6667-5F63B65BD74F}"/>
+              </a:ext>
+            </a:extLst>
+          </p:cNvPr>
+          <p:cNvSpPr/>
+          <p:nvPr/>
+        </p:nvSpPr>
+        <p:spPr>
+          <a:xfrm flipH="1">
+            <a:off x="5167222" y="1195450"/>
+            <a:ext cx="6008298" cy="5029198"/>
+          </a:xfrm>
+          <a:prstGeom prst="rect">
+            <a:avLst/>
+          </a:prstGeom>
+          <a:solidFill>
+            <a:srgbClr val="FFFFFF">
+              <a:alpha val="0"/>
+            </a:srgbClr>
+          </a:solidFill>
+          <a:ln w="19050">
+            <a:solidFill>
+              <a:srgbClr val="1F77B4"/>
+            </a:solidFill>
+            <a:prstDash val="solid"/>
+          </a:ln>
+        </p:spPr>
+      </p:sp>
+      <p:pic>
+        <p:nvPicPr>
+          <p:cNvPr id="7" name="Picture 6">
+            <a:extLst>
+              <a:ext uri="{FF2B5EF4-FFF2-40B4-BE49-F238E27FC236}">
+                <a16:creationId xmlns:a16="http://schemas.microsoft.com/office/drawing/2014/main" id="{D3A4E7C9-2549-A838-2179-5774C793CCFD}"/>
+              </a:ext>
+            </a:extLst>
+          </p:cNvPr>
+          <p:cNvPicPr>
+            <a:picLocks noChangeAspect="1"/>
+          </p:cNvPicPr>
+          <p:nvPr/>
+        </p:nvPicPr>
+        <p:blipFill>
+          <a:blip r:embed="rId3"/>
+          <a:stretch>
+            <a:fillRect/>
+          </a:stretch>
+        </p:blipFill>
+        <p:spPr>
+          <a:xfrm>
+            <a:off x="5258662" y="1328296"/>
+            <a:ext cx="5894361" cy="4752464"/>
+          </a:xfrm>
+          <a:prstGeom prst="rect">
+            <a:avLst/>
+          </a:prstGeom>
+        </p:spPr>
+      </p:pic>
+      <p:sp>
+        <p:nvSpPr>
+          <p:cNvPr id="14" name="TextBox 13">
+            <a:extLst>
+              <a:ext uri="{FF2B5EF4-FFF2-40B4-BE49-F238E27FC236}">
+                <a16:creationId xmlns:a16="http://schemas.microsoft.com/office/drawing/2014/main" id="{47FA41B1-A470-B775-4A0A-763EA693A10F}"/>
+              </a:ext>
+            </a:extLst>
+          </p:cNvPr>
+          <p:cNvSpPr txBox="1"/>
+          <p:nvPr/>
+        </p:nvSpPr>
+        <p:spPr>
+          <a:xfrm>
+            <a:off x="502920" y="1285854"/>
+            <a:ext cx="6096000" cy="4216539"/>
+          </a:xfrm>
+          <a:prstGeom prst="rect">
+            <a:avLst/>
+          </a:prstGeom>
+          <a:noFill/>
+        </p:spPr>
+        <p:txBody>
+          <a:bodyPr wrap="square">
+            <a:spAutoFit/>
+          </a:bodyPr>
+          <a:lstStyle/>
+          <a:p>
+            <a:pPr>
+              <a:buNone/>
+            </a:pPr>
+            <a:r>
+              <a:rPr lang="en-US" sz="1400" b="1" dirty="0">
+                <a:solidFill>
+                  <a:schemeClr val="accent5"/>
+                </a:solidFill>
+              </a:rPr>
+              <a:t>Gates</a:t>
+            </a:r>
+          </a:p>
+          <a:p>
+            <a:pPr>
+              <a:buNone/>
+            </a:pPr>
+            <a:r>
+              <a:rPr lang="en-US" sz="1400" dirty="0"/>
+              <a:t>Stores the current status of each parking gate.</a:t>
+            </a:r>
+          </a:p>
+          <a:p>
+            <a:pPr>
+              <a:buFont typeface="Arial" panose="020B0604020202020204" pitchFamily="34" charset="0"/>
+              <a:buChar char="•"/>
+            </a:pPr>
+            <a:r>
+              <a:rPr lang="en-US" sz="1200" i="1" dirty="0"/>
+              <a:t>Identifies ENTRY and EXIT gates. </a:t>
+            </a:r>
+          </a:p>
+          <a:p>
+            <a:pPr>
+              <a:buFont typeface="Arial" panose="020B0604020202020204" pitchFamily="34" charset="0"/>
+              <a:buChar char="•"/>
+            </a:pPr>
+            <a:r>
+              <a:rPr lang="en-US" sz="1200" i="1" dirty="0"/>
+              <a:t>Stores the current gate state. </a:t>
+            </a:r>
+          </a:p>
+          <a:p>
+            <a:pPr>
+              <a:buFont typeface="Arial" panose="020B0604020202020204" pitchFamily="34" charset="0"/>
+              <a:buChar char="•"/>
+            </a:pPr>
+            <a:r>
+              <a:rPr lang="en-US" sz="1200" i="1" dirty="0"/>
+              <a:t>Records the latest </a:t>
+            </a:r>
+            <a:r>
+              <a:rPr lang="en-US" sz="1200" i="1" dirty="0">
+                <a:latin typeface="Courier New" panose="02070309020205020404" pitchFamily="49" charset="0"/>
+              </a:rPr>
+              <a:t>OPEN</a:t>
+            </a:r>
+            <a:r>
+              <a:rPr lang="en-US" sz="1200" i="1" dirty="0"/>
+              <a:t> or </a:t>
+            </a:r>
+            <a:r>
+              <a:rPr lang="en-US" sz="1200" i="1" dirty="0">
+                <a:latin typeface="Courier New" panose="02070309020205020404" pitchFamily="49" charset="0"/>
+              </a:rPr>
+              <a:t>CLOSE</a:t>
+            </a:r>
+            <a:r>
+              <a:rPr lang="en-US" sz="1200" i="1" dirty="0"/>
+              <a:t> decision. </a:t>
+            </a:r>
+          </a:p>
+          <a:p>
+            <a:pPr>
+              <a:buFont typeface="Arial" panose="020B0604020202020204" pitchFamily="34" charset="0"/>
+              <a:buChar char="•"/>
+            </a:pPr>
+            <a:r>
+              <a:rPr lang="en-US" sz="1200" i="1" dirty="0"/>
+              <a:t>Tracks the most recent update time. </a:t>
+            </a:r>
+          </a:p>
+          <a:p>
+            <a:pPr>
+              <a:buFont typeface="Arial" panose="020B0604020202020204" pitchFamily="34" charset="0"/>
+              <a:buChar char="•"/>
+            </a:pPr>
+            <a:endParaRPr lang="en-US" sz="1400" dirty="0"/>
+          </a:p>
+          <a:p>
+            <a:pPr>
+              <a:buNone/>
+            </a:pPr>
+            <a:r>
+              <a:rPr lang="en-US" sz="1400" b="1" dirty="0">
+                <a:solidFill>
+                  <a:schemeClr val="accent5"/>
+                </a:solidFill>
+              </a:rPr>
+              <a:t>Detection Events</a:t>
+            </a:r>
+          </a:p>
+          <a:p>
+            <a:pPr>
+              <a:buNone/>
+            </a:pPr>
+            <a:r>
+              <a:rPr lang="en-US" sz="1400" dirty="0"/>
+              <a:t>Stores the history of every vehicle-detection process.</a:t>
+            </a:r>
+          </a:p>
+          <a:p>
+            <a:pPr>
+              <a:buFont typeface="Arial" panose="020B0604020202020204" pitchFamily="34" charset="0"/>
+              <a:buChar char="•"/>
+            </a:pPr>
+            <a:r>
+              <a:rPr lang="en-US" sz="1200" i="1" dirty="0"/>
+              <a:t>Sensor distance and object-detection result. </a:t>
+            </a:r>
+          </a:p>
+          <a:p>
+            <a:pPr>
+              <a:buFont typeface="Arial" panose="020B0604020202020204" pitchFamily="34" charset="0"/>
+              <a:buChar char="•"/>
+            </a:pPr>
+            <a:r>
+              <a:rPr lang="en-US" sz="1200" i="1" dirty="0"/>
+              <a:t>Raw and YOLO-annotated image paths. </a:t>
+            </a:r>
+          </a:p>
+          <a:p>
+            <a:pPr>
+              <a:buFont typeface="Arial" panose="020B0604020202020204" pitchFamily="34" charset="0"/>
+              <a:buChar char="•"/>
+            </a:pPr>
+            <a:r>
+              <a:rPr lang="en-US" sz="1200" i="1" dirty="0"/>
+              <a:t>Detected vehicle class and confidence score. </a:t>
+            </a:r>
+          </a:p>
+          <a:p>
+            <a:pPr>
+              <a:buFont typeface="Arial" panose="020B0604020202020204" pitchFamily="34" charset="0"/>
+              <a:buChar char="•"/>
+            </a:pPr>
+            <a:r>
+              <a:rPr lang="en-US" sz="1200" i="1" dirty="0"/>
+              <a:t>Final gate decision and processing status. </a:t>
+            </a:r>
+          </a:p>
+          <a:p>
+            <a:pPr>
+              <a:buFont typeface="Arial" panose="020B0604020202020204" pitchFamily="34" charset="0"/>
+              <a:buChar char="•"/>
+            </a:pPr>
+            <a:r>
+              <a:rPr lang="en-US" sz="1200" i="1" dirty="0"/>
+              <a:t>Vehicle count before and after each event. </a:t>
+            </a:r>
+          </a:p>
+          <a:p>
+            <a:pPr>
+              <a:buFont typeface="Arial" panose="020B0604020202020204" pitchFamily="34" charset="0"/>
+              <a:buChar char="•"/>
+            </a:pPr>
+            <a:r>
+              <a:rPr lang="en-US" sz="1200" i="1" dirty="0"/>
+              <a:t>Error details when processing fails. </a:t>
+            </a:r>
+          </a:p>
+          <a:p>
+            <a:endParaRPr lang="en-US" sz="1400" dirty="0"/>
+          </a:p>
+          <a:p>
+            <a:pPr>
+              <a:buNone/>
+            </a:pPr>
+            <a:r>
+              <a:rPr lang="en-US" sz="1400" b="1" dirty="0">
+                <a:solidFill>
+                  <a:schemeClr val="accent5"/>
+                </a:solidFill>
+              </a:rPr>
+              <a:t>Parking Occupancy</a:t>
+            </a:r>
+          </a:p>
+          <a:p>
+            <a:pPr>
+              <a:buNone/>
+            </a:pPr>
+            <a:r>
+              <a:rPr lang="en-US" sz="1400" dirty="0"/>
+              <a:t>Stores the current parking-space status.</a:t>
+            </a:r>
+          </a:p>
+          <a:p>
+            <a:pPr>
+              <a:buFont typeface="Arial" panose="020B0604020202020204" pitchFamily="34" charset="0"/>
+              <a:buChar char="•"/>
+            </a:pPr>
+            <a:r>
+              <a:rPr lang="en-US" sz="1200" i="1" dirty="0"/>
+              <a:t>Maximum parking capacity. </a:t>
+            </a:r>
+          </a:p>
+          <a:p>
+            <a:pPr>
+              <a:buFont typeface="Arial" panose="020B0604020202020204" pitchFamily="34" charset="0"/>
+              <a:buChar char="•"/>
+            </a:pPr>
+            <a:r>
+              <a:rPr lang="en-US" sz="1200" i="1" dirty="0"/>
+              <a:t>Current number of vehicles inside. </a:t>
+            </a:r>
+          </a:p>
+          <a:p>
+            <a:pPr>
+              <a:buFont typeface="Arial" panose="020B0604020202020204" pitchFamily="34" charset="0"/>
+              <a:buChar char="•"/>
+            </a:pPr>
+            <a:r>
+              <a:rPr lang="en-US" sz="1200" i="1" dirty="0"/>
+              <a:t>Last occupancy update time.</a:t>
+            </a:r>
+          </a:p>
+        </p:txBody>
+      </p:sp>
+      <p:pic>
+        <p:nvPicPr>
+          <p:cNvPr id="17" name="Picture 16">
+            <a:extLst>
+              <a:ext uri="{FF2B5EF4-FFF2-40B4-BE49-F238E27FC236}">
+                <a16:creationId xmlns:a16="http://schemas.microsoft.com/office/drawing/2014/main" id="{7EB1DB73-1BA5-BCF4-2C7F-9CE3AD0AC6A1}"/>
+              </a:ext>
+            </a:extLst>
+          </p:cNvPr>
+          <p:cNvPicPr>
+            <a:picLocks noChangeAspect="1"/>
+          </p:cNvPicPr>
+          <p:nvPr/>
+        </p:nvPicPr>
+        <p:blipFill>
+          <a:blip r:embed="rId4"/>
+          <a:stretch>
+            <a:fillRect/>
+          </a:stretch>
+        </p:blipFill>
+        <p:spPr>
+          <a:xfrm>
+            <a:off x="9734550" y="44112"/>
+            <a:ext cx="2356685" cy="920580"/>
+          </a:xfrm>
+          <a:prstGeom prst="rect">
+            <a:avLst/>
+          </a:prstGeom>
+        </p:spPr>
+      </p:pic>
+    </p:spTree>
+    <p:extLst>
+      <p:ext uri="{BB962C8B-B14F-4D97-AF65-F5344CB8AC3E}">
+        <p14:creationId xmlns:p14="http://schemas.microsoft.com/office/powerpoint/2010/main" val="1175309326"/>
+      </p:ext>
+    </p:extLst>
+  </p:cSld>
+  <p:clrMapOvr>
+    <a:masterClrMapping/>
+  </p:clrMapOvr>
+</p:sld>
+</file>
+
+<file path=ppt/slides/slide11.xml><?xml version="1.0" encoding="utf-8"?>
+<p:sld xmlns:a="http://schemas.openxmlformats.org/drawingml/2006/main" xmlns:r="http://schemas.openxmlformats.org/officeDocument/2006/relationships" xmlns:p="http://schemas.openxmlformats.org/presentationml/2006/main">
+  <p:cSld name="Slide 9">
+    <p:spTree>
+      <p:nvGrpSpPr>
+        <p:cNvPr id="1" name=""/>
+        <p:cNvGrpSpPr/>
+        <p:nvPr/>
+      </p:nvGrpSpPr>
+      <p:grpSpPr>
+        <a:xfrm>
+          <a:off x="0" y="0"/>
+          <a:ext cx="0" cy="0"/>
+          <a:chOff x="0" y="0"/>
+          <a:chExt cx="0" cy="0"/>
+        </a:xfrm>
+      </p:grpSpPr>
+      <p:sp>
+        <p:nvSpPr>
+          <p:cNvPr id="2" name="Text 0"/>
+          <p:cNvSpPr/>
+          <p:nvPr/>
+        </p:nvSpPr>
+        <p:spPr>
+          <a:xfrm>
+            <a:off x="502920" y="320040"/>
+            <a:ext cx="11155680" cy="411480"/>
+          </a:xfrm>
+          <a:prstGeom prst="rect">
+            <a:avLst/>
+          </a:prstGeom>
+          <a:noFill/>
+          <a:ln/>
+        </p:spPr>
+        <p:txBody>
+          <a:bodyPr wrap="square" lIns="0" tIns="0" rIns="0" bIns="0" rtlCol="0" anchor="ctr">
+            <a:normAutofit lnSpcReduction="10000"/>
+          </a:bodyPr>
+          <a:lstStyle/>
+          <a:p>
+            <a:pPr marL="0" indent="0">
+              <a:buNone/>
+            </a:pPr>
+            <a:r>
+              <a:rPr lang="en-US" sz="3000" b="1" dirty="0">
+                <a:solidFill>
+                  <a:srgbClr val="0B1F3A"/>
+                </a:solidFill>
+                <a:latin typeface="Montserrat" pitchFamily="34" charset="0"/>
+                <a:ea typeface="Montserrat" pitchFamily="34" charset="-122"/>
+                <a:cs typeface="Montserrat" pitchFamily="34" charset="-120"/>
+              </a:rPr>
+              <a:t>Web Dashboard Interface</a:t>
+            </a:r>
+            <a:endParaRPr lang="en-US" sz="3000" dirty="0"/>
+          </a:p>
+        </p:txBody>
+      </p:sp>
+      <p:sp>
+        <p:nvSpPr>
+          <p:cNvPr id="3" name="Text 1"/>
+          <p:cNvSpPr/>
+          <p:nvPr/>
+        </p:nvSpPr>
+        <p:spPr>
+          <a:xfrm>
+            <a:off x="530352" y="777240"/>
+            <a:ext cx="10972800" cy="228600"/>
+          </a:xfrm>
+          <a:prstGeom prst="rect">
+            <a:avLst/>
+          </a:prstGeom>
+          <a:noFill/>
+          <a:ln/>
+        </p:spPr>
+        <p:txBody>
+          <a:bodyPr wrap="square" lIns="0" tIns="0" rIns="0" bIns="0" rtlCol="0" anchor="ctr"/>
+          <a:lstStyle/>
+          <a:p>
+            <a:pPr marL="0" indent="0">
+              <a:buNone/>
+            </a:pPr>
+            <a:r>
+              <a:rPr lang="en-US" sz="1250" dirty="0">
+                <a:solidFill>
+                  <a:srgbClr val="5B6472"/>
+                </a:solidFill>
+                <a:latin typeface="Roboto" pitchFamily="34" charset="0"/>
+                <a:ea typeface="Roboto" pitchFamily="34" charset="-122"/>
+                <a:cs typeface="Roboto" pitchFamily="34" charset="-120"/>
+              </a:rPr>
+              <a:t>Real-time monitoring for parking management.</a:t>
+            </a:r>
+            <a:endParaRPr lang="en-US" sz="1250" dirty="0"/>
+          </a:p>
+        </p:txBody>
+      </p:sp>
+      <p:sp>
+        <p:nvSpPr>
+          <p:cNvPr id="4" name="Shape 2"/>
+          <p:cNvSpPr/>
+          <p:nvPr/>
+        </p:nvSpPr>
+        <p:spPr>
+          <a:xfrm>
+            <a:off x="502920" y="1078992"/>
+            <a:ext cx="11155680" cy="0"/>
+          </a:xfrm>
+          <a:prstGeom prst="line">
+            <a:avLst/>
+          </a:prstGeom>
+          <a:noFill/>
+          <a:ln w="12700">
+            <a:solidFill>
+              <a:srgbClr val="B9C2CF"/>
+            </a:solidFill>
+            <a:prstDash val="solid"/>
+          </a:ln>
+        </p:spPr>
+      </p:sp>
+      <p:sp>
+        <p:nvSpPr>
+          <p:cNvPr id="5" name="Shape 3"/>
+          <p:cNvSpPr/>
+          <p:nvPr/>
+        </p:nvSpPr>
+        <p:spPr>
+          <a:xfrm>
+            <a:off x="731520" y="1325880"/>
+            <a:ext cx="10744200" cy="4297680"/>
+          </a:xfrm>
+          <a:prstGeom prst="rect">
+            <a:avLst/>
+          </a:prstGeom>
+          <a:solidFill>
+            <a:srgbClr val="FFFFFF">
+              <a:alpha val="0"/>
+            </a:srgbClr>
+          </a:solidFill>
+          <a:ln w="19050">
+            <a:solidFill>
+              <a:srgbClr val="1F77B4"/>
+            </a:solidFill>
+            <a:prstDash val="solid"/>
+          </a:ln>
+        </p:spPr>
+      </p:sp>
+      <p:sp>
+        <p:nvSpPr>
+          <p:cNvPr id="6" name="Text 4"/>
+          <p:cNvSpPr/>
+          <p:nvPr/>
+        </p:nvSpPr>
+        <p:spPr>
+          <a:xfrm>
+            <a:off x="868680" y="3140964"/>
+            <a:ext cx="10469880" cy="320040"/>
+          </a:xfrm>
+          <a:prstGeom prst="rect">
+            <a:avLst/>
+          </a:prstGeom>
+          <a:noFill/>
+          <a:ln/>
+        </p:spPr>
+        <p:txBody>
+          <a:bodyPr wrap="square" lIns="0" tIns="0" rIns="0" bIns="0" rtlCol="0" anchor="ctr">
+            <a:normAutofit/>
+          </a:bodyPr>
+          <a:lstStyle/>
+          <a:p>
+            <a:pPr marL="0" indent="0" algn="ctr">
+              <a:buNone/>
+            </a:pPr>
+            <a:r>
+              <a:rPr lang="en-US" sz="1600" b="1" dirty="0">
+                <a:solidFill>
+                  <a:srgbClr val="1F77B4"/>
+                </a:solidFill>
+                <a:latin typeface="Montserrat" pitchFamily="34" charset="0"/>
+                <a:ea typeface="Montserrat" pitchFamily="34" charset="-122"/>
+                <a:cs typeface="Montserrat" pitchFamily="34" charset="-120"/>
+              </a:rPr>
+              <a:t>INSERT WEB DASHBOARD SCREENSHOT / MOCKUP</a:t>
+            </a:r>
+            <a:endParaRPr lang="en-US" sz="1600" dirty="0"/>
+          </a:p>
+        </p:txBody>
+      </p:sp>
+      <p:sp>
+        <p:nvSpPr>
+          <p:cNvPr id="7" name="Text 5"/>
+          <p:cNvSpPr/>
+          <p:nvPr/>
+        </p:nvSpPr>
+        <p:spPr>
+          <a:xfrm>
+            <a:off x="914400" y="3525012"/>
+            <a:ext cx="10378440" cy="320040"/>
+          </a:xfrm>
+          <a:prstGeom prst="rect">
+            <a:avLst/>
+          </a:prstGeom>
+          <a:noFill/>
+          <a:ln/>
+        </p:spPr>
+        <p:txBody>
+          <a:bodyPr wrap="square" lIns="0" tIns="0" rIns="0" bIns="0" rtlCol="0" anchor="ctr">
+            <a:normAutofit/>
+          </a:bodyPr>
+          <a:lstStyle/>
+          <a:p>
+            <a:pPr marL="0" indent="0" algn="ctr">
+              <a:buNone/>
+            </a:pPr>
+            <a:r>
+              <a:rPr lang="en-US" sz="1050" dirty="0">
+                <a:solidFill>
+                  <a:srgbClr val="5B6472"/>
+                </a:solidFill>
+                <a:latin typeface="Roboto" pitchFamily="34" charset="0"/>
+                <a:ea typeface="Roboto" pitchFamily="34" charset="-122"/>
+                <a:cs typeface="Roboto" pitchFamily="34" charset="-120"/>
+              </a:rPr>
+              <a:t>Insert the final dashboard image, or a mockup if the implementation is not finished.</a:t>
+            </a:r>
+            <a:endParaRPr lang="en-US" sz="1050" dirty="0"/>
+          </a:p>
+        </p:txBody>
+      </p:sp>
+      <p:sp>
+        <p:nvSpPr>
+          <p:cNvPr id="8" name="Text 6"/>
+          <p:cNvSpPr/>
+          <p:nvPr/>
+        </p:nvSpPr>
+        <p:spPr>
+          <a:xfrm>
+            <a:off x="777240" y="5788152"/>
+            <a:ext cx="2468880" cy="274320"/>
+          </a:xfrm>
+          <a:prstGeom prst="rect">
+            <a:avLst/>
+          </a:prstGeom>
+          <a:noFill/>
+          <a:ln/>
+        </p:spPr>
+        <p:txBody>
+          <a:bodyPr wrap="square" lIns="0" tIns="0" rIns="0" bIns="0" rtlCol="0" anchor="ctr">
+            <a:normAutofit/>
+          </a:bodyPr>
+          <a:lstStyle/>
+          <a:p>
+            <a:pPr marL="0" indent="0">
+              <a:buNone/>
+            </a:pPr>
+            <a:r>
+              <a:rPr lang="en-US" sz="1800" b="1" dirty="0">
+                <a:solidFill>
+                  <a:srgbClr val="1F77B4"/>
+                </a:solidFill>
+                <a:latin typeface="Montserrat" pitchFamily="34" charset="0"/>
+                <a:ea typeface="Montserrat" pitchFamily="34" charset="-122"/>
+                <a:cs typeface="Montserrat" pitchFamily="34" charset="-120"/>
+              </a:rPr>
+              <a:t>Dashboard includes</a:t>
+            </a:r>
+            <a:endParaRPr lang="en-US" sz="1800" dirty="0"/>
+          </a:p>
+        </p:txBody>
+      </p:sp>
+      <p:sp>
+        <p:nvSpPr>
+          <p:cNvPr id="9" name="Text 7"/>
+          <p:cNvSpPr/>
+          <p:nvPr/>
+        </p:nvSpPr>
+        <p:spPr>
+          <a:xfrm>
+            <a:off x="3429000" y="5779008"/>
+            <a:ext cx="7909560" cy="320040"/>
+          </a:xfrm>
+          <a:prstGeom prst="rect">
+            <a:avLst/>
+          </a:prstGeom>
+          <a:noFill/>
+          <a:ln/>
+        </p:spPr>
+        <p:txBody>
+          <a:bodyPr wrap="square" lIns="0" tIns="0" rIns="0" bIns="0" rtlCol="0" anchor="ctr">
+            <a:normAutofit/>
+          </a:bodyPr>
+          <a:lstStyle/>
+          <a:p>
+            <a:pPr marL="0" indent="0">
+              <a:buNone/>
+            </a:pPr>
+            <a:r>
+              <a:rPr lang="en-US" sz="1450" dirty="0">
+                <a:solidFill>
+                  <a:srgbClr val="1A1A1A"/>
+                </a:solidFill>
+                <a:latin typeface="Roboto" pitchFamily="34" charset="0"/>
+                <a:ea typeface="Roboto" pitchFamily="34" charset="-122"/>
+                <a:cs typeface="Roboto" pitchFamily="34" charset="-120"/>
+              </a:rPr>
+              <a:t>Total vehicles  •  Entries today  •  Exits today  •  Parking logs  •  Latest captured images</a:t>
+            </a:r>
+            <a:endParaRPr lang="en-US" sz="1450" dirty="0"/>
+          </a:p>
+        </p:txBody>
+      </p:sp>
+      <p:sp>
+        <p:nvSpPr>
+          <p:cNvPr id="10" name="Text 8"/>
+          <p:cNvSpPr/>
+          <p:nvPr/>
+        </p:nvSpPr>
+        <p:spPr>
+          <a:xfrm>
+            <a:off x="502920" y="6547104"/>
+            <a:ext cx="11155680" cy="182880"/>
+          </a:xfrm>
+          <a:prstGeom prst="rect">
+            <a:avLst/>
+          </a:prstGeom>
+          <a:noFill/>
+          <a:ln/>
+        </p:spPr>
+        <p:txBody>
+          <a:bodyPr wrap="square" lIns="0" tIns="0" rIns="0" bIns="0" rtlCol="0" anchor="ctr"/>
+          <a:lstStyle/>
+          <a:p>
+            <a:pPr marL="0" indent="0" algn="r">
+              <a:buNone/>
+            </a:pPr>
+            <a:r>
+              <a:rPr lang="en-US" sz="850" dirty="0">
+                <a:solidFill>
+                  <a:srgbClr val="7B8491"/>
+                </a:solidFill>
+                <a:latin typeface="Roboto" pitchFamily="34" charset="0"/>
+                <a:ea typeface="Roboto" pitchFamily="34" charset="-122"/>
+                <a:cs typeface="Roboto" pitchFamily="34" charset="-120"/>
+              </a:rPr>
+              <a:t>Smart Parking System  |  11</a:t>
+            </a:r>
+            <a:endParaRPr lang="en-US" sz="850" dirty="0"/>
+          </a:p>
+        </p:txBody>
+      </p:sp>
+      <p:pic>
+        <p:nvPicPr>
+          <p:cNvPr id="12" name="Picture 11">
+            <a:extLst>
+              <a:ext uri="{FF2B5EF4-FFF2-40B4-BE49-F238E27FC236}">
+                <a16:creationId xmlns:a16="http://schemas.microsoft.com/office/drawing/2014/main" id="{BF7A1791-30B7-FBC1-1BD7-0152B236F326}"/>
+              </a:ext>
+            </a:extLst>
+          </p:cNvPr>
+          <p:cNvPicPr>
+            <a:picLocks noChangeAspect="1"/>
+          </p:cNvPicPr>
+          <p:nvPr/>
+        </p:nvPicPr>
+        <p:blipFill>
+          <a:blip r:embed="rId3"/>
+          <a:srcRect b="20800"/>
+          <a:stretch>
+            <a:fillRect/>
+          </a:stretch>
+        </p:blipFill>
+        <p:spPr>
+          <a:xfrm>
+            <a:off x="800100" y="1353312"/>
+            <a:ext cx="10591800" cy="4178808"/>
+          </a:xfrm>
+          <a:prstGeom prst="rect">
+            <a:avLst/>
+          </a:prstGeom>
+        </p:spPr>
+      </p:pic>
+      <p:pic>
+        <p:nvPicPr>
+          <p:cNvPr id="13" name="Picture 12">
+            <a:extLst>
+              <a:ext uri="{FF2B5EF4-FFF2-40B4-BE49-F238E27FC236}">
+                <a16:creationId xmlns:a16="http://schemas.microsoft.com/office/drawing/2014/main" id="{6A6897B2-A190-C30B-DF03-C1FB419B46EE}"/>
+              </a:ext>
+            </a:extLst>
+          </p:cNvPr>
+          <p:cNvPicPr>
+            <a:picLocks noChangeAspect="1"/>
+          </p:cNvPicPr>
+          <p:nvPr/>
+        </p:nvPicPr>
+        <p:blipFill>
+          <a:blip r:embed="rId4"/>
+          <a:stretch>
+            <a:fillRect/>
+          </a:stretch>
+        </p:blipFill>
+        <p:spPr>
+          <a:xfrm>
+            <a:off x="9734550" y="44112"/>
+            <a:ext cx="2356685" cy="920580"/>
+          </a:xfrm>
+          <a:prstGeom prst="rect">
+            <a:avLst/>
+          </a:prstGeom>
+        </p:spPr>
+      </p:pic>
+    </p:spTree>
+  </p:cSld>
+  <p:clrMapOvr>
+    <a:masterClrMapping/>
+  </p:clrMapOvr>
+</p:sld>
+</file>
+
+<file path=ppt/slides/slide12.xml><?xml version="1.0" encoding="utf-8"?>
+<p:sld xmlns:a="http://schemas.openxmlformats.org/drawingml/2006/main" xmlns:r="http://schemas.openxmlformats.org/officeDocument/2006/relationships" xmlns:p="http://schemas.openxmlformats.org/presentationml/2006/main">
+  <p:cSld>
+    <p:spTree>
+      <p:nvGrpSpPr>
+        <p:cNvPr id="1" name="">
+          <a:extLst>
+            <a:ext uri="{FF2B5EF4-FFF2-40B4-BE49-F238E27FC236}">
+              <a16:creationId xmlns:a16="http://schemas.microsoft.com/office/drawing/2014/main" id="{1E9BA262-3486-6711-E79D-6C0B34B254D7}"/>
+            </a:ext>
+          </a:extLst>
+        </p:cNvPr>
+        <p:cNvGrpSpPr/>
+        <p:nvPr/>
+      </p:nvGrpSpPr>
+      <p:grpSpPr>
+        <a:xfrm>
+          <a:off x="0" y="0"/>
+          <a:ext cx="0" cy="0"/>
+          <a:chOff x="0" y="0"/>
+          <a:chExt cx="0" cy="0"/>
+        </a:xfrm>
+      </p:grpSpPr>
+      <p:sp>
+        <p:nvSpPr>
+          <p:cNvPr id="2" name="Text 0">
+            <a:extLst>
+              <a:ext uri="{FF2B5EF4-FFF2-40B4-BE49-F238E27FC236}">
+                <a16:creationId xmlns:a16="http://schemas.microsoft.com/office/drawing/2014/main" id="{345091F1-588D-EDD0-A8A5-705F4775E96E}"/>
+              </a:ext>
+            </a:extLst>
+          </p:cNvPr>
+          <p:cNvSpPr/>
+          <p:nvPr/>
+        </p:nvSpPr>
+        <p:spPr>
+          <a:xfrm>
+            <a:off x="502920" y="320040"/>
+            <a:ext cx="11155680" cy="411480"/>
+          </a:xfrm>
+          <a:prstGeom prst="rect">
+            <a:avLst/>
+          </a:prstGeom>
+          <a:noFill/>
+          <a:ln/>
+        </p:spPr>
+        <p:txBody>
+          <a:bodyPr wrap="square" lIns="0" tIns="0" rIns="0" bIns="0" rtlCol="0" anchor="ctr">
+            <a:normAutofit lnSpcReduction="10000"/>
+          </a:bodyPr>
+          <a:lstStyle/>
+          <a:p>
+            <a:pPr marL="0" indent="0">
+              <a:buNone/>
+            </a:pPr>
+            <a:r>
+              <a:rPr lang="en-US" sz="3000" b="1" dirty="0">
+                <a:solidFill>
+                  <a:srgbClr val="0B1F3A"/>
+                </a:solidFill>
+                <a:latin typeface="Montserrat" pitchFamily="34" charset="0"/>
+                <a:ea typeface="Montserrat" pitchFamily="34" charset="-122"/>
+                <a:cs typeface="Montserrat" pitchFamily="34" charset="-120"/>
+              </a:rPr>
+              <a:t>Complete hardware prototype </a:t>
+            </a:r>
+            <a:endParaRPr lang="en-US" sz="3000" dirty="0"/>
+          </a:p>
+        </p:txBody>
+      </p:sp>
+      <p:sp>
+        <p:nvSpPr>
+          <p:cNvPr id="3" name="Text 1">
+            <a:extLst>
+              <a:ext uri="{FF2B5EF4-FFF2-40B4-BE49-F238E27FC236}">
+                <a16:creationId xmlns:a16="http://schemas.microsoft.com/office/drawing/2014/main" id="{5F31122F-35B4-BA7E-E9C0-67C3A4B7612C}"/>
+              </a:ext>
+            </a:extLst>
+          </p:cNvPr>
+          <p:cNvSpPr/>
+          <p:nvPr/>
+        </p:nvSpPr>
+        <p:spPr>
+          <a:xfrm>
+            <a:off x="530352" y="777240"/>
+            <a:ext cx="10972800" cy="228600"/>
+          </a:xfrm>
+          <a:prstGeom prst="rect">
+            <a:avLst/>
+          </a:prstGeom>
+          <a:noFill/>
+          <a:ln/>
+        </p:spPr>
+        <p:txBody>
+          <a:bodyPr wrap="square" lIns="0" tIns="0" rIns="0" bIns="0" rtlCol="0" anchor="ctr"/>
+          <a:lstStyle/>
+          <a:p>
+            <a:pPr marL="0" indent="0">
+              <a:buNone/>
+            </a:pPr>
+            <a:r>
+              <a:rPr lang="en-US" sz="1250" dirty="0">
+                <a:solidFill>
+                  <a:srgbClr val="5B6472"/>
+                </a:solidFill>
+                <a:latin typeface="Roboto" pitchFamily="34" charset="0"/>
+                <a:ea typeface="Roboto" pitchFamily="34" charset="-122"/>
+                <a:cs typeface="Roboto" pitchFamily="34" charset="-120"/>
+              </a:rPr>
+              <a:t>Complete wiring and functional prototype &amp; demonstrate </a:t>
+            </a:r>
+            <a:endParaRPr lang="en-US" sz="1250" dirty="0"/>
+          </a:p>
+        </p:txBody>
+      </p:sp>
+      <p:sp>
+        <p:nvSpPr>
+          <p:cNvPr id="4" name="Shape 2">
+            <a:extLst>
+              <a:ext uri="{FF2B5EF4-FFF2-40B4-BE49-F238E27FC236}">
+                <a16:creationId xmlns:a16="http://schemas.microsoft.com/office/drawing/2014/main" id="{E7705E8B-BFC1-8322-5AF8-1A4FC49DDEB2}"/>
+              </a:ext>
+            </a:extLst>
+          </p:cNvPr>
+          <p:cNvSpPr/>
+          <p:nvPr/>
+        </p:nvSpPr>
+        <p:spPr>
+          <a:xfrm>
+            <a:off x="502920" y="1078992"/>
+            <a:ext cx="11155680" cy="0"/>
+          </a:xfrm>
+          <a:prstGeom prst="line">
+            <a:avLst/>
+          </a:prstGeom>
+          <a:noFill/>
+          <a:ln w="12700">
+            <a:solidFill>
+              <a:srgbClr val="B9C2CF"/>
+            </a:solidFill>
+            <a:prstDash val="solid"/>
+          </a:ln>
+        </p:spPr>
+      </p:sp>
+      <p:sp>
+        <p:nvSpPr>
+          <p:cNvPr id="5" name="Shape 3">
+            <a:extLst>
+              <a:ext uri="{FF2B5EF4-FFF2-40B4-BE49-F238E27FC236}">
+                <a16:creationId xmlns:a16="http://schemas.microsoft.com/office/drawing/2014/main" id="{97899FD2-D77A-7039-F78E-8208F7CED933}"/>
+              </a:ext>
+            </a:extLst>
+          </p:cNvPr>
+          <p:cNvSpPr/>
+          <p:nvPr/>
+        </p:nvSpPr>
+        <p:spPr>
+          <a:xfrm>
+            <a:off x="731520" y="1325880"/>
+            <a:ext cx="10744200" cy="4297680"/>
+          </a:xfrm>
+          <a:prstGeom prst="rect">
+            <a:avLst/>
+          </a:prstGeom>
+          <a:solidFill>
+            <a:srgbClr val="FFFFFF">
+              <a:alpha val="0"/>
+            </a:srgbClr>
+          </a:solidFill>
+          <a:ln w="19050">
+            <a:solidFill>
+              <a:srgbClr val="1F77B4"/>
+            </a:solidFill>
+            <a:prstDash val="solid"/>
+          </a:ln>
+        </p:spPr>
+      </p:sp>
+      <p:sp>
+        <p:nvSpPr>
+          <p:cNvPr id="6" name="Text 4">
+            <a:extLst>
+              <a:ext uri="{FF2B5EF4-FFF2-40B4-BE49-F238E27FC236}">
+                <a16:creationId xmlns:a16="http://schemas.microsoft.com/office/drawing/2014/main" id="{87E11D54-B39B-D817-C75C-E79B5437C515}"/>
+              </a:ext>
+            </a:extLst>
+          </p:cNvPr>
+          <p:cNvSpPr/>
+          <p:nvPr/>
+        </p:nvSpPr>
+        <p:spPr>
+          <a:xfrm>
+            <a:off x="868680" y="3140964"/>
+            <a:ext cx="10469880" cy="320040"/>
+          </a:xfrm>
+          <a:prstGeom prst="rect">
+            <a:avLst/>
+          </a:prstGeom>
+          <a:noFill/>
+          <a:ln/>
+        </p:spPr>
+        <p:txBody>
+          <a:bodyPr wrap="square" lIns="0" tIns="0" rIns="0" bIns="0" rtlCol="0" anchor="ctr">
+            <a:normAutofit/>
+          </a:bodyPr>
+          <a:lstStyle/>
+          <a:p>
+            <a:pPr marL="0" indent="0" algn="ctr">
+              <a:buNone/>
+            </a:pPr>
+            <a:r>
+              <a:rPr lang="en-US" sz="1600" b="1" dirty="0">
+                <a:solidFill>
+                  <a:srgbClr val="1F77B4"/>
+                </a:solidFill>
+                <a:latin typeface="Montserrat" pitchFamily="34" charset="0"/>
+                <a:ea typeface="Montserrat" pitchFamily="34" charset="-122"/>
+                <a:cs typeface="Montserrat" pitchFamily="34" charset="-120"/>
+              </a:rPr>
+              <a:t>INSERT WEB DASHBOARD SCREENSHOT / MOCKUP</a:t>
+            </a:r>
+            <a:endParaRPr lang="en-US" sz="1600" dirty="0"/>
+          </a:p>
+        </p:txBody>
+      </p:sp>
+      <p:sp>
+        <p:nvSpPr>
+          <p:cNvPr id="7" name="Text 5">
+            <a:extLst>
+              <a:ext uri="{FF2B5EF4-FFF2-40B4-BE49-F238E27FC236}">
+                <a16:creationId xmlns:a16="http://schemas.microsoft.com/office/drawing/2014/main" id="{15B89FE4-AEF4-D370-8203-DD09FAB188F0}"/>
+              </a:ext>
+            </a:extLst>
+          </p:cNvPr>
+          <p:cNvSpPr/>
+          <p:nvPr/>
+        </p:nvSpPr>
+        <p:spPr>
+          <a:xfrm>
+            <a:off x="914400" y="3525012"/>
+            <a:ext cx="10378440" cy="320040"/>
+          </a:xfrm>
+          <a:prstGeom prst="rect">
+            <a:avLst/>
+          </a:prstGeom>
+          <a:noFill/>
+          <a:ln/>
+        </p:spPr>
+        <p:txBody>
+          <a:bodyPr wrap="square" lIns="0" tIns="0" rIns="0" bIns="0" rtlCol="0" anchor="ctr">
+            <a:normAutofit/>
+          </a:bodyPr>
+          <a:lstStyle/>
+          <a:p>
+            <a:pPr marL="0" indent="0" algn="ctr">
+              <a:buNone/>
+            </a:pPr>
+            <a:r>
+              <a:rPr lang="en-US" sz="1050" dirty="0">
+                <a:solidFill>
+                  <a:srgbClr val="5B6472"/>
+                </a:solidFill>
+                <a:latin typeface="Roboto" pitchFamily="34" charset="0"/>
+                <a:ea typeface="Roboto" pitchFamily="34" charset="-122"/>
+                <a:cs typeface="Roboto" pitchFamily="34" charset="-120"/>
+              </a:rPr>
+              <a:t>Insert the final dashboard image, or a mockup if the implementation is not finished.</a:t>
+            </a:r>
+            <a:endParaRPr lang="en-US" sz="1050" dirty="0"/>
+          </a:p>
+        </p:txBody>
+      </p:sp>
+      <p:sp>
+        <p:nvSpPr>
+          <p:cNvPr id="10" name="Text 8">
+            <a:extLst>
+              <a:ext uri="{FF2B5EF4-FFF2-40B4-BE49-F238E27FC236}">
+                <a16:creationId xmlns:a16="http://schemas.microsoft.com/office/drawing/2014/main" id="{66191108-3FE1-BBCA-9E81-E9E7753758FA}"/>
+              </a:ext>
+            </a:extLst>
+          </p:cNvPr>
+          <p:cNvSpPr/>
+          <p:nvPr/>
+        </p:nvSpPr>
+        <p:spPr>
+          <a:xfrm>
+            <a:off x="530352" y="6547104"/>
+            <a:ext cx="11155680" cy="182880"/>
+          </a:xfrm>
+          <a:prstGeom prst="rect">
+            <a:avLst/>
+          </a:prstGeom>
+          <a:noFill/>
+          <a:ln/>
+        </p:spPr>
+        <p:txBody>
+          <a:bodyPr wrap="square" lIns="0" tIns="0" rIns="0" bIns="0" rtlCol="0" anchor="ctr"/>
+          <a:lstStyle/>
+          <a:p>
+            <a:pPr marL="0" indent="0" algn="r">
+              <a:buNone/>
+            </a:pPr>
+            <a:r>
+              <a:rPr lang="en-US" sz="850" dirty="0">
+                <a:solidFill>
+                  <a:srgbClr val="7B8491"/>
+                </a:solidFill>
+                <a:latin typeface="Roboto" pitchFamily="34" charset="0"/>
+                <a:ea typeface="Roboto" pitchFamily="34" charset="-122"/>
+                <a:cs typeface="Roboto" pitchFamily="34" charset="-120"/>
+              </a:rPr>
+              <a:t>Smart Parking System  |  12</a:t>
+            </a:r>
+            <a:endParaRPr lang="en-US" sz="850" dirty="0"/>
+          </a:p>
+        </p:txBody>
+      </p:sp>
+      <p:pic>
+        <p:nvPicPr>
+          <p:cNvPr id="13" name="Picture 12">
+            <a:extLst>
+              <a:ext uri="{FF2B5EF4-FFF2-40B4-BE49-F238E27FC236}">
+                <a16:creationId xmlns:a16="http://schemas.microsoft.com/office/drawing/2014/main" id="{6A2A7D17-02D6-1087-CB48-6643D409C56E}"/>
+              </a:ext>
+            </a:extLst>
+          </p:cNvPr>
+          <p:cNvPicPr>
+            <a:picLocks noChangeAspect="1"/>
+          </p:cNvPicPr>
+          <p:nvPr/>
+        </p:nvPicPr>
+        <p:blipFill>
+          <a:blip r:embed="rId3"/>
+          <a:stretch>
+            <a:fillRect/>
+          </a:stretch>
+        </p:blipFill>
+        <p:spPr>
+          <a:xfrm>
+            <a:off x="853440" y="1426465"/>
+            <a:ext cx="10485120" cy="4105655"/>
+          </a:xfrm>
+          <a:prstGeom prst="rect">
+            <a:avLst/>
+          </a:prstGeom>
+        </p:spPr>
+      </p:pic>
+      <p:sp>
+        <p:nvSpPr>
+          <p:cNvPr id="15" name="TextBox 14">
+            <a:extLst>
+              <a:ext uri="{FF2B5EF4-FFF2-40B4-BE49-F238E27FC236}">
+                <a16:creationId xmlns:a16="http://schemas.microsoft.com/office/drawing/2014/main" id="{4F2EC055-109D-FEA3-96F7-BF3B3CFB4262}"/>
+              </a:ext>
+            </a:extLst>
+          </p:cNvPr>
+          <p:cNvSpPr txBox="1"/>
+          <p:nvPr/>
+        </p:nvSpPr>
+        <p:spPr>
+          <a:xfrm>
+            <a:off x="600075" y="5765792"/>
+            <a:ext cx="6096000" cy="369332"/>
+          </a:xfrm>
+          <a:prstGeom prst="rect">
+            <a:avLst/>
+          </a:prstGeom>
+          <a:noFill/>
+        </p:spPr>
+        <p:txBody>
+          <a:bodyPr wrap="square">
+            <a:spAutoFit/>
+          </a:bodyPr>
+          <a:lstStyle/>
+          <a:p>
+            <a:pPr marL="0" indent="0">
+              <a:buNone/>
+            </a:pPr>
+            <a:r>
+              <a:rPr lang="en-US" b="1" dirty="0">
+                <a:solidFill>
+                  <a:srgbClr val="1F77B4"/>
+                </a:solidFill>
+                <a:latin typeface="Montserrat" pitchFamily="34" charset="0"/>
+                <a:ea typeface="Montserrat" pitchFamily="34" charset="-122"/>
+                <a:cs typeface="Montserrat" pitchFamily="34" charset="-120"/>
+              </a:rPr>
+              <a:t>Prototype</a:t>
+            </a:r>
+            <a:r>
+              <a:rPr lang="en-US" sz="1800" b="1" dirty="0">
+                <a:solidFill>
+                  <a:srgbClr val="1F77B4"/>
+                </a:solidFill>
+                <a:latin typeface="Montserrat" pitchFamily="34" charset="0"/>
+                <a:ea typeface="Montserrat" pitchFamily="34" charset="-122"/>
+                <a:cs typeface="Montserrat" pitchFamily="34" charset="-120"/>
+              </a:rPr>
+              <a:t> includes</a:t>
+            </a:r>
+            <a:endParaRPr lang="en-US" sz="1800" dirty="0"/>
+          </a:p>
+        </p:txBody>
+      </p:sp>
+      <p:sp>
+        <p:nvSpPr>
+          <p:cNvPr id="17" name="Text 7">
+            <a:extLst>
+              <a:ext uri="{FF2B5EF4-FFF2-40B4-BE49-F238E27FC236}">
+                <a16:creationId xmlns:a16="http://schemas.microsoft.com/office/drawing/2014/main" id="{57A45F9E-F279-1CD7-13C1-DF965F0EED4B}"/>
+              </a:ext>
+            </a:extLst>
+          </p:cNvPr>
+          <p:cNvSpPr/>
+          <p:nvPr/>
+        </p:nvSpPr>
+        <p:spPr>
+          <a:xfrm>
+            <a:off x="3429000" y="5779008"/>
+            <a:ext cx="7909560" cy="320040"/>
+          </a:xfrm>
+          <a:prstGeom prst="rect">
+            <a:avLst/>
+          </a:prstGeom>
+          <a:noFill/>
+          <a:ln/>
+        </p:spPr>
+        <p:txBody>
+          <a:bodyPr wrap="square" lIns="0" tIns="0" rIns="0" bIns="0" rtlCol="0" anchor="ctr">
+            <a:normAutofit/>
+          </a:bodyPr>
+          <a:lstStyle/>
+          <a:p>
+            <a:pPr marL="0" indent="0">
+              <a:buNone/>
+            </a:pPr>
+            <a:r>
+              <a:rPr lang="en-US" sz="1450" dirty="0">
+                <a:solidFill>
+                  <a:srgbClr val="1A1A1A"/>
+                </a:solidFill>
+                <a:latin typeface="Roboto" pitchFamily="34" charset="0"/>
+                <a:ea typeface="Roboto" pitchFamily="34" charset="-122"/>
+                <a:cs typeface="Roboto" pitchFamily="34" charset="-120"/>
+              </a:rPr>
+              <a:t>Master module, Slave modules + ESP32-Cam</a:t>
+            </a:r>
+            <a:endParaRPr lang="en-US" sz="1450" dirty="0"/>
+          </a:p>
+        </p:txBody>
+      </p:sp>
+      <p:pic>
+        <p:nvPicPr>
+          <p:cNvPr id="9" name="Picture 8">
+            <a:extLst>
+              <a:ext uri="{FF2B5EF4-FFF2-40B4-BE49-F238E27FC236}">
+                <a16:creationId xmlns:a16="http://schemas.microsoft.com/office/drawing/2014/main" id="{76993B82-F066-1210-1D73-91EC1CF1DE5F}"/>
+              </a:ext>
+            </a:extLst>
+          </p:cNvPr>
+          <p:cNvPicPr>
+            <a:picLocks noChangeAspect="1"/>
+          </p:cNvPicPr>
+          <p:nvPr/>
+        </p:nvPicPr>
+        <p:blipFill>
+          <a:blip r:embed="rId4"/>
+          <a:stretch>
+            <a:fillRect/>
+          </a:stretch>
+        </p:blipFill>
+        <p:spPr>
+          <a:xfrm>
+            <a:off x="9734550" y="44112"/>
+            <a:ext cx="2356685" cy="920580"/>
+          </a:xfrm>
+          <a:prstGeom prst="rect">
+            <a:avLst/>
+          </a:prstGeom>
+        </p:spPr>
+      </p:pic>
+    </p:spTree>
+    <p:extLst>
+      <p:ext uri="{BB962C8B-B14F-4D97-AF65-F5344CB8AC3E}">
+        <p14:creationId xmlns:p14="http://schemas.microsoft.com/office/powerpoint/2010/main" val="785874772"/>
+      </p:ext>
+    </p:extLst>
+  </p:cSld>
+  <p:clrMapOvr>
+    <a:masterClrMapping/>
+  </p:clrMapOvr>
+</p:sld>
+</file>
+
+<file path=ppt/slides/slide13.xml><?xml version="1.0" encoding="utf-8"?>
 <p:sld xmlns:a="http://schemas.openxmlformats.org/drawingml/2006/main" xmlns:r="http://schemas.openxmlformats.org/officeDocument/2006/relationships" xmlns:p="http://schemas.openxmlformats.org/presentationml/2006/main">
   <p:cSld name="Slide 10">
     <p:spTree>
@@ -1872,25 +3879,15 @@
         </p:spPr>
         <p:txBody>
           <a:bodyPr wrap="square" lIns="0" tIns="0" rIns="0" bIns="0" rtlCol="0" anchor="ctr">
-            <a:normAutofit/>
+            <a:normAutofit fontScale="92500" lnSpcReduction="10000"/>
           </a:bodyPr>
           <a:lstStyle/>
           <a:p>
-            <a:pPr marL="0" indent="0">
-              <a:buNone/>
-            </a:pPr>
-            <a:r>
-              <a:rPr lang="en-US" sz="3000" b="1" dirty="0">
-                <a:solidFill>
-                  <a:srgbClr val="0B1F3A"/>
-                </a:solidFill>
-                <a:latin typeface="Montserrat" pitchFamily="34" charset="0"/>
-                <a:ea typeface="Montserrat" pitchFamily="34" charset="-122"/>
-                <a:cs typeface="Montserrat" pitchFamily="34" charset="-120"/>
-              </a:rPr>
-              <a:t>Results and Benefits</a:t>
-            </a:r>
-            <a:endParaRPr lang="en-US" sz="3000" dirty="0"/>
+            <a:r>
+              <a:rPr lang="en-US" sz="3200" b="1" dirty="0"/>
+              <a:t>Testing Method and Conditions</a:t>
+            </a:r>
+            <a:endParaRPr lang="en-US" sz="3000" b="1" dirty="0"/>
           </a:p>
         </p:txBody>
       </p:sp>
@@ -1927,9 +3924,8 @@
                 <a:ea typeface="Roboto" pitchFamily="34" charset="-122"/>
                 <a:cs typeface="Roboto" pitchFamily="34" charset="-120"/>
               </a:rPr>
-              <a:t>Expected technical output and practical value.</a:t>
-            </a:r>
-            <a:endParaRPr lang="en-US" sz="1250" dirty="0"/>
+              <a:t>Experimental and prototype results</a:t>
+            </a:r>
           </a:p>
         </p:txBody>
       </p:sp>
@@ -1979,9 +3975,6 @@
           </a:bodyPr>
           <a:lstStyle/>
           <a:p>
-            <a:pPr marL="0" indent="0">
-              <a:buNone/>
-            </a:pPr>
             <a:r>
               <a:rPr lang="en-US" sz="1800" b="1" dirty="0">
                 <a:solidFill>
@@ -1991,9 +3984,9 @@
                 <a:ea typeface="Montserrat" pitchFamily="34" charset="-122"/>
                 <a:cs typeface="Montserrat" pitchFamily="34" charset="-120"/>
               </a:rPr>
-              <a:t>Technical Results</a:t>
-            </a:r>
-            <a:endParaRPr lang="en-US" sz="1800" dirty="0"/>
+              <a:t> Experimental Results</a:t>
+            </a:r>
+            <a:endParaRPr lang="en-US" b="1" dirty="0"/>
           </a:p>
         </p:txBody>
       </p:sp>
@@ -2006,7 +3999,7 @@
         <p:spPr>
           <a:xfrm>
             <a:off x="731520" y="1920240"/>
-            <a:ext cx="4892040" cy="3840480"/>
+            <a:ext cx="5857816" cy="3840480"/>
           </a:xfrm>
           <a:prstGeom prst="rect">
             <a:avLst/>
@@ -2025,17 +4018,17 @@
               <a:buChar char="•"/>
             </a:pPr>
             <a:r>
-              <a:rPr lang="en-US" sz="1900" dirty="0">
-                <a:solidFill>
-                  <a:srgbClr val="1A1A1A"/>
-                </a:solidFill>
-                <a:latin typeface="Roboto" pitchFamily="34" charset="0"/>
-                <a:ea typeface="Roboto" pitchFamily="34" charset="-122"/>
-                <a:cs typeface="Roboto" pitchFamily="34" charset="-120"/>
-              </a:rPr>
-              <a:t>Vehicle detection</a:t>
-            </a:r>
-            <a:endParaRPr lang="en-US" sz="1900" dirty="0"/>
+              <a:rPr lang="en-US" sz="2000" dirty="0"/>
+              <a:t>Total input images: </a:t>
+            </a:r>
+            <a:r>
+              <a:rPr lang="en-US" sz="2000" b="1" dirty="0"/>
+              <a:t>146</a:t>
+            </a:r>
+            <a:r>
+              <a:rPr lang="en-US" sz="2000" dirty="0"/>
+              <a:t> </a:t>
+            </a:r>
           </a:p>
           <a:p>
             <a:pPr marL="177800" indent="-177800">
@@ -2043,17 +4036,21 @@
               <a:buChar char="•"/>
             </a:pPr>
             <a:r>
-              <a:rPr lang="en-US" sz="1900" dirty="0">
-                <a:solidFill>
-                  <a:srgbClr val="1A1A1A"/>
-                </a:solidFill>
-                <a:latin typeface="Roboto" pitchFamily="34" charset="0"/>
-                <a:ea typeface="Roboto" pitchFamily="34" charset="-122"/>
-                <a:cs typeface="Roboto" pitchFamily="34" charset="-120"/>
-              </a:rPr>
-              <a:t>Image capture</a:t>
-            </a:r>
-            <a:endParaRPr lang="en-US" sz="1900" dirty="0"/>
+              <a:rPr lang="en-US" dirty="0"/>
+              <a:t>OPEN</a:t>
+            </a:r>
+            <a:r>
+              <a:rPr lang="en-US" sz="2000" dirty="0"/>
+              <a:t> decisions: </a:t>
+            </a:r>
+            <a:r>
+              <a:rPr lang="en-US" sz="2000" b="1" dirty="0"/>
+              <a:t>66</a:t>
+            </a:r>
+            <a:r>
+              <a:rPr lang="en-US" sz="2000" dirty="0"/>
+              <a:t> </a:t>
+            </a:r>
           </a:p>
           <a:p>
             <a:pPr marL="177800" indent="-177800">
@@ -2061,17 +4058,21 @@
               <a:buChar char="•"/>
             </a:pPr>
             <a:r>
-              <a:rPr lang="en-US" sz="1900" dirty="0">
-                <a:solidFill>
-                  <a:srgbClr val="1A1A1A"/>
-                </a:solidFill>
-                <a:latin typeface="Roboto" pitchFamily="34" charset="0"/>
-                <a:ea typeface="Roboto" pitchFamily="34" charset="-122"/>
-                <a:cs typeface="Roboto" pitchFamily="34" charset="-120"/>
-              </a:rPr>
-              <a:t>AI processing</a:t>
-            </a:r>
-            <a:endParaRPr lang="en-US" sz="1900" dirty="0"/>
+              <a:rPr lang="en-US" dirty="0"/>
+              <a:t>CLOSE</a:t>
+            </a:r>
+            <a:r>
+              <a:rPr lang="en-US" sz="2000" dirty="0"/>
+              <a:t> decisions: </a:t>
+            </a:r>
+            <a:r>
+              <a:rPr lang="en-US" sz="2000" b="1" dirty="0"/>
+              <a:t>80</a:t>
+            </a:r>
+            <a:r>
+              <a:rPr lang="en-US" sz="2000" dirty="0"/>
+              <a:t> </a:t>
+            </a:r>
           </a:p>
           <a:p>
             <a:pPr marL="177800" indent="-177800">
@@ -2079,17 +4080,17 @@
               <a:buChar char="•"/>
             </a:pPr>
             <a:r>
-              <a:rPr lang="en-US" sz="1900" dirty="0">
-                <a:solidFill>
-                  <a:srgbClr val="1A1A1A"/>
-                </a:solidFill>
-                <a:latin typeface="Roboto" pitchFamily="34" charset="0"/>
-                <a:ea typeface="Roboto" pitchFamily="34" charset="-122"/>
-                <a:cs typeface="Roboto" pitchFamily="34" charset="-120"/>
-              </a:rPr>
-              <a:t>Barrier control</a:t>
-            </a:r>
-            <a:endParaRPr lang="en-US" sz="1900" dirty="0"/>
+              <a:rPr lang="en-US" sz="2000" dirty="0"/>
+              <a:t>Positive-sample detection rate: </a:t>
+            </a:r>
+            <a:r>
+              <a:rPr lang="en-US" sz="2000" b="1" dirty="0"/>
+              <a:t>45.21%</a:t>
+            </a:r>
+            <a:r>
+              <a:rPr lang="en-US" sz="2000" dirty="0"/>
+              <a:t> </a:t>
+            </a:r>
           </a:p>
           <a:p>
             <a:pPr marL="177800" indent="-177800">
@@ -2097,16 +4098,136 @@
               <a:buChar char="•"/>
             </a:pPr>
             <a:r>
-              <a:rPr lang="en-US" sz="1900" dirty="0">
-                <a:solidFill>
-                  <a:srgbClr val="1A1A1A"/>
-                </a:solidFill>
-                <a:latin typeface="Roboto" pitchFamily="34" charset="0"/>
-                <a:ea typeface="Roboto" pitchFamily="34" charset="-122"/>
-                <a:cs typeface="Roboto" pitchFamily="34" charset="-120"/>
-              </a:rPr>
-              <a:t>Database logging</a:t>
-            </a:r>
+              <a:rPr lang="en-US" sz="2000" dirty="0"/>
+              <a:t>Miss rate: </a:t>
+            </a:r>
+            <a:r>
+              <a:rPr lang="en-US" sz="2000" b="1" dirty="0"/>
+              <a:t>54.79%</a:t>
+            </a:r>
+            <a:r>
+              <a:rPr lang="en-US" sz="2000" dirty="0"/>
+              <a:t> </a:t>
+            </a:r>
+          </a:p>
+          <a:p>
+            <a:pPr marL="177800" indent="-177800">
+              <a:buSzPct val="100000"/>
+              <a:buChar char="•"/>
+            </a:pPr>
+            <a:r>
+              <a:rPr lang="en-US" sz="2000" dirty="0"/>
+              <a:t>Average inference time: </a:t>
+            </a:r>
+            <a:r>
+              <a:rPr lang="en-US" sz="2000" b="1" dirty="0"/>
+              <a:t>432.23 </a:t>
+            </a:r>
+            <a:r>
+              <a:rPr lang="en-US" sz="2000" b="1" dirty="0" err="1"/>
+              <a:t>ms</a:t>
+            </a:r>
+            <a:r>
+              <a:rPr lang="en-US" sz="2000" dirty="0"/>
+              <a:t> </a:t>
+            </a:r>
+          </a:p>
+          <a:p>
+            <a:pPr marL="177800" indent="-177800">
+              <a:buSzPct val="100000"/>
+              <a:buChar char="•"/>
+            </a:pPr>
+            <a:r>
+              <a:rPr lang="en-US" sz="2000" dirty="0"/>
+              <a:t>Median inference time: </a:t>
+            </a:r>
+            <a:r>
+              <a:rPr lang="en-US" sz="2000" b="1" dirty="0"/>
+              <a:t>415.76 </a:t>
+            </a:r>
+            <a:r>
+              <a:rPr lang="en-US" sz="2000" b="1" dirty="0" err="1"/>
+              <a:t>ms</a:t>
+            </a:r>
+            <a:r>
+              <a:rPr lang="en-US" sz="2000" dirty="0"/>
+              <a:t> </a:t>
+            </a:r>
+          </a:p>
+          <a:p>
+            <a:pPr marL="177800" indent="-177800">
+              <a:buSzPct val="100000"/>
+              <a:buChar char="•"/>
+            </a:pPr>
+            <a:r>
+              <a:rPr lang="en-US" sz="2000" dirty="0"/>
+              <a:t>Maximum inference time: </a:t>
+            </a:r>
+            <a:r>
+              <a:rPr lang="en-US" sz="2000" b="1" dirty="0"/>
+              <a:t>837.82 </a:t>
+            </a:r>
+            <a:r>
+              <a:rPr lang="en-US" sz="2000" b="1" dirty="0" err="1"/>
+              <a:t>ms</a:t>
+            </a:r>
+            <a:r>
+              <a:rPr lang="en-US" sz="2000" dirty="0"/>
+              <a:t> </a:t>
+            </a:r>
+          </a:p>
+          <a:p>
+            <a:pPr marL="177800" indent="-177800">
+              <a:buSzPct val="100000"/>
+              <a:buChar char="•"/>
+            </a:pPr>
+            <a:r>
+              <a:rPr lang="en-US" sz="2000" dirty="0"/>
+              <a:t>Mean confidence of accepted detections: </a:t>
+            </a:r>
+            <a:r>
+              <a:rPr lang="en-US" sz="2000" b="1" dirty="0"/>
+              <a:t>72.63%</a:t>
+            </a:r>
+            <a:r>
+              <a:rPr lang="en-US" sz="2000" dirty="0"/>
+              <a:t> </a:t>
+            </a:r>
+          </a:p>
+          <a:p>
+            <a:pPr marL="177800" indent="-177800">
+              <a:buSzPct val="100000"/>
+              <a:buChar char="•"/>
+            </a:pPr>
+            <a:r>
+              <a:rPr lang="en-US" sz="2000" dirty="0"/>
+              <a:t>Accepted classes: </a:t>
+            </a:r>
+            <a:r>
+              <a:rPr lang="en-US" sz="2000" b="1" dirty="0"/>
+              <a:t>43 trucks and 23 cars</a:t>
+            </a:r>
+          </a:p>
+          <a:p>
+            <a:pPr marL="177800" indent="-177800">
+              <a:buSzPct val="100000"/>
+              <a:buFontTx/>
+              <a:buChar char="•"/>
+            </a:pPr>
+            <a:r>
+              <a:rPr lang="en-US" dirty="0"/>
+              <a:t>image size </a:t>
+            </a:r>
+            <a:r>
+              <a:rPr lang="en-US" b="1" dirty="0"/>
+              <a:t>640</a:t>
+            </a:r>
+          </a:p>
+          <a:p>
+            <a:pPr marL="177800" indent="-177800">
+              <a:buSzPct val="100000"/>
+              <a:buChar char="•"/>
+            </a:pPr>
             <a:endParaRPr lang="en-US" sz="1900" dirty="0"/>
           </a:p>
         </p:txBody>
@@ -2119,7 +4240,7 @@
         </p:nvSpPr>
         <p:spPr>
           <a:xfrm>
-            <a:off x="5989320" y="1463040"/>
+            <a:off x="6790598" y="1463040"/>
             <a:ext cx="0" cy="4526280"/>
           </a:xfrm>
           <a:prstGeom prst="line">
@@ -2142,7 +4263,7 @@
         </p:nvSpPr>
         <p:spPr>
           <a:xfrm>
-            <a:off x="6355080" y="1417320"/>
+            <a:off x="6939542" y="1417320"/>
             <a:ext cx="4892040" cy="274320"/>
           </a:xfrm>
           <a:prstGeom prst="rect">
@@ -2157,11 +4278,8 @@
           </a:bodyPr>
           <a:lstStyle/>
           <a:p>
-            <a:pPr marL="0" indent="0">
-              <a:buNone/>
-            </a:pPr>
-            <a:r>
-              <a:rPr lang="en-US" sz="1800" b="1" dirty="0">
+            <a:r>
+              <a:rPr lang="en-US" b="1" dirty="0">
                 <a:solidFill>
                   <a:srgbClr val="1F77B4"/>
                 </a:solidFill>
@@ -2169,7 +4287,7 @@
                 <a:ea typeface="Montserrat" pitchFamily="34" charset="-122"/>
                 <a:cs typeface="Montserrat" pitchFamily="34" charset="-120"/>
               </a:rPr>
-              <a:t>Practical Benefits</a:t>
+              <a:t>YOLO26l annotated result</a:t>
             </a:r>
             <a:endParaRPr lang="en-US" sz="1800" dirty="0"/>
           </a:p>
@@ -2177,14 +4295,14 @@
       </p:sp>
       <p:sp>
         <p:nvSpPr>
-          <p:cNvPr id="9" name="Text 7"/>
-          <p:cNvSpPr/>
-          <p:nvPr/>
-        </p:nvSpPr>
-        <p:spPr>
-          <a:xfrm>
-            <a:off x="6355080" y="1920240"/>
-            <a:ext cx="4892040" cy="3840480"/>
+          <p:cNvPr id="10" name="Text 8"/>
+          <p:cNvSpPr/>
+          <p:nvPr/>
+        </p:nvSpPr>
+        <p:spPr>
+          <a:xfrm>
+            <a:off x="502920" y="6547104"/>
+            <a:ext cx="11155680" cy="182880"/>
           </a:xfrm>
           <a:prstGeom prst="rect">
             <a:avLst/>
@@ -2193,141 +4311,262 @@
           <a:ln/>
         </p:spPr>
         <p:txBody>
-          <a:bodyPr wrap="square" lIns="381" tIns="381" rIns="381" bIns="381" rtlCol="0" anchor="ctr">
-            <a:normAutofit/>
-          </a:bodyPr>
-          <a:lstStyle/>
-          <a:p>
-            <a:pPr marL="177800" indent="-177800">
-              <a:buSzPct val="100000"/>
-              <a:buChar char="•"/>
-            </a:pPr>
-            <a:r>
-              <a:rPr lang="en-US" sz="1900" dirty="0">
-                <a:solidFill>
-                  <a:srgbClr val="1A1A1A"/>
+          <a:bodyPr wrap="square" lIns="0" tIns="0" rIns="0" bIns="0" rtlCol="0" anchor="ctr"/>
+          <a:lstStyle/>
+          <a:p>
+            <a:pPr marL="0" indent="0" algn="r">
+              <a:buNone/>
+            </a:pPr>
+            <a:r>
+              <a:rPr lang="en-US" sz="850" dirty="0">
+                <a:solidFill>
+                  <a:srgbClr val="7B8491"/>
                 </a:solidFill>
                 <a:latin typeface="Roboto" pitchFamily="34" charset="0"/>
                 <a:ea typeface="Roboto" pitchFamily="34" charset="-122"/>
                 <a:cs typeface="Roboto" pitchFamily="34" charset="-120"/>
               </a:rPr>
-              <a:t>Reduce manual work</a:t>
-            </a:r>
-            <a:endParaRPr lang="en-US" sz="1900" dirty="0"/>
-          </a:p>
-          <a:p>
-            <a:pPr marL="177800" indent="-177800">
-              <a:buSzPct val="100000"/>
-              <a:buChar char="•"/>
-            </a:pPr>
-            <a:r>
-              <a:rPr lang="en-US" sz="1900" dirty="0">
-                <a:solidFill>
-                  <a:srgbClr val="1A1A1A"/>
+              <a:t>Smart Parking System  |  13</a:t>
+            </a:r>
+            <a:endParaRPr lang="en-US" sz="850" dirty="0"/>
+          </a:p>
+        </p:txBody>
+      </p:sp>
+      <p:pic>
+        <p:nvPicPr>
+          <p:cNvPr id="12" name="Picture 11">
+            <a:extLst>
+              <a:ext uri="{FF2B5EF4-FFF2-40B4-BE49-F238E27FC236}">
+                <a16:creationId xmlns:a16="http://schemas.microsoft.com/office/drawing/2014/main" id="{27990DE6-08A3-0434-2522-06F27D84E9DC}"/>
+              </a:ext>
+            </a:extLst>
+          </p:cNvPr>
+          <p:cNvPicPr>
+            <a:picLocks noChangeAspect="1"/>
+          </p:cNvPicPr>
+          <p:nvPr/>
+        </p:nvPicPr>
+        <p:blipFill>
+          <a:blip r:embed="rId3"/>
+          <a:stretch>
+            <a:fillRect/>
+          </a:stretch>
+        </p:blipFill>
+        <p:spPr>
+          <a:xfrm>
+            <a:off x="6939541" y="2320287"/>
+            <a:ext cx="3192781" cy="1636776"/>
+          </a:xfrm>
+          <a:prstGeom prst="rect">
+            <a:avLst/>
+          </a:prstGeom>
+        </p:spPr>
+      </p:pic>
+      <p:pic>
+        <p:nvPicPr>
+          <p:cNvPr id="14" name="Picture 13">
+            <a:extLst>
+              <a:ext uri="{FF2B5EF4-FFF2-40B4-BE49-F238E27FC236}">
+                <a16:creationId xmlns:a16="http://schemas.microsoft.com/office/drawing/2014/main" id="{6D66B35D-B7D6-EF3D-C509-52FC6B66852C}"/>
+              </a:ext>
+            </a:extLst>
+          </p:cNvPr>
+          <p:cNvPicPr>
+            <a:picLocks noChangeAspect="1"/>
+          </p:cNvPicPr>
+          <p:nvPr/>
+        </p:nvPicPr>
+        <p:blipFill>
+          <a:blip r:embed="rId4"/>
+          <a:srcRect t="38818"/>
+          <a:stretch>
+            <a:fillRect/>
+          </a:stretch>
+        </p:blipFill>
+        <p:spPr>
+          <a:xfrm>
+            <a:off x="6939543" y="4305300"/>
+            <a:ext cx="3192780" cy="1684020"/>
+          </a:xfrm>
+          <a:prstGeom prst="rect">
+            <a:avLst/>
+          </a:prstGeom>
+        </p:spPr>
+      </p:pic>
+      <p:sp>
+        <p:nvSpPr>
+          <p:cNvPr id="16" name="Text 1">
+            <a:extLst>
+              <a:ext uri="{FF2B5EF4-FFF2-40B4-BE49-F238E27FC236}">
+                <a16:creationId xmlns:a16="http://schemas.microsoft.com/office/drawing/2014/main" id="{47117CA4-7BF5-DBAA-A293-FDDF9A5D0F16}"/>
+              </a:ext>
+            </a:extLst>
+          </p:cNvPr>
+          <p:cNvSpPr/>
+          <p:nvPr/>
+        </p:nvSpPr>
+        <p:spPr>
+          <a:xfrm>
+            <a:off x="6939541" y="2020824"/>
+            <a:ext cx="10972800" cy="228600"/>
+          </a:xfrm>
+          <a:prstGeom prst="rect">
+            <a:avLst/>
+          </a:prstGeom>
+          <a:noFill/>
+          <a:ln/>
+        </p:spPr>
+        <p:txBody>
+          <a:bodyPr wrap="square" lIns="0" tIns="0" rIns="0" bIns="0" rtlCol="0" anchor="ctr"/>
+          <a:lstStyle/>
+          <a:p>
+            <a:pPr marL="0" indent="0">
+              <a:buNone/>
+            </a:pPr>
+            <a:r>
+              <a:rPr lang="en-US" sz="1250" dirty="0">
+                <a:solidFill>
+                  <a:srgbClr val="5B6472"/>
                 </a:solidFill>
                 <a:latin typeface="Roboto" pitchFamily="34" charset="0"/>
                 <a:ea typeface="Roboto" pitchFamily="34" charset="-122"/>
                 <a:cs typeface="Roboto" pitchFamily="34" charset="-120"/>
               </a:rPr>
-              <a:t>Faster gate operation</a:t>
-            </a:r>
-            <a:endParaRPr lang="en-US" sz="1900" dirty="0"/>
-          </a:p>
-          <a:p>
-            <a:pPr marL="177800" indent="-177800">
-              <a:buSzPct val="100000"/>
-              <a:buChar char="•"/>
-            </a:pPr>
-            <a:r>
-              <a:rPr lang="en-US" sz="1900" dirty="0">
-                <a:solidFill>
-                  <a:srgbClr val="1A1A1A"/>
+              <a:t>Test image: detect car with confident: 0.95</a:t>
+            </a:r>
+            <a:endParaRPr lang="en-US" sz="1250" dirty="0"/>
+          </a:p>
+        </p:txBody>
+      </p:sp>
+      <p:sp>
+        <p:nvSpPr>
+          <p:cNvPr id="18" name="Text 1">
+            <a:extLst>
+              <a:ext uri="{FF2B5EF4-FFF2-40B4-BE49-F238E27FC236}">
+                <a16:creationId xmlns:a16="http://schemas.microsoft.com/office/drawing/2014/main" id="{2C0E7620-6603-23F4-52E0-31D33A131A12}"/>
+              </a:ext>
+            </a:extLst>
+          </p:cNvPr>
+          <p:cNvSpPr/>
+          <p:nvPr/>
+        </p:nvSpPr>
+        <p:spPr>
+          <a:xfrm>
+            <a:off x="6939543" y="3989832"/>
+            <a:ext cx="10972800" cy="228600"/>
+          </a:xfrm>
+          <a:prstGeom prst="rect">
+            <a:avLst/>
+          </a:prstGeom>
+          <a:noFill/>
+          <a:ln/>
+        </p:spPr>
+        <p:txBody>
+          <a:bodyPr wrap="square" lIns="0" tIns="0" rIns="0" bIns="0" rtlCol="0" anchor="ctr"/>
+          <a:lstStyle/>
+          <a:p>
+            <a:pPr marL="0" indent="0">
+              <a:buNone/>
+            </a:pPr>
+            <a:r>
+              <a:rPr lang="en-US" sz="1250" dirty="0">
+                <a:solidFill>
+                  <a:srgbClr val="5B6472"/>
                 </a:solidFill>
                 <a:latin typeface="Roboto" pitchFamily="34" charset="0"/>
                 <a:ea typeface="Roboto" pitchFamily="34" charset="-122"/>
                 <a:cs typeface="Roboto" pitchFamily="34" charset="-120"/>
               </a:rPr>
-              <a:t>Better monitoring</a:t>
-            </a:r>
-            <a:endParaRPr lang="en-US" sz="1900" dirty="0"/>
-          </a:p>
-          <a:p>
-            <a:pPr marL="177800" indent="-177800">
-              <a:buSzPct val="100000"/>
-              <a:buChar char="•"/>
-            </a:pPr>
-            <a:r>
-              <a:rPr lang="en-US" sz="1900" dirty="0">
-                <a:solidFill>
-                  <a:srgbClr val="1A1A1A"/>
+              <a:t>Prototype income image: detect truck with confident: 0.80</a:t>
+            </a:r>
+            <a:endParaRPr lang="en-US" sz="1250" dirty="0"/>
+          </a:p>
+        </p:txBody>
+      </p:sp>
+      <p:sp>
+        <p:nvSpPr>
+          <p:cNvPr id="20" name="Text 1">
+            <a:extLst>
+              <a:ext uri="{FF2B5EF4-FFF2-40B4-BE49-F238E27FC236}">
+                <a16:creationId xmlns:a16="http://schemas.microsoft.com/office/drawing/2014/main" id="{9E8EFA82-9943-F0AF-C626-B0E5D9C9A334}"/>
+              </a:ext>
+            </a:extLst>
+          </p:cNvPr>
+          <p:cNvSpPr/>
+          <p:nvPr/>
+        </p:nvSpPr>
+        <p:spPr>
+          <a:xfrm>
+            <a:off x="6939543" y="1724407"/>
+            <a:ext cx="10972800" cy="228600"/>
+          </a:xfrm>
+          <a:prstGeom prst="rect">
+            <a:avLst/>
+          </a:prstGeom>
+          <a:noFill/>
+          <a:ln/>
+        </p:spPr>
+        <p:txBody>
+          <a:bodyPr wrap="square" lIns="0" tIns="0" rIns="0" bIns="0" rtlCol="0" anchor="ctr"/>
+          <a:lstStyle/>
+          <a:p>
+            <a:r>
+              <a:rPr lang="en-US" sz="1250" dirty="0">
+                <a:solidFill>
+                  <a:srgbClr val="5B6472"/>
                 </a:solidFill>
                 <a:latin typeface="Roboto" pitchFamily="34" charset="0"/>
                 <a:ea typeface="Roboto" pitchFamily="34" charset="-122"/>
                 <a:cs typeface="Roboto" pitchFamily="34" charset="-120"/>
               </a:rPr>
-              <a:t>Improved security</a:t>
-            </a:r>
-            <a:endParaRPr lang="en-US" sz="1900" dirty="0"/>
-          </a:p>
-          <a:p>
-            <a:pPr marL="177800" indent="-177800">
-              <a:buSzPct val="100000"/>
-              <a:buChar char="•"/>
-            </a:pPr>
-            <a:r>
-              <a:rPr lang="en-US" sz="1900" dirty="0">
-                <a:solidFill>
-                  <a:srgbClr val="1A1A1A"/>
+              <a:t>Allowed classes for OPEN: ['bus', 'car', 'motorcycle', 'truck’] </a:t>
+            </a:r>
+          </a:p>
+          <a:p>
+            <a:r>
+              <a:rPr lang="en-US" sz="1250" dirty="0">
+                <a:solidFill>
+                  <a:srgbClr val="5B6472"/>
                 </a:solidFill>
                 <a:latin typeface="Roboto" pitchFamily="34" charset="0"/>
                 <a:ea typeface="Roboto" pitchFamily="34" charset="-122"/>
                 <a:cs typeface="Roboto" pitchFamily="34" charset="-120"/>
               </a:rPr>
-              <a:t>Easier management</a:t>
-            </a:r>
-            <a:endParaRPr lang="en-US" sz="1900" dirty="0"/>
-          </a:p>
-        </p:txBody>
-      </p:sp>
-      <p:sp>
-        <p:nvSpPr>
-          <p:cNvPr id="10" name="Text 8"/>
-          <p:cNvSpPr/>
-          <p:nvPr/>
-        </p:nvSpPr>
-        <p:spPr>
-          <a:xfrm>
-            <a:off x="502920" y="6547104"/>
-            <a:ext cx="11155680" cy="182880"/>
-          </a:xfrm>
-          <a:prstGeom prst="rect">
-            <a:avLst/>
-          </a:prstGeom>
-          <a:noFill/>
-          <a:ln/>
-        </p:spPr>
-        <p:txBody>
-          <a:bodyPr wrap="square" lIns="0" tIns="0" rIns="0" bIns="0" rtlCol="0" anchor="ctr"/>
-          <a:lstStyle/>
-          <a:p>
-            <a:pPr marL="0" indent="0" algn="r">
-              <a:buNone/>
-            </a:pPr>
-            <a:r>
-              <a:rPr lang="en-US" sz="850" dirty="0">
-                <a:solidFill>
-                  <a:srgbClr val="7B8491"/>
-                </a:solidFill>
-                <a:latin typeface="Roboto" pitchFamily="34" charset="0"/>
-                <a:ea typeface="Roboto" pitchFamily="34" charset="-122"/>
-                <a:cs typeface="Roboto" pitchFamily="34" charset="-120"/>
-              </a:rPr>
-              <a:t>Smart Parking System  |  10</a:t>
-            </a:r>
-            <a:endParaRPr lang="en-US" sz="850" dirty="0"/>
-          </a:p>
-        </p:txBody>
-      </p:sp>
+              <a:t>Confident threshold: 0.45</a:t>
+            </a:r>
+          </a:p>
+        </p:txBody>
+      </p:sp>
+      <p:pic>
+        <p:nvPicPr>
+          <p:cNvPr id="22" name="Picture 21">
+            <a:extLst>
+              <a:ext uri="{FF2B5EF4-FFF2-40B4-BE49-F238E27FC236}">
+                <a16:creationId xmlns:a16="http://schemas.microsoft.com/office/drawing/2014/main" id="{63CCA8AB-8C83-4563-B015-D8959A1B30A9}"/>
+              </a:ext>
+            </a:extLst>
+          </p:cNvPr>
+          <p:cNvPicPr>
+            <a:picLocks noChangeAspect="1"/>
+          </p:cNvPicPr>
+          <p:nvPr/>
+        </p:nvPicPr>
+        <p:blipFill>
+          <a:blip r:embed="rId5"/>
+          <a:stretch>
+            <a:fillRect/>
+          </a:stretch>
+        </p:blipFill>
+        <p:spPr>
+          <a:xfrm>
+            <a:off x="9734550" y="44112"/>
+            <a:ext cx="2356685" cy="920580"/>
+          </a:xfrm>
+          <a:prstGeom prst="rect">
+            <a:avLst/>
+          </a:prstGeom>
+        </p:spPr>
+      </p:pic>
     </p:spTree>
   </p:cSld>
   <p:clrMapOvr>
@@ -2336,7 +4575,602 @@
 </p:sld>
 </file>
 
-<file path=ppt/slides/slide11.xml><?xml version="1.0" encoding="utf-8"?>
+<file path=ppt/slides/slide14.xml><?xml version="1.0" encoding="utf-8"?>
+<p:sld xmlns:a="http://schemas.openxmlformats.org/drawingml/2006/main" xmlns:r="http://schemas.openxmlformats.org/officeDocument/2006/relationships" xmlns:p="http://schemas.openxmlformats.org/presentationml/2006/main">
+  <p:cSld>
+    <p:spTree>
+      <p:nvGrpSpPr>
+        <p:cNvPr id="1" name="">
+          <a:extLst>
+            <a:ext uri="{FF2B5EF4-FFF2-40B4-BE49-F238E27FC236}">
+              <a16:creationId xmlns:a16="http://schemas.microsoft.com/office/drawing/2014/main" id="{FBAC6E70-D580-3452-9E10-0EC04A413C74}"/>
+            </a:ext>
+          </a:extLst>
+        </p:cNvPr>
+        <p:cNvGrpSpPr/>
+        <p:nvPr/>
+      </p:nvGrpSpPr>
+      <p:grpSpPr>
+        <a:xfrm>
+          <a:off x="0" y="0"/>
+          <a:ext cx="0" cy="0"/>
+          <a:chOff x="0" y="0"/>
+          <a:chExt cx="0" cy="0"/>
+        </a:xfrm>
+      </p:grpSpPr>
+      <p:sp>
+        <p:nvSpPr>
+          <p:cNvPr id="2" name="Text 0">
+            <a:extLst>
+              <a:ext uri="{FF2B5EF4-FFF2-40B4-BE49-F238E27FC236}">
+                <a16:creationId xmlns:a16="http://schemas.microsoft.com/office/drawing/2014/main" id="{EB9BD1F4-D93E-89FE-6091-F22E9EB4BF2D}"/>
+              </a:ext>
+            </a:extLst>
+          </p:cNvPr>
+          <p:cNvSpPr/>
+          <p:nvPr/>
+        </p:nvSpPr>
+        <p:spPr>
+          <a:xfrm>
+            <a:off x="502920" y="320040"/>
+            <a:ext cx="11155680" cy="411480"/>
+          </a:xfrm>
+          <a:prstGeom prst="rect">
+            <a:avLst/>
+          </a:prstGeom>
+          <a:noFill/>
+          <a:ln/>
+        </p:spPr>
+        <p:txBody>
+          <a:bodyPr wrap="square" lIns="0" tIns="0" rIns="0" bIns="0" rtlCol="0" anchor="ctr">
+            <a:normAutofit lnSpcReduction="10000"/>
+          </a:bodyPr>
+          <a:lstStyle/>
+          <a:p>
+            <a:pPr marL="0" indent="0">
+              <a:buNone/>
+            </a:pPr>
+            <a:r>
+              <a:rPr lang="en-US" sz="3000" b="1" dirty="0">
+                <a:solidFill>
+                  <a:srgbClr val="0B1F3A"/>
+                </a:solidFill>
+                <a:latin typeface="Montserrat" pitchFamily="34" charset="0"/>
+                <a:ea typeface="Montserrat" pitchFamily="34" charset="-122"/>
+                <a:cs typeface="Montserrat" pitchFamily="34" charset="-120"/>
+              </a:rPr>
+              <a:t>Results and Benefits</a:t>
+            </a:r>
+            <a:endParaRPr lang="en-US" sz="3000" dirty="0"/>
+          </a:p>
+        </p:txBody>
+      </p:sp>
+      <p:sp>
+        <p:nvSpPr>
+          <p:cNvPr id="3" name="Text 1">
+            <a:extLst>
+              <a:ext uri="{FF2B5EF4-FFF2-40B4-BE49-F238E27FC236}">
+                <a16:creationId xmlns:a16="http://schemas.microsoft.com/office/drawing/2014/main" id="{FAC2EBC8-1AB6-E0A2-8E4C-9CA08666C991}"/>
+              </a:ext>
+            </a:extLst>
+          </p:cNvPr>
+          <p:cNvSpPr/>
+          <p:nvPr/>
+        </p:nvSpPr>
+        <p:spPr>
+          <a:xfrm>
+            <a:off x="530352" y="777240"/>
+            <a:ext cx="10972800" cy="228600"/>
+          </a:xfrm>
+          <a:prstGeom prst="rect">
+            <a:avLst/>
+          </a:prstGeom>
+          <a:noFill/>
+          <a:ln/>
+        </p:spPr>
+        <p:txBody>
+          <a:bodyPr wrap="square" lIns="0" tIns="0" rIns="0" bIns="0" rtlCol="0" anchor="ctr"/>
+          <a:lstStyle/>
+          <a:p>
+            <a:pPr marL="0" indent="0">
+              <a:buNone/>
+            </a:pPr>
+            <a:r>
+              <a:rPr lang="en-US" sz="1250" dirty="0">
+                <a:solidFill>
+                  <a:srgbClr val="5B6472"/>
+                </a:solidFill>
+                <a:latin typeface="Roboto" pitchFamily="34" charset="0"/>
+                <a:ea typeface="Roboto" pitchFamily="34" charset="-122"/>
+                <a:cs typeface="Roboto" pitchFamily="34" charset="-120"/>
+              </a:rPr>
+              <a:t>Expected technical output and practical value.</a:t>
+            </a:r>
+            <a:endParaRPr lang="en-US" sz="1250" dirty="0"/>
+          </a:p>
+        </p:txBody>
+      </p:sp>
+      <p:sp>
+        <p:nvSpPr>
+          <p:cNvPr id="4" name="Shape 2">
+            <a:extLst>
+              <a:ext uri="{FF2B5EF4-FFF2-40B4-BE49-F238E27FC236}">
+                <a16:creationId xmlns:a16="http://schemas.microsoft.com/office/drawing/2014/main" id="{27CCC94B-5B66-B635-9AD9-D0ECD2BC2153}"/>
+              </a:ext>
+            </a:extLst>
+          </p:cNvPr>
+          <p:cNvSpPr/>
+          <p:nvPr/>
+        </p:nvSpPr>
+        <p:spPr>
+          <a:xfrm>
+            <a:off x="502920" y="1078992"/>
+            <a:ext cx="11155680" cy="0"/>
+          </a:xfrm>
+          <a:prstGeom prst="line">
+            <a:avLst/>
+          </a:prstGeom>
+          <a:noFill/>
+          <a:ln w="12700">
+            <a:solidFill>
+              <a:srgbClr val="B9C2CF"/>
+            </a:solidFill>
+            <a:prstDash val="solid"/>
+          </a:ln>
+        </p:spPr>
+      </p:sp>
+      <p:sp>
+        <p:nvSpPr>
+          <p:cNvPr id="5" name="Text 3">
+            <a:extLst>
+              <a:ext uri="{FF2B5EF4-FFF2-40B4-BE49-F238E27FC236}">
+                <a16:creationId xmlns:a16="http://schemas.microsoft.com/office/drawing/2014/main" id="{C35BD503-8C04-F662-F964-2DB3093E1C6C}"/>
+              </a:ext>
+            </a:extLst>
+          </p:cNvPr>
+          <p:cNvSpPr/>
+          <p:nvPr/>
+        </p:nvSpPr>
+        <p:spPr>
+          <a:xfrm>
+            <a:off x="731520" y="1417320"/>
+            <a:ext cx="4892040" cy="274320"/>
+          </a:xfrm>
+          <a:prstGeom prst="rect">
+            <a:avLst/>
+          </a:prstGeom>
+          <a:noFill/>
+          <a:ln/>
+        </p:spPr>
+        <p:txBody>
+          <a:bodyPr wrap="square" lIns="0" tIns="0" rIns="0" bIns="0" rtlCol="0" anchor="ctr">
+            <a:normAutofit/>
+          </a:bodyPr>
+          <a:lstStyle/>
+          <a:p>
+            <a:pPr marL="0" indent="0">
+              <a:buNone/>
+            </a:pPr>
+            <a:r>
+              <a:rPr lang="en-US" sz="1800" b="1" dirty="0">
+                <a:solidFill>
+                  <a:srgbClr val="1F77B4"/>
+                </a:solidFill>
+                <a:latin typeface="Montserrat" pitchFamily="34" charset="0"/>
+                <a:ea typeface="Montserrat" pitchFamily="34" charset="-122"/>
+                <a:cs typeface="Montserrat" pitchFamily="34" charset="-120"/>
+              </a:rPr>
+              <a:t>Technical Results</a:t>
+            </a:r>
+            <a:endParaRPr lang="en-US" sz="1800" dirty="0"/>
+          </a:p>
+        </p:txBody>
+      </p:sp>
+      <p:sp>
+        <p:nvSpPr>
+          <p:cNvPr id="6" name="Text 4">
+            <a:extLst>
+              <a:ext uri="{FF2B5EF4-FFF2-40B4-BE49-F238E27FC236}">
+                <a16:creationId xmlns:a16="http://schemas.microsoft.com/office/drawing/2014/main" id="{6B94CB4D-A8AE-F71C-EDCA-9ADC28CC59B2}"/>
+              </a:ext>
+            </a:extLst>
+          </p:cNvPr>
+          <p:cNvSpPr/>
+          <p:nvPr/>
+        </p:nvSpPr>
+        <p:spPr>
+          <a:xfrm>
+            <a:off x="731520" y="1920240"/>
+            <a:ext cx="4892040" cy="3840480"/>
+          </a:xfrm>
+          <a:prstGeom prst="rect">
+            <a:avLst/>
+          </a:prstGeom>
+          <a:noFill/>
+          <a:ln/>
+        </p:spPr>
+        <p:txBody>
+          <a:bodyPr wrap="square" lIns="381" tIns="381" rIns="381" bIns="381" rtlCol="0" anchor="ctr">
+            <a:normAutofit/>
+          </a:bodyPr>
+          <a:lstStyle/>
+          <a:p>
+            <a:pPr marL="177800" indent="-177800">
+              <a:buSzPct val="100000"/>
+              <a:buChar char="•"/>
+            </a:pPr>
+            <a:r>
+              <a:rPr lang="en-US" sz="1900" dirty="0">
+                <a:solidFill>
+                  <a:srgbClr val="1A1A1A"/>
+                </a:solidFill>
+                <a:latin typeface="Roboto" pitchFamily="34" charset="0"/>
+                <a:ea typeface="Roboto" pitchFamily="34" charset="-122"/>
+                <a:cs typeface="Roboto" pitchFamily="34" charset="-120"/>
+              </a:rPr>
+              <a:t>Vehicle detection</a:t>
+            </a:r>
+            <a:endParaRPr lang="en-US" sz="1900" dirty="0"/>
+          </a:p>
+          <a:p>
+            <a:pPr marL="177800" indent="-177800">
+              <a:buSzPct val="100000"/>
+              <a:buChar char="•"/>
+            </a:pPr>
+            <a:r>
+              <a:rPr lang="en-US" sz="1900" dirty="0">
+                <a:solidFill>
+                  <a:srgbClr val="1A1A1A"/>
+                </a:solidFill>
+                <a:latin typeface="Roboto" pitchFamily="34" charset="0"/>
+                <a:ea typeface="Roboto" pitchFamily="34" charset="-122"/>
+                <a:cs typeface="Roboto" pitchFamily="34" charset="-120"/>
+              </a:rPr>
+              <a:t>Image capture</a:t>
+            </a:r>
+            <a:endParaRPr lang="en-US" sz="1900" dirty="0"/>
+          </a:p>
+          <a:p>
+            <a:pPr marL="177800" indent="-177800">
+              <a:buSzPct val="100000"/>
+              <a:buChar char="•"/>
+            </a:pPr>
+            <a:r>
+              <a:rPr lang="en-US" sz="1900" dirty="0">
+                <a:solidFill>
+                  <a:srgbClr val="1A1A1A"/>
+                </a:solidFill>
+                <a:latin typeface="Roboto" pitchFamily="34" charset="0"/>
+                <a:ea typeface="Roboto" pitchFamily="34" charset="-122"/>
+                <a:cs typeface="Roboto" pitchFamily="34" charset="-120"/>
+              </a:rPr>
+              <a:t>AI processing</a:t>
+            </a:r>
+            <a:endParaRPr lang="en-US" sz="1900" dirty="0"/>
+          </a:p>
+          <a:p>
+            <a:pPr marL="177800" indent="-177800">
+              <a:buSzPct val="100000"/>
+              <a:buChar char="•"/>
+            </a:pPr>
+            <a:r>
+              <a:rPr lang="en-US" sz="1900" dirty="0">
+                <a:solidFill>
+                  <a:srgbClr val="1A1A1A"/>
+                </a:solidFill>
+                <a:latin typeface="Roboto" pitchFamily="34" charset="0"/>
+                <a:ea typeface="Roboto" pitchFamily="34" charset="-122"/>
+                <a:cs typeface="Roboto" pitchFamily="34" charset="-120"/>
+              </a:rPr>
+              <a:t>Barrier control</a:t>
+            </a:r>
+            <a:endParaRPr lang="en-US" sz="1900" dirty="0"/>
+          </a:p>
+          <a:p>
+            <a:pPr marL="177800" indent="-177800">
+              <a:buSzPct val="100000"/>
+              <a:buChar char="•"/>
+            </a:pPr>
+            <a:r>
+              <a:rPr lang="en-US" sz="1900" dirty="0">
+                <a:solidFill>
+                  <a:srgbClr val="1A1A1A"/>
+                </a:solidFill>
+                <a:latin typeface="Roboto" pitchFamily="34" charset="0"/>
+                <a:ea typeface="Roboto" pitchFamily="34" charset="-122"/>
+                <a:cs typeface="Roboto" pitchFamily="34" charset="-120"/>
+              </a:rPr>
+              <a:t>Database logging</a:t>
+            </a:r>
+            <a:endParaRPr lang="en-US" sz="1900" dirty="0"/>
+          </a:p>
+        </p:txBody>
+      </p:sp>
+      <p:sp>
+        <p:nvSpPr>
+          <p:cNvPr id="7" name="Shape 5">
+            <a:extLst>
+              <a:ext uri="{FF2B5EF4-FFF2-40B4-BE49-F238E27FC236}">
+                <a16:creationId xmlns:a16="http://schemas.microsoft.com/office/drawing/2014/main" id="{E9CB1336-00EC-066A-49DD-F47E1835A6CA}"/>
+              </a:ext>
+            </a:extLst>
+          </p:cNvPr>
+          <p:cNvSpPr/>
+          <p:nvPr/>
+        </p:nvSpPr>
+        <p:spPr>
+          <a:xfrm>
+            <a:off x="5989320" y="1463040"/>
+            <a:ext cx="0" cy="4526280"/>
+          </a:xfrm>
+          <a:prstGeom prst="line">
+            <a:avLst/>
+          </a:prstGeom>
+          <a:noFill/>
+          <a:ln w="12700">
+            <a:solidFill>
+              <a:srgbClr val="B9C2CF"/>
+            </a:solidFill>
+            <a:prstDash val="solid"/>
+          </a:ln>
+        </p:spPr>
+      </p:sp>
+      <p:sp>
+        <p:nvSpPr>
+          <p:cNvPr id="8" name="Text 6">
+            <a:extLst>
+              <a:ext uri="{FF2B5EF4-FFF2-40B4-BE49-F238E27FC236}">
+                <a16:creationId xmlns:a16="http://schemas.microsoft.com/office/drawing/2014/main" id="{D6BF2DD4-1660-6C9A-A827-5C5E9F34D2E1}"/>
+              </a:ext>
+            </a:extLst>
+          </p:cNvPr>
+          <p:cNvSpPr/>
+          <p:nvPr/>
+        </p:nvSpPr>
+        <p:spPr>
+          <a:xfrm>
+            <a:off x="6355080" y="1417320"/>
+            <a:ext cx="4892040" cy="274320"/>
+          </a:xfrm>
+          <a:prstGeom prst="rect">
+            <a:avLst/>
+          </a:prstGeom>
+          <a:noFill/>
+          <a:ln/>
+        </p:spPr>
+        <p:txBody>
+          <a:bodyPr wrap="square" lIns="0" tIns="0" rIns="0" bIns="0" rtlCol="0" anchor="ctr">
+            <a:normAutofit/>
+          </a:bodyPr>
+          <a:lstStyle/>
+          <a:p>
+            <a:pPr marL="0" indent="0">
+              <a:buNone/>
+            </a:pPr>
+            <a:r>
+              <a:rPr lang="en-US" sz="1800" b="1" dirty="0">
+                <a:solidFill>
+                  <a:srgbClr val="1F77B4"/>
+                </a:solidFill>
+                <a:latin typeface="Montserrat" pitchFamily="34" charset="0"/>
+                <a:ea typeface="Montserrat" pitchFamily="34" charset="-122"/>
+                <a:cs typeface="Montserrat" pitchFamily="34" charset="-120"/>
+              </a:rPr>
+              <a:t>Practical Benefits</a:t>
+            </a:r>
+            <a:endParaRPr lang="en-US" sz="1800" dirty="0"/>
+          </a:p>
+        </p:txBody>
+      </p:sp>
+      <p:sp>
+        <p:nvSpPr>
+          <p:cNvPr id="9" name="Text 7">
+            <a:extLst>
+              <a:ext uri="{FF2B5EF4-FFF2-40B4-BE49-F238E27FC236}">
+                <a16:creationId xmlns:a16="http://schemas.microsoft.com/office/drawing/2014/main" id="{5BD360A4-5197-4CAF-703F-BBA9D7D6F824}"/>
+              </a:ext>
+            </a:extLst>
+          </p:cNvPr>
+          <p:cNvSpPr/>
+          <p:nvPr/>
+        </p:nvSpPr>
+        <p:spPr>
+          <a:xfrm>
+            <a:off x="6355080" y="1920240"/>
+            <a:ext cx="4892040" cy="3840480"/>
+          </a:xfrm>
+          <a:prstGeom prst="rect">
+            <a:avLst/>
+          </a:prstGeom>
+          <a:noFill/>
+          <a:ln/>
+        </p:spPr>
+        <p:txBody>
+          <a:bodyPr wrap="square" lIns="381" tIns="381" rIns="381" bIns="381" rtlCol="0" anchor="ctr">
+            <a:normAutofit/>
+          </a:bodyPr>
+          <a:lstStyle/>
+          <a:p>
+            <a:pPr marL="177800" indent="-177800">
+              <a:buSzPct val="100000"/>
+              <a:buChar char="•"/>
+            </a:pPr>
+            <a:r>
+              <a:rPr lang="en-US" sz="1900" dirty="0">
+                <a:solidFill>
+                  <a:srgbClr val="1A1A1A"/>
+                </a:solidFill>
+                <a:latin typeface="Roboto" pitchFamily="34" charset="0"/>
+                <a:ea typeface="Roboto" pitchFamily="34" charset="-122"/>
+                <a:cs typeface="Roboto" pitchFamily="34" charset="-120"/>
+              </a:rPr>
+              <a:t>Reduce manual work</a:t>
+            </a:r>
+            <a:endParaRPr lang="en-US" sz="1900" dirty="0"/>
+          </a:p>
+          <a:p>
+            <a:pPr marL="177800" indent="-177800">
+              <a:buSzPct val="100000"/>
+              <a:buChar char="•"/>
+            </a:pPr>
+            <a:r>
+              <a:rPr lang="en-US" sz="1900" dirty="0">
+                <a:solidFill>
+                  <a:srgbClr val="1A1A1A"/>
+                </a:solidFill>
+                <a:latin typeface="Roboto" pitchFamily="34" charset="0"/>
+                <a:ea typeface="Roboto" pitchFamily="34" charset="-122"/>
+                <a:cs typeface="Roboto" pitchFamily="34" charset="-120"/>
+              </a:rPr>
+              <a:t>Faster gate operation</a:t>
+            </a:r>
+            <a:endParaRPr lang="en-US" sz="1900" dirty="0"/>
+          </a:p>
+          <a:p>
+            <a:pPr marL="177800" indent="-177800">
+              <a:buSzPct val="100000"/>
+              <a:buChar char="•"/>
+            </a:pPr>
+            <a:r>
+              <a:rPr lang="en-US" sz="1900" dirty="0">
+                <a:solidFill>
+                  <a:srgbClr val="1A1A1A"/>
+                </a:solidFill>
+                <a:latin typeface="Roboto" pitchFamily="34" charset="0"/>
+                <a:ea typeface="Roboto" pitchFamily="34" charset="-122"/>
+                <a:cs typeface="Roboto" pitchFamily="34" charset="-120"/>
+              </a:rPr>
+              <a:t>Better monitoring</a:t>
+            </a:r>
+            <a:endParaRPr lang="en-US" sz="1900" dirty="0"/>
+          </a:p>
+          <a:p>
+            <a:pPr marL="177800" indent="-177800">
+              <a:buSzPct val="100000"/>
+              <a:buChar char="•"/>
+            </a:pPr>
+            <a:r>
+              <a:rPr lang="en-US" sz="1900" dirty="0">
+                <a:solidFill>
+                  <a:srgbClr val="1A1A1A"/>
+                </a:solidFill>
+                <a:latin typeface="Roboto" pitchFamily="34" charset="0"/>
+                <a:ea typeface="Roboto" pitchFamily="34" charset="-122"/>
+                <a:cs typeface="Roboto" pitchFamily="34" charset="-120"/>
+              </a:rPr>
+              <a:t>Improved security</a:t>
+            </a:r>
+            <a:endParaRPr lang="en-US" sz="1900" dirty="0"/>
+          </a:p>
+          <a:p>
+            <a:pPr marL="177800" indent="-177800">
+              <a:buSzPct val="100000"/>
+              <a:buChar char="•"/>
+            </a:pPr>
+            <a:r>
+              <a:rPr lang="en-US" sz="1900" dirty="0">
+                <a:solidFill>
+                  <a:srgbClr val="1A1A1A"/>
+                </a:solidFill>
+                <a:latin typeface="Roboto" pitchFamily="34" charset="0"/>
+                <a:ea typeface="Roboto" pitchFamily="34" charset="-122"/>
+                <a:cs typeface="Roboto" pitchFamily="34" charset="-120"/>
+              </a:rPr>
+              <a:t>Easier management</a:t>
+            </a:r>
+            <a:endParaRPr lang="en-US" sz="1900" dirty="0"/>
+          </a:p>
+        </p:txBody>
+      </p:sp>
+      <p:sp>
+        <p:nvSpPr>
+          <p:cNvPr id="10" name="Text 8">
+            <a:extLst>
+              <a:ext uri="{FF2B5EF4-FFF2-40B4-BE49-F238E27FC236}">
+                <a16:creationId xmlns:a16="http://schemas.microsoft.com/office/drawing/2014/main" id="{395286AD-6909-F611-6200-46C2A49FAF13}"/>
+              </a:ext>
+            </a:extLst>
+          </p:cNvPr>
+          <p:cNvSpPr/>
+          <p:nvPr/>
+        </p:nvSpPr>
+        <p:spPr>
+          <a:xfrm>
+            <a:off x="502920" y="6547104"/>
+            <a:ext cx="11155680" cy="182880"/>
+          </a:xfrm>
+          <a:prstGeom prst="rect">
+            <a:avLst/>
+          </a:prstGeom>
+          <a:noFill/>
+          <a:ln/>
+        </p:spPr>
+        <p:txBody>
+          <a:bodyPr wrap="square" lIns="0" tIns="0" rIns="0" bIns="0" rtlCol="0" anchor="ctr"/>
+          <a:lstStyle/>
+          <a:p>
+            <a:pPr marL="0" indent="0" algn="r">
+              <a:buNone/>
+            </a:pPr>
+            <a:r>
+              <a:rPr lang="en-US" sz="850" dirty="0">
+                <a:solidFill>
+                  <a:srgbClr val="7B8491"/>
+                </a:solidFill>
+                <a:latin typeface="Roboto" pitchFamily="34" charset="0"/>
+                <a:ea typeface="Roboto" pitchFamily="34" charset="-122"/>
+                <a:cs typeface="Roboto" pitchFamily="34" charset="-120"/>
+              </a:rPr>
+              <a:t>Smart Parking System  |  14</a:t>
+            </a:r>
+            <a:endParaRPr lang="en-US" sz="850" dirty="0"/>
+          </a:p>
+        </p:txBody>
+      </p:sp>
+      <p:pic>
+        <p:nvPicPr>
+          <p:cNvPr id="12" name="Picture 11">
+            <a:extLst>
+              <a:ext uri="{FF2B5EF4-FFF2-40B4-BE49-F238E27FC236}">
+                <a16:creationId xmlns:a16="http://schemas.microsoft.com/office/drawing/2014/main" id="{FEFADE7D-D596-7288-4400-63E3A7382806}"/>
+              </a:ext>
+            </a:extLst>
+          </p:cNvPr>
+          <p:cNvPicPr>
+            <a:picLocks noChangeAspect="1"/>
+          </p:cNvPicPr>
+          <p:nvPr/>
+        </p:nvPicPr>
+        <p:blipFill>
+          <a:blip r:embed="rId3"/>
+          <a:stretch>
+            <a:fillRect/>
+          </a:stretch>
+        </p:blipFill>
+        <p:spPr>
+          <a:xfrm>
+            <a:off x="9734550" y="44112"/>
+            <a:ext cx="2356685" cy="920580"/>
+          </a:xfrm>
+          <a:prstGeom prst="rect">
+            <a:avLst/>
+          </a:prstGeom>
+        </p:spPr>
+      </p:pic>
+    </p:spTree>
+    <p:extLst>
+      <p:ext uri="{BB962C8B-B14F-4D97-AF65-F5344CB8AC3E}">
+        <p14:creationId xmlns:p14="http://schemas.microsoft.com/office/powerpoint/2010/main" val="366226558"/>
+      </p:ext>
+    </p:extLst>
+  </p:cSld>
+  <p:clrMapOvr>
+    <a:masterClrMapping/>
+  </p:clrMapOvr>
+</p:sld>
+</file>
+
+<file path=ppt/slides/slide15.xml><?xml version="1.0" encoding="utf-8"?>
 <p:sld xmlns:a="http://schemas.openxmlformats.org/drawingml/2006/main" xmlns:r="http://schemas.openxmlformats.org/officeDocument/2006/relationships" xmlns:p="http://schemas.openxmlformats.org/presentationml/2006/main">
   <p:cSld name="Slide 11">
     <p:spTree>
@@ -2372,7 +5206,7 @@
         </p:spPr>
         <p:txBody>
           <a:bodyPr wrap="square" lIns="0" tIns="0" rIns="0" bIns="0" rtlCol="0" anchor="ctr">
-            <a:normAutofit/>
+            <a:normAutofit lnSpcReduction="10000"/>
           </a:bodyPr>
           <a:lstStyle/>
           <a:p>
@@ -2754,7 +5588,7 @@
         </p:spPr>
         <p:txBody>
           <a:bodyPr wrap="square" lIns="0" tIns="0" rIns="0" bIns="0" rtlCol="0" anchor="ctr">
-            <a:normAutofit/>
+            <a:normAutofit fontScale="85000" lnSpcReduction="10000"/>
           </a:bodyPr>
           <a:lstStyle/>
           <a:p>
@@ -2809,12 +5643,42 @@
                 <a:ea typeface="Roboto" pitchFamily="34" charset="-122"/>
                 <a:cs typeface="Roboto" pitchFamily="34" charset="-120"/>
               </a:rPr>
-              <a:t>Smart Parking System  |  11</a:t>
+              <a:t>Smart Parking System  |  15</a:t>
             </a:r>
             <a:endParaRPr lang="en-US" sz="850" dirty="0"/>
           </a:p>
         </p:txBody>
       </p:sp>
+      <p:pic>
+        <p:nvPicPr>
+          <p:cNvPr id="13" name="Picture 12">
+            <a:extLst>
+              <a:ext uri="{FF2B5EF4-FFF2-40B4-BE49-F238E27FC236}">
+                <a16:creationId xmlns:a16="http://schemas.microsoft.com/office/drawing/2014/main" id="{86CECF1D-79CA-F355-5E2B-0B0DF4C6F8DB}"/>
+              </a:ext>
+            </a:extLst>
+          </p:cNvPr>
+          <p:cNvPicPr>
+            <a:picLocks noChangeAspect="1"/>
+          </p:cNvPicPr>
+          <p:nvPr/>
+        </p:nvPicPr>
+        <p:blipFill>
+          <a:blip r:embed="rId3"/>
+          <a:stretch>
+            <a:fillRect/>
+          </a:stretch>
+        </p:blipFill>
+        <p:spPr>
+          <a:xfrm>
+            <a:off x="9734550" y="44112"/>
+            <a:ext cx="2356685" cy="920580"/>
+          </a:xfrm>
+          <a:prstGeom prst="rect">
+            <a:avLst/>
+          </a:prstGeom>
+        </p:spPr>
+      </p:pic>
     </p:spTree>
   </p:cSld>
   <p:clrMapOvr>
@@ -2859,7 +5723,7 @@
         </p:spPr>
         <p:txBody>
           <a:bodyPr wrap="square" lIns="0" tIns="0" rIns="0" bIns="0" rtlCol="0" anchor="ctr">
-            <a:normAutofit/>
+            <a:normAutofit lnSpcReduction="10000"/>
           </a:bodyPr>
           <a:lstStyle/>
           <a:p>
@@ -2875,7 +5739,7 @@
                 <a:ea typeface="Montserrat" pitchFamily="34" charset="-122"/>
                 <a:cs typeface="Montserrat" pitchFamily="34" charset="-120"/>
               </a:rPr>
-              <a:t>Background / Problem Context</a:t>
+              <a:t>Team Members</a:t>
             </a:r>
             <a:endParaRPr lang="en-US" sz="3000" dirty="0"/>
           </a:p>
@@ -2914,7 +5778,7 @@
                 <a:ea typeface="Roboto" pitchFamily="34" charset="-122"/>
                 <a:cs typeface="Roboto" pitchFamily="34" charset="-120"/>
               </a:rPr>
-              <a:t>Why is this system needed?</a:t>
+              <a:t>Team members and their main roles, sub roles</a:t>
             </a:r>
             <a:endParaRPr lang="en-US" sz="1250" dirty="0"/>
           </a:p>
@@ -2945,14 +5809,14 @@
       </p:sp>
       <p:sp>
         <p:nvSpPr>
-          <p:cNvPr id="5" name="Text 3"/>
-          <p:cNvSpPr/>
-          <p:nvPr/>
-        </p:nvSpPr>
-        <p:spPr>
-          <a:xfrm>
-            <a:off x="777240" y="1508760"/>
-            <a:ext cx="5394960" cy="3794760"/>
+          <p:cNvPr id="10" name="Text 8"/>
+          <p:cNvSpPr/>
+          <p:nvPr/>
+        </p:nvSpPr>
+        <p:spPr>
+          <a:xfrm>
+            <a:off x="502920" y="6547104"/>
+            <a:ext cx="11155680" cy="182880"/>
           </a:xfrm>
           <a:prstGeom prst="rect">
             <a:avLst/>
@@ -2961,153 +5825,330 @@
           <a:ln/>
         </p:spPr>
         <p:txBody>
-          <a:bodyPr wrap="square" lIns="381" tIns="381" rIns="381" bIns="381" rtlCol="0" anchor="ctr">
-            <a:normAutofit/>
-          </a:bodyPr>
-          <a:lstStyle/>
-          <a:p>
-            <a:pPr marL="177800" indent="-177800">
-              <a:buSzPct val="100000"/>
-              <a:buChar char="•"/>
-            </a:pPr>
-            <a:r>
-              <a:rPr lang="en-US" sz="2000" dirty="0">
-                <a:solidFill>
-                  <a:srgbClr val="1A1A1A"/>
+          <a:bodyPr wrap="square" lIns="0" tIns="0" rIns="0" bIns="0" rtlCol="0" anchor="ctr"/>
+          <a:lstStyle/>
+          <a:p>
+            <a:pPr marL="0" indent="0" algn="r">
+              <a:buNone/>
+            </a:pPr>
+            <a:r>
+              <a:rPr lang="en-US" sz="850" dirty="0">
+                <a:solidFill>
+                  <a:srgbClr val="7B8491"/>
                 </a:solidFill>
                 <a:latin typeface="Roboto" pitchFamily="34" charset="0"/>
                 <a:ea typeface="Roboto" pitchFamily="34" charset="-122"/>
                 <a:cs typeface="Roboto" pitchFamily="34" charset="-120"/>
               </a:rPr>
-              <a:t>Parking control is still mostly manual.</a:t>
-            </a:r>
-            <a:endParaRPr lang="en-US" sz="2000" dirty="0"/>
-          </a:p>
-          <a:p>
-            <a:pPr marL="177800" indent="-177800">
-              <a:buSzPct val="100000"/>
-              <a:buChar char="•"/>
-            </a:pPr>
-            <a:r>
-              <a:rPr lang="en-US" sz="2000" dirty="0">
-                <a:solidFill>
-                  <a:srgbClr val="1A1A1A"/>
+              <a:t>Smart Parking System  |  2</a:t>
+            </a:r>
+            <a:endParaRPr lang="en-US" sz="850" dirty="0"/>
+          </a:p>
+        </p:txBody>
+      </p:sp>
+      <p:pic>
+        <p:nvPicPr>
+          <p:cNvPr id="13" name="Picture 12">
+            <a:extLst>
+              <a:ext uri="{FF2B5EF4-FFF2-40B4-BE49-F238E27FC236}">
+                <a16:creationId xmlns:a16="http://schemas.microsoft.com/office/drawing/2014/main" id="{836F1882-743C-6DFB-2881-ABCEC2B96354}"/>
+              </a:ext>
+            </a:extLst>
+          </p:cNvPr>
+          <p:cNvPicPr>
+            <a:picLocks noChangeAspect="1"/>
+          </p:cNvPicPr>
+          <p:nvPr/>
+        </p:nvPicPr>
+        <p:blipFill>
+          <a:blip r:embed="rId3"/>
+          <a:stretch>
+            <a:fillRect/>
+          </a:stretch>
+        </p:blipFill>
+        <p:spPr>
+          <a:xfrm>
+            <a:off x="9734550" y="44112"/>
+            <a:ext cx="2356685" cy="920580"/>
+          </a:xfrm>
+          <a:prstGeom prst="rect">
+            <a:avLst/>
+          </a:prstGeom>
+        </p:spPr>
+      </p:pic>
+      <p:sp>
+        <p:nvSpPr>
+          <p:cNvPr id="15" name="Text 2">
+            <a:extLst>
+              <a:ext uri="{FF2B5EF4-FFF2-40B4-BE49-F238E27FC236}">
+                <a16:creationId xmlns:a16="http://schemas.microsoft.com/office/drawing/2014/main" id="{16AD224E-A3C8-59E9-AF5D-EEC4F77DF3EC}"/>
+              </a:ext>
+            </a:extLst>
+          </p:cNvPr>
+          <p:cNvSpPr/>
+          <p:nvPr/>
+        </p:nvSpPr>
+        <p:spPr>
+          <a:xfrm>
+            <a:off x="530352" y="6080760"/>
+            <a:ext cx="5715000" cy="548640"/>
+          </a:xfrm>
+          <a:prstGeom prst="rect">
+            <a:avLst/>
+          </a:prstGeom>
+          <a:noFill/>
+          <a:ln/>
+        </p:spPr>
+        <p:txBody>
+          <a:bodyPr wrap="square" lIns="0" tIns="0" rIns="0" bIns="0" rtlCol="0" anchor="ctr">
+            <a:normAutofit/>
+          </a:bodyPr>
+          <a:lstStyle/>
+          <a:p>
+            <a:pPr marL="0" indent="0">
+              <a:buNone/>
+            </a:pPr>
+            <a:r>
+              <a:rPr lang="en-US" sz="1250" dirty="0">
+                <a:solidFill>
+                  <a:srgbClr val="5B6472"/>
                 </a:solidFill>
                 <a:latin typeface="Roboto" pitchFamily="34" charset="0"/>
                 <a:ea typeface="Roboto" pitchFamily="34" charset="-122"/>
                 <a:cs typeface="Roboto" pitchFamily="34" charset="-120"/>
               </a:rPr>
-              <a:t>Entry and exit checking can be slow.</a:t>
-            </a:r>
-            <a:endParaRPr lang="en-US" sz="2000" dirty="0"/>
-          </a:p>
-          <a:p>
-            <a:pPr marL="177800" indent="-177800">
-              <a:buSzPct val="100000"/>
-              <a:buChar char="•"/>
-            </a:pPr>
-            <a:r>
-              <a:rPr lang="en-US" sz="2000" dirty="0">
-                <a:solidFill>
-                  <a:srgbClr val="1A1A1A"/>
+              <a:t>Members: </a:t>
+            </a:r>
+            <a:r>
+              <a:rPr lang="en-US" sz="1250" b="1" dirty="0">
+                <a:solidFill>
+                  <a:srgbClr val="5B6472"/>
                 </a:solidFill>
                 <a:latin typeface="Roboto" pitchFamily="34" charset="0"/>
                 <a:ea typeface="Roboto" pitchFamily="34" charset="-122"/>
                 <a:cs typeface="Roboto" pitchFamily="34" charset="-120"/>
               </a:rPr>
-              <a:t>Real-time monitoring is limited.</a:t>
-            </a:r>
-            <a:endParaRPr lang="en-US" sz="2000" dirty="0"/>
-          </a:p>
-          <a:p>
-            <a:pPr marL="177800" indent="-177800">
-              <a:buSzPct val="100000"/>
-              <a:buChar char="•"/>
-            </a:pPr>
-            <a:r>
-              <a:rPr lang="en-US" sz="2000" dirty="0">
-                <a:solidFill>
-                  <a:srgbClr val="1A1A1A"/>
+              <a:t>Nguyễn Sỹ Minh Mẫn, Đỗ Thành Triết, Trần Đăng Khoa, Bùi Đình Long</a:t>
+            </a:r>
+            <a:endParaRPr lang="en-US" sz="1250" b="1" dirty="0"/>
+          </a:p>
+          <a:p>
+            <a:r>
+              <a:rPr lang="en-US" sz="1250" dirty="0">
+                <a:solidFill>
+                  <a:srgbClr val="5B6472"/>
                 </a:solidFill>
                 <a:latin typeface="Roboto" pitchFamily="34" charset="0"/>
                 <a:ea typeface="Roboto" pitchFamily="34" charset="-122"/>
                 <a:cs typeface="Roboto" pitchFamily="34" charset="-120"/>
               </a:rPr>
-              <a:t>Parking records are difficult to manage.</a:t>
-            </a:r>
-            <a:endParaRPr lang="en-US" sz="2000" dirty="0"/>
-          </a:p>
-          <a:p>
-            <a:pPr marL="177800" indent="-177800">
-              <a:buSzPct val="100000"/>
-              <a:buChar char="•"/>
-            </a:pPr>
-            <a:r>
-              <a:rPr lang="en-US" sz="2000" dirty="0">
-                <a:solidFill>
-                  <a:srgbClr val="1A1A1A"/>
-                </a:solidFill>
-                <a:latin typeface="Roboto" pitchFamily="34" charset="0"/>
-                <a:ea typeface="Roboto" pitchFamily="34" charset="-122"/>
-                <a:cs typeface="Roboto" pitchFamily="34" charset="-120"/>
-              </a:rPr>
-              <a:t>Security and efficiency can be improved.</a:t>
-            </a:r>
-            <a:endParaRPr lang="en-US" sz="2000" dirty="0"/>
-          </a:p>
-        </p:txBody>
-      </p:sp>
-      <p:sp>
-        <p:nvSpPr>
-          <p:cNvPr id="6" name="Text 4"/>
-          <p:cNvSpPr/>
-          <p:nvPr/>
-        </p:nvSpPr>
-        <p:spPr>
-          <a:xfrm>
-            <a:off x="777240" y="5577840"/>
-            <a:ext cx="10881360" cy="438912"/>
-          </a:xfrm>
-          <a:prstGeom prst="rect">
-            <a:avLst/>
-          </a:prstGeom>
-          <a:noFill/>
-          <a:ln/>
-        </p:spPr>
-        <p:txBody>
-          <a:bodyPr wrap="square" lIns="0" tIns="0" rIns="0" bIns="0" rtlCol="0" anchor="ctr">
-            <a:normAutofit/>
+              <a:t>Instructor: </a:t>
+            </a:r>
+            <a:r>
+              <a:rPr lang="en-US" sz="1250" dirty="0"/>
+              <a:t>Nguyễn Đức Lợi</a:t>
+            </a:r>
+          </a:p>
+        </p:txBody>
+      </p:sp>
+      <p:sp>
+        <p:nvSpPr>
+          <p:cNvPr id="19" name="TextBox 18">
+            <a:extLst>
+              <a:ext uri="{FF2B5EF4-FFF2-40B4-BE49-F238E27FC236}">
+                <a16:creationId xmlns:a16="http://schemas.microsoft.com/office/drawing/2014/main" id="{6AC1F5E9-FA58-3CD5-ECA8-ADC384D24066}"/>
+              </a:ext>
+            </a:extLst>
+          </p:cNvPr>
+          <p:cNvSpPr txBox="1"/>
+          <p:nvPr/>
+        </p:nvSpPr>
+        <p:spPr>
+          <a:xfrm>
+            <a:off x="487680" y="1338212"/>
+            <a:ext cx="5757672" cy="4801314"/>
+          </a:xfrm>
+          <a:prstGeom prst="rect">
+            <a:avLst/>
+          </a:prstGeom>
+          <a:noFill/>
+        </p:spPr>
+        <p:txBody>
+          <a:bodyPr wrap="square">
+            <a:spAutoFit/>
           </a:bodyPr>
           <a:lstStyle/>
           <a:p>
-            <a:pPr marL="0" indent="0">
-              <a:buNone/>
-            </a:pPr>
-            <a:r>
-              <a:rPr lang="en-US" sz="1700" b="1" dirty="0">
-                <a:solidFill>
-                  <a:srgbClr val="0B1F3A"/>
-                </a:solidFill>
-                <a:latin typeface="Montserrat" pitchFamily="34" charset="0"/>
-                <a:ea typeface="Montserrat" pitchFamily="34" charset="-122"/>
-                <a:cs typeface="Montserrat" pitchFamily="34" charset="-120"/>
-              </a:rPr>
-              <a:t>Therefore, a smart parking system is needed to automate detection, barrier control, and monitoring.</a:t>
-            </a:r>
-            <a:endParaRPr lang="en-US" sz="1700" dirty="0"/>
-          </a:p>
-        </p:txBody>
-      </p:sp>
-      <p:sp>
-        <p:nvSpPr>
-          <p:cNvPr id="7" name="Shape 5"/>
-          <p:cNvSpPr/>
-          <p:nvPr/>
-        </p:nvSpPr>
-        <p:spPr>
-          <a:xfrm>
-            <a:off x="6492240" y="1417320"/>
-            <a:ext cx="4983480" cy="3794760"/>
+            <a:r>
+              <a:rPr lang="en-US" b="1" dirty="0">
+                <a:solidFill>
+                  <a:srgbClr val="0070C0"/>
+                </a:solidFill>
+              </a:rPr>
+              <a:t>SE201643 Bùi </a:t>
+            </a:r>
+            <a:r>
+              <a:rPr lang="en-US" b="1" dirty="0" err="1">
+                <a:solidFill>
+                  <a:srgbClr val="0070C0"/>
+                </a:solidFill>
+              </a:rPr>
+              <a:t>Đình</a:t>
+            </a:r>
+            <a:r>
+              <a:rPr lang="en-US" b="1" dirty="0">
+                <a:solidFill>
+                  <a:srgbClr val="0070C0"/>
+                </a:solidFill>
+              </a:rPr>
+              <a:t> Long 	</a:t>
+            </a:r>
+          </a:p>
+          <a:p>
+            <a:pPr algn="r"/>
+            <a:r>
+              <a:rPr lang="en-US" i="1" dirty="0"/>
+              <a:t>Hardware &amp; Arduino</a:t>
+            </a:r>
+          </a:p>
+          <a:p>
+            <a:pPr algn="r"/>
+            <a:r>
+              <a:rPr lang="en-US" i="1" dirty="0"/>
+              <a:t>Report writing</a:t>
+            </a:r>
+          </a:p>
+          <a:p>
+            <a:endParaRPr lang="en-US" dirty="0"/>
+          </a:p>
+          <a:p>
+            <a:r>
+              <a:rPr lang="en-US" b="1" dirty="0"/>
+              <a:t>SE201632 </a:t>
+            </a:r>
+            <a:r>
+              <a:rPr lang="en-US" b="1" dirty="0" err="1"/>
+              <a:t>Đỗ</a:t>
+            </a:r>
+            <a:r>
+              <a:rPr lang="en-US" b="1" dirty="0"/>
+              <a:t> Thanh </a:t>
+            </a:r>
+            <a:r>
+              <a:rPr lang="en-US" b="1" dirty="0" err="1"/>
+              <a:t>Triết</a:t>
+            </a:r>
+            <a:endParaRPr lang="en-US" b="1" dirty="0"/>
+          </a:p>
+          <a:p>
+            <a:pPr algn="r"/>
+            <a:r>
+              <a:rPr lang="en-US" i="1" dirty="0"/>
+              <a:t>Hardware &amp; Arduino</a:t>
+            </a:r>
+          </a:p>
+          <a:p>
+            <a:pPr algn="r"/>
+            <a:r>
+              <a:rPr lang="en-US" i="1" dirty="0"/>
+              <a:t>Server &amp; Yolo</a:t>
+            </a:r>
+          </a:p>
+          <a:p>
+            <a:endParaRPr lang="en-US" dirty="0"/>
+          </a:p>
+          <a:p>
+            <a:endParaRPr lang="en-US" dirty="0"/>
+          </a:p>
+          <a:p>
+            <a:r>
+              <a:rPr lang="en-US" b="1" dirty="0"/>
+              <a:t>SE201631 Nguyễn </a:t>
+            </a:r>
+            <a:r>
+              <a:rPr lang="en-US" b="1" dirty="0" err="1"/>
+              <a:t>Sỹ</a:t>
+            </a:r>
+            <a:r>
+              <a:rPr lang="en-US" b="1" dirty="0"/>
+              <a:t> Minh Mẫn</a:t>
+            </a:r>
+          </a:p>
+          <a:p>
+            <a:pPr algn="r"/>
+            <a:r>
+              <a:rPr lang="en-US" i="1" dirty="0"/>
+              <a:t>Web Dashboard &amp; SQL </a:t>
+            </a:r>
+          </a:p>
+          <a:p>
+            <a:pPr algn="r"/>
+            <a:r>
+              <a:rPr lang="en-US" i="1" dirty="0"/>
+              <a:t>Server</a:t>
+            </a:r>
+          </a:p>
+          <a:p>
+            <a:pPr algn="r"/>
+            <a:endParaRPr lang="en-US" dirty="0"/>
+          </a:p>
+          <a:p>
+            <a:r>
+              <a:rPr lang="en-US" b="1" dirty="0"/>
+              <a:t>SE201635 </a:t>
+            </a:r>
+            <a:r>
+              <a:rPr lang="en-US" b="1" dirty="0" err="1"/>
+              <a:t>Trần</a:t>
+            </a:r>
+            <a:r>
+              <a:rPr lang="en-US" b="1" dirty="0"/>
+              <a:t> </a:t>
+            </a:r>
+            <a:r>
+              <a:rPr lang="en-US" b="1" dirty="0" err="1"/>
+              <a:t>Đăng</a:t>
+            </a:r>
+            <a:r>
+              <a:rPr lang="en-US" b="1" dirty="0"/>
+              <a:t> Khoa</a:t>
+            </a:r>
+          </a:p>
+          <a:p>
+            <a:pPr algn="r"/>
+            <a:r>
+              <a:rPr lang="en-US" i="1" dirty="0"/>
+              <a:t>Web Dashboard &amp; SQL </a:t>
+            </a:r>
+          </a:p>
+          <a:p>
+            <a:pPr algn="r"/>
+            <a:r>
+              <a:rPr lang="en-US" i="1" dirty="0"/>
+              <a:t>Report writing</a:t>
+            </a:r>
+          </a:p>
+          <a:p>
+            <a:endParaRPr lang="en-US" dirty="0"/>
+          </a:p>
+        </p:txBody>
+      </p:sp>
+      <p:sp>
+        <p:nvSpPr>
+          <p:cNvPr id="21" name="Shape 3">
+            <a:extLst>
+              <a:ext uri="{FF2B5EF4-FFF2-40B4-BE49-F238E27FC236}">
+                <a16:creationId xmlns:a16="http://schemas.microsoft.com/office/drawing/2014/main" id="{7DC5212C-AAB7-1F91-2CBE-DDFBA201EA9B}"/>
+              </a:ext>
+            </a:extLst>
+          </p:cNvPr>
+          <p:cNvSpPr/>
+          <p:nvPr/>
+        </p:nvSpPr>
+        <p:spPr>
+          <a:xfrm>
+            <a:off x="6995160" y="1732788"/>
+            <a:ext cx="4663440" cy="4160520"/>
           </a:xfrm>
           <a:prstGeom prst="rect">
             <a:avLst/>
@@ -3127,14 +6168,20 @@
       </p:sp>
       <p:sp>
         <p:nvSpPr>
-          <p:cNvPr id="8" name="Text 6"/>
-          <p:cNvSpPr/>
-          <p:nvPr/>
-        </p:nvSpPr>
-        <p:spPr>
-          <a:xfrm>
-            <a:off x="6629400" y="3095244"/>
-            <a:ext cx="4709160" cy="320040"/>
+          <p:cNvPr id="23" name="Text 4">
+            <a:extLst>
+              <a:ext uri="{FF2B5EF4-FFF2-40B4-BE49-F238E27FC236}">
+                <a16:creationId xmlns:a16="http://schemas.microsoft.com/office/drawing/2014/main" id="{D8DE1EEE-CC08-DC8B-45AB-3CAE47EA7AA9}"/>
+              </a:ext>
+            </a:extLst>
+          </p:cNvPr>
+          <p:cNvSpPr/>
+          <p:nvPr/>
+        </p:nvSpPr>
+        <p:spPr>
+          <a:xfrm>
+            <a:off x="6858000" y="2820924"/>
+            <a:ext cx="4389120" cy="320040"/>
           </a:xfrm>
           <a:prstGeom prst="rect">
             <a:avLst/>
@@ -3160,7 +6207,7 @@
                 <a:ea typeface="Montserrat" pitchFamily="34" charset="-122"/>
                 <a:cs typeface="Montserrat" pitchFamily="34" charset="-120"/>
               </a:rPr>
-              <a:t>INSERT PARKING CONTEXT IMAGE</a:t>
+              <a:t>INSERT PARKING / BARRIER IMAGE</a:t>
             </a:r>
             <a:endParaRPr lang="en-US" sz="1600" dirty="0"/>
           </a:p>
@@ -3168,14 +6215,20 @@
       </p:sp>
       <p:sp>
         <p:nvSpPr>
-          <p:cNvPr id="9" name="Text 7"/>
-          <p:cNvSpPr/>
-          <p:nvPr/>
-        </p:nvSpPr>
-        <p:spPr>
-          <a:xfrm>
-            <a:off x="6675120" y="3479292"/>
-            <a:ext cx="4617720" cy="320040"/>
+          <p:cNvPr id="25" name="Text 5">
+            <a:extLst>
+              <a:ext uri="{FF2B5EF4-FFF2-40B4-BE49-F238E27FC236}">
+                <a16:creationId xmlns:a16="http://schemas.microsoft.com/office/drawing/2014/main" id="{A42DD4DF-8574-CF58-2015-B3D574A63523}"/>
+              </a:ext>
+            </a:extLst>
+          </p:cNvPr>
+          <p:cNvSpPr/>
+          <p:nvPr/>
+        </p:nvSpPr>
+        <p:spPr>
+          <a:xfrm>
+            <a:off x="6903720" y="3204972"/>
+            <a:ext cx="4297680" cy="320040"/>
           </a:xfrm>
           <a:prstGeom prst="rect">
             <a:avLst/>
@@ -3201,22 +6254,59 @@
                 <a:ea typeface="Roboto" pitchFamily="34" charset="-122"/>
                 <a:cs typeface="Roboto" pitchFamily="34" charset="-120"/>
               </a:rPr>
-              <a:t>Example: crowded parking gate, manual checkpoint, or parking entrance.</a:t>
+              <a:t>Use a clean image of a parking gate, barrier, or smart parking system.</a:t>
             </a:r>
             <a:endParaRPr lang="en-US" sz="1050" dirty="0"/>
           </a:p>
         </p:txBody>
       </p:sp>
-      <p:sp>
-        <p:nvSpPr>
-          <p:cNvPr id="10" name="Text 8"/>
-          <p:cNvSpPr/>
-          <p:nvPr/>
-        </p:nvSpPr>
-        <p:spPr>
-          <a:xfrm>
-            <a:off x="502920" y="6547104"/>
-            <a:ext cx="11155680" cy="182880"/>
+      <p:pic>
+        <p:nvPicPr>
+          <p:cNvPr id="27" name="Picture 26" descr="44,671 Vehicle Barriers Royalty-Free Images, Stock Photos ...">
+            <a:extLst>
+              <a:ext uri="{FF2B5EF4-FFF2-40B4-BE49-F238E27FC236}">
+                <a16:creationId xmlns:a16="http://schemas.microsoft.com/office/drawing/2014/main" id="{CAE73288-8493-B9EB-C403-711B18221F85}"/>
+              </a:ext>
+            </a:extLst>
+          </p:cNvPr>
+          <p:cNvPicPr>
+            <a:picLocks noChangeAspect="1"/>
+          </p:cNvPicPr>
+          <p:nvPr/>
+        </p:nvPicPr>
+        <p:blipFill>
+          <a:blip r:embed="rId4"/>
+          <a:srcRect r="25593" b="7286"/>
+          <a:stretch>
+            <a:fillRect/>
+          </a:stretch>
+        </p:blipFill>
+        <p:spPr>
+          <a:xfrm>
+            <a:off x="7057187" y="1778507"/>
+            <a:ext cx="4526363" cy="4049239"/>
+          </a:xfrm>
+          <a:prstGeom prst="rect">
+            <a:avLst/>
+          </a:prstGeom>
+        </p:spPr>
+      </p:pic>
+      <p:sp>
+        <p:nvSpPr>
+          <p:cNvPr id="28" name="Text 1">
+            <a:extLst>
+              <a:ext uri="{FF2B5EF4-FFF2-40B4-BE49-F238E27FC236}">
+                <a16:creationId xmlns:a16="http://schemas.microsoft.com/office/drawing/2014/main" id="{325FDB6D-D0B2-4283-FA0E-B4C77689DB09}"/>
+              </a:ext>
+            </a:extLst>
+          </p:cNvPr>
+          <p:cNvSpPr/>
+          <p:nvPr/>
+        </p:nvSpPr>
+        <p:spPr>
+          <a:xfrm>
+            <a:off x="4778807" y="1355174"/>
+            <a:ext cx="2124913" cy="408524"/>
           </a:xfrm>
           <a:prstGeom prst="rect">
             <a:avLst/>
@@ -3228,21 +6318,66 @@
           <a:bodyPr wrap="square" lIns="0" tIns="0" rIns="0" bIns="0" rtlCol="0" anchor="ctr"/>
           <a:lstStyle/>
           <a:p>
-            <a:pPr marL="0" indent="0" algn="r">
+            <a:pPr marL="0" indent="0">
               <a:buNone/>
             </a:pPr>
             <a:r>
-              <a:rPr lang="en-US" sz="850" dirty="0">
-                <a:solidFill>
-                  <a:srgbClr val="7B8491"/>
+              <a:rPr lang="en-US" sz="1250" dirty="0">
+                <a:solidFill>
+                  <a:srgbClr val="5B6472"/>
                 </a:solidFill>
                 <a:latin typeface="Roboto" pitchFamily="34" charset="0"/>
                 <a:ea typeface="Roboto" pitchFamily="34" charset="-122"/>
                 <a:cs typeface="Roboto" pitchFamily="34" charset="-120"/>
               </a:rPr>
-              <a:t>Smart Parking System  |  2</a:t>
-            </a:r>
-            <a:endParaRPr lang="en-US" sz="850" dirty="0"/>
+              <a:t>Main role &amp; sub role</a:t>
+            </a:r>
+            <a:endParaRPr lang="en-US" sz="1250" dirty="0"/>
+          </a:p>
+        </p:txBody>
+      </p:sp>
+      <p:sp>
+        <p:nvSpPr>
+          <p:cNvPr id="30" name="Text 1">
+            <a:extLst>
+              <a:ext uri="{FF2B5EF4-FFF2-40B4-BE49-F238E27FC236}">
+                <a16:creationId xmlns:a16="http://schemas.microsoft.com/office/drawing/2014/main" id="{A1566CCE-831B-2156-F5CE-5F5FFBDA90F8}"/>
+              </a:ext>
+            </a:extLst>
+          </p:cNvPr>
+          <p:cNvSpPr/>
+          <p:nvPr/>
+        </p:nvSpPr>
+        <p:spPr>
+          <a:xfrm>
+            <a:off x="6995160" y="1311782"/>
+            <a:ext cx="5303520" cy="320040"/>
+          </a:xfrm>
+          <a:prstGeom prst="rect">
+            <a:avLst/>
+          </a:prstGeom>
+          <a:noFill/>
+          <a:ln/>
+        </p:spPr>
+        <p:txBody>
+          <a:bodyPr wrap="square" lIns="0" tIns="0" rIns="0" bIns="0" rtlCol="0" anchor="ctr"/>
+          <a:lstStyle/>
+          <a:p>
+            <a:pPr marL="0" indent="0">
+              <a:buNone/>
+            </a:pPr>
+            <a:r>
+              <a:rPr lang="en-US" sz="2000" dirty="0">
+                <a:solidFill>
+                  <a:srgbClr val="1F77B4"/>
+                </a:solidFill>
+                <a:latin typeface="Roboto" pitchFamily="34" charset="0"/>
+                <a:ea typeface="Roboto" pitchFamily="34" charset="-122"/>
+                <a:cs typeface="Roboto" pitchFamily="34" charset="-120"/>
+              </a:rPr>
+              <a:t>IoT102 Project – Group 7</a:t>
+            </a:r>
+            <a:endParaRPr lang="en-US" sz="2000" dirty="0"/>
           </a:p>
         </p:txBody>
       </p:sp>
@@ -3255,6 +6390,563 @@
 </file>
 
 <file path=ppt/slides/slide3.xml><?xml version="1.0" encoding="utf-8"?>
+<p:sld xmlns:a="http://schemas.openxmlformats.org/drawingml/2006/main" xmlns:r="http://schemas.openxmlformats.org/officeDocument/2006/relationships" xmlns:p="http://schemas.openxmlformats.org/presentationml/2006/main">
+  <p:cSld>
+    <p:spTree>
+      <p:nvGrpSpPr>
+        <p:cNvPr id="1" name="">
+          <a:extLst>
+            <a:ext uri="{FF2B5EF4-FFF2-40B4-BE49-F238E27FC236}">
+              <a16:creationId xmlns:a16="http://schemas.microsoft.com/office/drawing/2014/main" id="{6A0BD235-BA0D-5660-C591-E48628A5E0A9}"/>
+            </a:ext>
+          </a:extLst>
+        </p:cNvPr>
+        <p:cNvGrpSpPr/>
+        <p:nvPr/>
+      </p:nvGrpSpPr>
+      <p:grpSpPr>
+        <a:xfrm>
+          <a:off x="0" y="0"/>
+          <a:ext cx="0" cy="0"/>
+          <a:chOff x="0" y="0"/>
+          <a:chExt cx="0" cy="0"/>
+        </a:xfrm>
+      </p:grpSpPr>
+      <p:sp>
+        <p:nvSpPr>
+          <p:cNvPr id="2" name="Text 0">
+            <a:extLst>
+              <a:ext uri="{FF2B5EF4-FFF2-40B4-BE49-F238E27FC236}">
+                <a16:creationId xmlns:a16="http://schemas.microsoft.com/office/drawing/2014/main" id="{4809201D-52AB-EB83-4196-A7D86AD49096}"/>
+              </a:ext>
+            </a:extLst>
+          </p:cNvPr>
+          <p:cNvSpPr/>
+          <p:nvPr/>
+        </p:nvSpPr>
+        <p:spPr>
+          <a:xfrm>
+            <a:off x="502920" y="320040"/>
+            <a:ext cx="11155680" cy="411480"/>
+          </a:xfrm>
+          <a:prstGeom prst="rect">
+            <a:avLst/>
+          </a:prstGeom>
+          <a:noFill/>
+          <a:ln/>
+        </p:spPr>
+        <p:txBody>
+          <a:bodyPr wrap="square" lIns="0" tIns="0" rIns="0" bIns="0" rtlCol="0" anchor="ctr">
+            <a:normAutofit lnSpcReduction="10000"/>
+          </a:bodyPr>
+          <a:lstStyle/>
+          <a:p>
+            <a:pPr marL="0" indent="0">
+              <a:buNone/>
+            </a:pPr>
+            <a:r>
+              <a:rPr lang="en-US" sz="3000" b="1" dirty="0">
+                <a:solidFill>
+                  <a:srgbClr val="0B1F3A"/>
+                </a:solidFill>
+                <a:latin typeface="Montserrat" pitchFamily="34" charset="0"/>
+                <a:ea typeface="Montserrat" pitchFamily="34" charset="-122"/>
+                <a:cs typeface="Montserrat" pitchFamily="34" charset="-120"/>
+              </a:rPr>
+              <a:t>Background / Problem Context</a:t>
+            </a:r>
+            <a:endParaRPr lang="en-US" sz="3000" dirty="0"/>
+          </a:p>
+        </p:txBody>
+      </p:sp>
+      <p:sp>
+        <p:nvSpPr>
+          <p:cNvPr id="3" name="Text 1">
+            <a:extLst>
+              <a:ext uri="{FF2B5EF4-FFF2-40B4-BE49-F238E27FC236}">
+                <a16:creationId xmlns:a16="http://schemas.microsoft.com/office/drawing/2014/main" id="{956DC3D2-AF50-7350-ACA1-2442C1C52840}"/>
+              </a:ext>
+            </a:extLst>
+          </p:cNvPr>
+          <p:cNvSpPr/>
+          <p:nvPr/>
+        </p:nvSpPr>
+        <p:spPr>
+          <a:xfrm>
+            <a:off x="530352" y="777240"/>
+            <a:ext cx="10972800" cy="228600"/>
+          </a:xfrm>
+          <a:prstGeom prst="rect">
+            <a:avLst/>
+          </a:prstGeom>
+          <a:noFill/>
+          <a:ln/>
+        </p:spPr>
+        <p:txBody>
+          <a:bodyPr wrap="square" lIns="0" tIns="0" rIns="0" bIns="0" rtlCol="0" anchor="ctr"/>
+          <a:lstStyle/>
+          <a:p>
+            <a:pPr marL="0" indent="0">
+              <a:buNone/>
+            </a:pPr>
+            <a:r>
+              <a:rPr lang="en-US" sz="1250" dirty="0">
+                <a:solidFill>
+                  <a:srgbClr val="5B6472"/>
+                </a:solidFill>
+                <a:latin typeface="Roboto" pitchFamily="34" charset="0"/>
+                <a:ea typeface="Roboto" pitchFamily="34" charset="-122"/>
+                <a:cs typeface="Roboto" pitchFamily="34" charset="-120"/>
+              </a:rPr>
+              <a:t>Why is this system needed?</a:t>
+            </a:r>
+            <a:endParaRPr lang="en-US" sz="1250" dirty="0"/>
+          </a:p>
+        </p:txBody>
+      </p:sp>
+      <p:sp>
+        <p:nvSpPr>
+          <p:cNvPr id="4" name="Shape 2">
+            <a:extLst>
+              <a:ext uri="{FF2B5EF4-FFF2-40B4-BE49-F238E27FC236}">
+                <a16:creationId xmlns:a16="http://schemas.microsoft.com/office/drawing/2014/main" id="{42DD7025-6C57-DD0E-39C2-F66CF77CC72A}"/>
+              </a:ext>
+            </a:extLst>
+          </p:cNvPr>
+          <p:cNvSpPr/>
+          <p:nvPr/>
+        </p:nvSpPr>
+        <p:spPr>
+          <a:xfrm>
+            <a:off x="502920" y="1078992"/>
+            <a:ext cx="11155680" cy="0"/>
+          </a:xfrm>
+          <a:prstGeom prst="line">
+            <a:avLst/>
+          </a:prstGeom>
+          <a:noFill/>
+          <a:ln w="12700">
+            <a:solidFill>
+              <a:srgbClr val="B9C2CF"/>
+            </a:solidFill>
+            <a:prstDash val="solid"/>
+          </a:ln>
+        </p:spPr>
+      </p:sp>
+      <p:sp>
+        <p:nvSpPr>
+          <p:cNvPr id="5" name="Text 3">
+            <a:extLst>
+              <a:ext uri="{FF2B5EF4-FFF2-40B4-BE49-F238E27FC236}">
+                <a16:creationId xmlns:a16="http://schemas.microsoft.com/office/drawing/2014/main" id="{2F941954-B725-E012-2C52-2F9DEDCC552D}"/>
+              </a:ext>
+            </a:extLst>
+          </p:cNvPr>
+          <p:cNvSpPr/>
+          <p:nvPr/>
+        </p:nvSpPr>
+        <p:spPr>
+          <a:xfrm>
+            <a:off x="777240" y="1508760"/>
+            <a:ext cx="5394960" cy="3794760"/>
+          </a:xfrm>
+          <a:prstGeom prst="rect">
+            <a:avLst/>
+          </a:prstGeom>
+          <a:noFill/>
+          <a:ln/>
+        </p:spPr>
+        <p:txBody>
+          <a:bodyPr wrap="square" lIns="381" tIns="381" rIns="381" bIns="381" rtlCol="0" anchor="ctr">
+            <a:normAutofit/>
+          </a:bodyPr>
+          <a:lstStyle/>
+          <a:p>
+            <a:pPr marL="177800" indent="-177800">
+              <a:buSzPct val="100000"/>
+              <a:buChar char="•"/>
+            </a:pPr>
+            <a:r>
+              <a:rPr lang="en-US" sz="2000" dirty="0">
+                <a:solidFill>
+                  <a:srgbClr val="1A1A1A"/>
+                </a:solidFill>
+                <a:latin typeface="Roboto" pitchFamily="34" charset="0"/>
+                <a:ea typeface="Roboto" pitchFamily="34" charset="-122"/>
+                <a:cs typeface="Roboto" pitchFamily="34" charset="-120"/>
+              </a:rPr>
+              <a:t>Parking control is still mostly manual.</a:t>
+            </a:r>
+            <a:endParaRPr lang="en-US" sz="2000" dirty="0"/>
+          </a:p>
+          <a:p>
+            <a:pPr marL="177800" indent="-177800">
+              <a:buSzPct val="100000"/>
+              <a:buChar char="•"/>
+            </a:pPr>
+            <a:r>
+              <a:rPr lang="en-US" sz="2000" dirty="0">
+                <a:solidFill>
+                  <a:srgbClr val="1A1A1A"/>
+                </a:solidFill>
+                <a:latin typeface="Roboto" pitchFamily="34" charset="0"/>
+                <a:ea typeface="Roboto" pitchFamily="34" charset="-122"/>
+                <a:cs typeface="Roboto" pitchFamily="34" charset="-120"/>
+              </a:rPr>
+              <a:t>Entry and exit checking can be slow.</a:t>
+            </a:r>
+            <a:endParaRPr lang="en-US" sz="2000" dirty="0"/>
+          </a:p>
+          <a:p>
+            <a:pPr marL="177800" indent="-177800">
+              <a:buSzPct val="100000"/>
+              <a:buChar char="•"/>
+            </a:pPr>
+            <a:r>
+              <a:rPr lang="en-US" sz="2000" dirty="0">
+                <a:solidFill>
+                  <a:srgbClr val="1A1A1A"/>
+                </a:solidFill>
+                <a:latin typeface="Roboto" pitchFamily="34" charset="0"/>
+                <a:ea typeface="Roboto" pitchFamily="34" charset="-122"/>
+                <a:cs typeface="Roboto" pitchFamily="34" charset="-120"/>
+              </a:rPr>
+              <a:t>Real-time monitoring is limited.</a:t>
+            </a:r>
+            <a:endParaRPr lang="en-US" sz="2000" dirty="0"/>
+          </a:p>
+          <a:p>
+            <a:pPr marL="177800" indent="-177800">
+              <a:buSzPct val="100000"/>
+              <a:buChar char="•"/>
+            </a:pPr>
+            <a:r>
+              <a:rPr lang="en-US" sz="2000" dirty="0">
+                <a:solidFill>
+                  <a:srgbClr val="1A1A1A"/>
+                </a:solidFill>
+                <a:latin typeface="Roboto" pitchFamily="34" charset="0"/>
+                <a:ea typeface="Roboto" pitchFamily="34" charset="-122"/>
+                <a:cs typeface="Roboto" pitchFamily="34" charset="-120"/>
+              </a:rPr>
+              <a:t>Parking records are difficult to manage.</a:t>
+            </a:r>
+            <a:endParaRPr lang="en-US" sz="2000" dirty="0"/>
+          </a:p>
+          <a:p>
+            <a:pPr marL="177800" indent="-177800">
+              <a:buSzPct val="100000"/>
+              <a:buChar char="•"/>
+            </a:pPr>
+            <a:r>
+              <a:rPr lang="en-US" sz="2000" dirty="0">
+                <a:solidFill>
+                  <a:srgbClr val="1A1A1A"/>
+                </a:solidFill>
+                <a:latin typeface="Roboto" pitchFamily="34" charset="0"/>
+                <a:ea typeface="Roboto" pitchFamily="34" charset="-122"/>
+                <a:cs typeface="Roboto" pitchFamily="34" charset="-120"/>
+              </a:rPr>
+              <a:t>Security and efficiency can be improved.</a:t>
+            </a:r>
+            <a:endParaRPr lang="en-US" sz="2000" dirty="0"/>
+          </a:p>
+        </p:txBody>
+      </p:sp>
+      <p:sp>
+        <p:nvSpPr>
+          <p:cNvPr id="6" name="Text 4">
+            <a:extLst>
+              <a:ext uri="{FF2B5EF4-FFF2-40B4-BE49-F238E27FC236}">
+                <a16:creationId xmlns:a16="http://schemas.microsoft.com/office/drawing/2014/main" id="{1152A642-D180-C665-FA9D-5974BDABC184}"/>
+              </a:ext>
+            </a:extLst>
+          </p:cNvPr>
+          <p:cNvSpPr/>
+          <p:nvPr/>
+        </p:nvSpPr>
+        <p:spPr>
+          <a:xfrm>
+            <a:off x="777240" y="5577840"/>
+            <a:ext cx="10881360" cy="438912"/>
+          </a:xfrm>
+          <a:prstGeom prst="rect">
+            <a:avLst/>
+          </a:prstGeom>
+          <a:noFill/>
+          <a:ln/>
+        </p:spPr>
+        <p:txBody>
+          <a:bodyPr wrap="square" lIns="0" tIns="0" rIns="0" bIns="0" rtlCol="0" anchor="ctr">
+            <a:normAutofit fontScale="92500"/>
+          </a:bodyPr>
+          <a:lstStyle/>
+          <a:p>
+            <a:pPr marL="0" indent="0">
+              <a:buNone/>
+            </a:pPr>
+            <a:r>
+              <a:rPr lang="en-US" sz="1700" b="1" dirty="0">
+                <a:solidFill>
+                  <a:srgbClr val="0B1F3A"/>
+                </a:solidFill>
+                <a:latin typeface="Montserrat" pitchFamily="34" charset="0"/>
+                <a:ea typeface="Montserrat" pitchFamily="34" charset="-122"/>
+                <a:cs typeface="Montserrat" pitchFamily="34" charset="-120"/>
+              </a:rPr>
+              <a:t>Therefore, a smart parking system is needed to automate detection, barrier control, and monitoring.</a:t>
+            </a:r>
+            <a:endParaRPr lang="en-US" sz="1700" dirty="0"/>
+          </a:p>
+        </p:txBody>
+      </p:sp>
+      <p:sp>
+        <p:nvSpPr>
+          <p:cNvPr id="7" name="Shape 5">
+            <a:extLst>
+              <a:ext uri="{FF2B5EF4-FFF2-40B4-BE49-F238E27FC236}">
+                <a16:creationId xmlns:a16="http://schemas.microsoft.com/office/drawing/2014/main" id="{4D9A2074-F1FD-EA9D-1886-81C5A671513E}"/>
+              </a:ext>
+            </a:extLst>
+          </p:cNvPr>
+          <p:cNvSpPr/>
+          <p:nvPr/>
+        </p:nvSpPr>
+        <p:spPr>
+          <a:xfrm>
+            <a:off x="6492240" y="1417320"/>
+            <a:ext cx="4983480" cy="3794760"/>
+          </a:xfrm>
+          <a:prstGeom prst="rect">
+            <a:avLst/>
+          </a:prstGeom>
+          <a:solidFill>
+            <a:srgbClr val="FFFFFF">
+              <a:alpha val="0"/>
+            </a:srgbClr>
+          </a:solidFill>
+          <a:ln w="19050">
+            <a:solidFill>
+              <a:srgbClr val="1F77B4"/>
+            </a:solidFill>
+            <a:prstDash val="solid"/>
+          </a:ln>
+        </p:spPr>
+      </p:sp>
+      <p:sp>
+        <p:nvSpPr>
+          <p:cNvPr id="8" name="Text 6">
+            <a:extLst>
+              <a:ext uri="{FF2B5EF4-FFF2-40B4-BE49-F238E27FC236}">
+                <a16:creationId xmlns:a16="http://schemas.microsoft.com/office/drawing/2014/main" id="{EC3C23AB-9539-3160-95FB-1AB659FF3648}"/>
+              </a:ext>
+            </a:extLst>
+          </p:cNvPr>
+          <p:cNvSpPr/>
+          <p:nvPr/>
+        </p:nvSpPr>
+        <p:spPr>
+          <a:xfrm>
+            <a:off x="6629400" y="3095244"/>
+            <a:ext cx="4709160" cy="320040"/>
+          </a:xfrm>
+          <a:prstGeom prst="rect">
+            <a:avLst/>
+          </a:prstGeom>
+          <a:noFill/>
+          <a:ln/>
+        </p:spPr>
+        <p:txBody>
+          <a:bodyPr wrap="square" lIns="0" tIns="0" rIns="0" bIns="0" rtlCol="0" anchor="ctr">
+            <a:normAutofit/>
+          </a:bodyPr>
+          <a:lstStyle/>
+          <a:p>
+            <a:pPr marL="0" indent="0" algn="ctr">
+              <a:buNone/>
+            </a:pPr>
+            <a:r>
+              <a:rPr lang="en-US" sz="1600" b="1" dirty="0">
+                <a:solidFill>
+                  <a:srgbClr val="1F77B4"/>
+                </a:solidFill>
+                <a:latin typeface="Montserrat" pitchFamily="34" charset="0"/>
+                <a:ea typeface="Montserrat" pitchFamily="34" charset="-122"/>
+                <a:cs typeface="Montserrat" pitchFamily="34" charset="-120"/>
+              </a:rPr>
+              <a:t>INSERT PARKING CONTEXT IMAGE</a:t>
+            </a:r>
+            <a:endParaRPr lang="en-US" sz="1600" dirty="0"/>
+          </a:p>
+        </p:txBody>
+      </p:sp>
+      <p:sp>
+        <p:nvSpPr>
+          <p:cNvPr id="9" name="Text 7">
+            <a:extLst>
+              <a:ext uri="{FF2B5EF4-FFF2-40B4-BE49-F238E27FC236}">
+                <a16:creationId xmlns:a16="http://schemas.microsoft.com/office/drawing/2014/main" id="{699B270D-3F34-B6D6-467F-714046F0C5B6}"/>
+              </a:ext>
+            </a:extLst>
+          </p:cNvPr>
+          <p:cNvSpPr/>
+          <p:nvPr/>
+        </p:nvSpPr>
+        <p:spPr>
+          <a:xfrm>
+            <a:off x="6675120" y="3479292"/>
+            <a:ext cx="4617720" cy="320040"/>
+          </a:xfrm>
+          <a:prstGeom prst="rect">
+            <a:avLst/>
+          </a:prstGeom>
+          <a:noFill/>
+          <a:ln/>
+        </p:spPr>
+        <p:txBody>
+          <a:bodyPr wrap="square" lIns="0" tIns="0" rIns="0" bIns="0" rtlCol="0" anchor="ctr">
+            <a:normAutofit/>
+          </a:bodyPr>
+          <a:lstStyle/>
+          <a:p>
+            <a:pPr marL="0" indent="0" algn="ctr">
+              <a:buNone/>
+            </a:pPr>
+            <a:r>
+              <a:rPr lang="en-US" sz="1050" dirty="0">
+                <a:solidFill>
+                  <a:srgbClr val="5B6472"/>
+                </a:solidFill>
+                <a:latin typeface="Roboto" pitchFamily="34" charset="0"/>
+                <a:ea typeface="Roboto" pitchFamily="34" charset="-122"/>
+                <a:cs typeface="Roboto" pitchFamily="34" charset="-120"/>
+              </a:rPr>
+              <a:t>Example: crowded parking gate, manual checkpoint, or parking entrance.</a:t>
+            </a:r>
+            <a:endParaRPr lang="en-US" sz="1050" dirty="0"/>
+          </a:p>
+        </p:txBody>
+      </p:sp>
+      <p:sp>
+        <p:nvSpPr>
+          <p:cNvPr id="10" name="Text 8">
+            <a:extLst>
+              <a:ext uri="{FF2B5EF4-FFF2-40B4-BE49-F238E27FC236}">
+                <a16:creationId xmlns:a16="http://schemas.microsoft.com/office/drawing/2014/main" id="{0D5EA1F9-F5AB-BBE6-1967-A03F09AB9A92}"/>
+              </a:ext>
+            </a:extLst>
+          </p:cNvPr>
+          <p:cNvSpPr/>
+          <p:nvPr/>
+        </p:nvSpPr>
+        <p:spPr>
+          <a:xfrm>
+            <a:off x="502920" y="6547104"/>
+            <a:ext cx="11155680" cy="182880"/>
+          </a:xfrm>
+          <a:prstGeom prst="rect">
+            <a:avLst/>
+          </a:prstGeom>
+          <a:noFill/>
+          <a:ln/>
+        </p:spPr>
+        <p:txBody>
+          <a:bodyPr wrap="square" lIns="0" tIns="0" rIns="0" bIns="0" rtlCol="0" anchor="ctr"/>
+          <a:lstStyle/>
+          <a:p>
+            <a:pPr marL="0" indent="0" algn="r">
+              <a:buNone/>
+            </a:pPr>
+            <a:r>
+              <a:rPr lang="en-US" sz="850" dirty="0">
+                <a:solidFill>
+                  <a:srgbClr val="7B8491"/>
+                </a:solidFill>
+                <a:latin typeface="Roboto" pitchFamily="34" charset="0"/>
+                <a:ea typeface="Roboto" pitchFamily="34" charset="-122"/>
+                <a:cs typeface="Roboto" pitchFamily="34" charset="-120"/>
+              </a:rPr>
+              <a:t>Smart Parking System  |  3</a:t>
+            </a:r>
+            <a:endParaRPr lang="en-US" sz="850" dirty="0"/>
+          </a:p>
+        </p:txBody>
+      </p:sp>
+      <p:pic>
+        <p:nvPicPr>
+          <p:cNvPr id="12" name="Picture 11" descr="TOP 10 BEST 24 Hour Parking Garage in Annapolis, MD - Updated 2026 -  Quality &amp; Affordability - Yelp">
+            <a:extLst>
+              <a:ext uri="{FF2B5EF4-FFF2-40B4-BE49-F238E27FC236}">
+                <a16:creationId xmlns:a16="http://schemas.microsoft.com/office/drawing/2014/main" id="{99510C22-8209-62DC-E475-43D97A11383A}"/>
+              </a:ext>
+            </a:extLst>
+          </p:cNvPr>
+          <p:cNvPicPr>
+            <a:picLocks noChangeAspect="1"/>
+          </p:cNvPicPr>
+          <p:nvPr/>
+        </p:nvPicPr>
+        <p:blipFill>
+          <a:blip r:embed="rId3"/>
+          <a:srcRect b="24941"/>
+          <a:stretch>
+            <a:fillRect/>
+          </a:stretch>
+        </p:blipFill>
+        <p:spPr>
+          <a:xfrm>
+            <a:off x="6572250" y="1508760"/>
+            <a:ext cx="4842510" cy="3634740"/>
+          </a:xfrm>
+          <a:prstGeom prst="rect">
+            <a:avLst/>
+          </a:prstGeom>
+        </p:spPr>
+      </p:pic>
+      <p:pic>
+        <p:nvPicPr>
+          <p:cNvPr id="13" name="Picture 12">
+            <a:extLst>
+              <a:ext uri="{FF2B5EF4-FFF2-40B4-BE49-F238E27FC236}">
+                <a16:creationId xmlns:a16="http://schemas.microsoft.com/office/drawing/2014/main" id="{8DDEE5E7-CB53-47F5-9F59-26D76EB8595C}"/>
+              </a:ext>
+            </a:extLst>
+          </p:cNvPr>
+          <p:cNvPicPr>
+            <a:picLocks noChangeAspect="1"/>
+          </p:cNvPicPr>
+          <p:nvPr/>
+        </p:nvPicPr>
+        <p:blipFill>
+          <a:blip r:embed="rId4"/>
+          <a:stretch>
+            <a:fillRect/>
+          </a:stretch>
+        </p:blipFill>
+        <p:spPr>
+          <a:xfrm>
+            <a:off x="9734550" y="44112"/>
+            <a:ext cx="2356685" cy="920580"/>
+          </a:xfrm>
+          <a:prstGeom prst="rect">
+            <a:avLst/>
+          </a:prstGeom>
+        </p:spPr>
+      </p:pic>
+    </p:spTree>
+    <p:extLst>
+      <p:ext uri="{BB962C8B-B14F-4D97-AF65-F5344CB8AC3E}">
+        <p14:creationId xmlns:p14="http://schemas.microsoft.com/office/powerpoint/2010/main" val="2285421536"/>
+      </p:ext>
+    </p:extLst>
+  </p:cSld>
+  <p:clrMapOvr>
+    <a:masterClrMapping/>
+  </p:clrMapOvr>
+</p:sld>
+</file>
+
+<file path=ppt/slides/slide4.xml><?xml version="1.0" encoding="utf-8"?>
 <p:sld xmlns:a="http://schemas.openxmlformats.org/drawingml/2006/main" xmlns:r="http://schemas.openxmlformats.org/officeDocument/2006/relationships" xmlns:p="http://schemas.openxmlformats.org/presentationml/2006/main">
   <p:cSld name="Slide 3">
     <p:spTree>
@@ -3290,7 +6982,7 @@
         </p:spPr>
         <p:txBody>
           <a:bodyPr wrap="square" lIns="0" tIns="0" rIns="0" bIns="0" rtlCol="0" anchor="ctr">
-            <a:normAutofit/>
+            <a:normAutofit lnSpcReduction="10000"/>
           </a:bodyPr>
           <a:lstStyle/>
           <a:p>
@@ -3779,12 +7471,42 @@
                 <a:ea typeface="Roboto" pitchFamily="34" charset="-122"/>
                 <a:cs typeface="Roboto" pitchFamily="34" charset="-120"/>
               </a:rPr>
-              <a:t>Smart Parking System  |  3</a:t>
+              <a:t>Smart Parking System  |  4</a:t>
             </a:r>
             <a:endParaRPr lang="en-US" sz="850" dirty="0"/>
           </a:p>
         </p:txBody>
       </p:sp>
+      <p:pic>
+        <p:nvPicPr>
+          <p:cNvPr id="13" name="Picture 12">
+            <a:extLst>
+              <a:ext uri="{FF2B5EF4-FFF2-40B4-BE49-F238E27FC236}">
+                <a16:creationId xmlns:a16="http://schemas.microsoft.com/office/drawing/2014/main" id="{8C8B821E-CC90-C740-875D-2CB5EEC5CD16}"/>
+              </a:ext>
+            </a:extLst>
+          </p:cNvPr>
+          <p:cNvPicPr>
+            <a:picLocks noChangeAspect="1"/>
+          </p:cNvPicPr>
+          <p:nvPr/>
+        </p:nvPicPr>
+        <p:blipFill>
+          <a:blip r:embed="rId3"/>
+          <a:stretch>
+            <a:fillRect/>
+          </a:stretch>
+        </p:blipFill>
+        <p:spPr>
+          <a:xfrm>
+            <a:off x="9734550" y="44112"/>
+            <a:ext cx="2356685" cy="920580"/>
+          </a:xfrm>
+          <a:prstGeom prst="rect">
+            <a:avLst/>
+          </a:prstGeom>
+        </p:spPr>
+      </p:pic>
     </p:spTree>
   </p:cSld>
   <p:clrMapOvr>
@@ -3793,7 +7515,7 @@
 </p:sld>
 </file>
 
-<file path=ppt/slides/slide4.xml><?xml version="1.0" encoding="utf-8"?>
+<file path=ppt/slides/slide5.xml><?xml version="1.0" encoding="utf-8"?>
 <p:sld xmlns:a="http://schemas.openxmlformats.org/drawingml/2006/main" xmlns:r="http://schemas.openxmlformats.org/officeDocument/2006/relationships" xmlns:p="http://schemas.openxmlformats.org/presentationml/2006/main">
   <p:cSld name="Slide 4">
     <p:spTree>
@@ -3829,7 +7551,7 @@
         </p:spPr>
         <p:txBody>
           <a:bodyPr wrap="square" lIns="0" tIns="0" rIns="0" bIns="0" rtlCol="0" anchor="ctr">
-            <a:normAutofit/>
+            <a:normAutofit lnSpcReduction="10000"/>
           </a:bodyPr>
           <a:lstStyle/>
           <a:p>
@@ -4491,9 +8213,82 @@
                 <a:ea typeface="Roboto" pitchFamily="34" charset="-122"/>
                 <a:cs typeface="Roboto" pitchFamily="34" charset="-120"/>
               </a:rPr>
-              <a:t>Smart Parking System  |  4</a:t>
+              <a:t>Smart Parking System  |  5</a:t>
             </a:r>
             <a:endParaRPr lang="en-US" sz="850" dirty="0"/>
+          </a:p>
+        </p:txBody>
+      </p:sp>
+      <p:pic>
+        <p:nvPicPr>
+          <p:cNvPr id="18" name="Picture 17">
+            <a:extLst>
+              <a:ext uri="{FF2B5EF4-FFF2-40B4-BE49-F238E27FC236}">
+                <a16:creationId xmlns:a16="http://schemas.microsoft.com/office/drawing/2014/main" id="{A469D156-12D4-D183-F1A6-BDC03628860B}"/>
+              </a:ext>
+            </a:extLst>
+          </p:cNvPr>
+          <p:cNvPicPr>
+            <a:picLocks noChangeAspect="1"/>
+          </p:cNvPicPr>
+          <p:nvPr/>
+        </p:nvPicPr>
+        <p:blipFill>
+          <a:blip r:embed="rId3"/>
+          <a:stretch>
+            <a:fillRect/>
+          </a:stretch>
+        </p:blipFill>
+        <p:spPr>
+          <a:xfrm>
+            <a:off x="9734550" y="44112"/>
+            <a:ext cx="2356685" cy="920580"/>
+          </a:xfrm>
+          <a:prstGeom prst="rect">
+            <a:avLst/>
+          </a:prstGeom>
+        </p:spPr>
+      </p:pic>
+      <p:sp>
+        <p:nvSpPr>
+          <p:cNvPr id="19" name="Text 1">
+            <a:extLst>
+              <a:ext uri="{FF2B5EF4-FFF2-40B4-BE49-F238E27FC236}">
+                <a16:creationId xmlns:a16="http://schemas.microsoft.com/office/drawing/2014/main" id="{4C3B1BA0-8A95-1107-657D-D0A14E3E4CAF}"/>
+              </a:ext>
+            </a:extLst>
+          </p:cNvPr>
+          <p:cNvSpPr/>
+          <p:nvPr/>
+        </p:nvSpPr>
+        <p:spPr>
+          <a:xfrm>
+            <a:off x="4265630" y="4434759"/>
+            <a:ext cx="2971799" cy="228600"/>
+          </a:xfrm>
+          <a:prstGeom prst="rect">
+            <a:avLst/>
+          </a:prstGeom>
+          <a:noFill/>
+          <a:ln/>
+        </p:spPr>
+        <p:txBody>
+          <a:bodyPr wrap="square" lIns="0" tIns="0" rIns="0" bIns="0" rtlCol="0" anchor="ctr"/>
+          <a:lstStyle/>
+          <a:p>
+            <a:r>
+              <a:rPr lang="en-US" sz="1400" i="1" dirty="0"/>
+              <a:t>car, motorcycle, bus and truck</a:t>
+            </a:r>
+          </a:p>
+          <a:p>
+            <a:r>
+              <a:rPr lang="en-US" sz="1400" i="1" dirty="0"/>
+              <a:t>confidence threshold 0.45</a:t>
+            </a:r>
+          </a:p>
+          <a:p>
+            <a:endParaRPr lang="en-US" sz="1400" i="1" dirty="0"/>
           </a:p>
         </p:txBody>
       </p:sp>
@@ -4505,7 +8300,7 @@
 </p:sld>
 </file>
 
-<file path=ppt/slides/slide5.xml><?xml version="1.0" encoding="utf-8"?>
+<file path=ppt/slides/slide6.xml><?xml version="1.0" encoding="utf-8"?>
 <p:sld xmlns:a="http://schemas.openxmlformats.org/drawingml/2006/main" xmlns:r="http://schemas.openxmlformats.org/officeDocument/2006/relationships" xmlns:p="http://schemas.openxmlformats.org/presentationml/2006/main">
   <p:cSld name="Slide 5">
     <p:spTree>
@@ -4541,7 +8336,7 @@
         </p:spPr>
         <p:txBody>
           <a:bodyPr wrap="square" lIns="0" tIns="0" rIns="0" bIns="0" rtlCol="0" anchor="ctr">
-            <a:normAutofit/>
+            <a:normAutofit lnSpcReduction="10000"/>
           </a:bodyPr>
           <a:lstStyle/>
           <a:p>
@@ -4885,49 +8680,126 @@
               </a:rPr>
               <a:t>Servo opens/closes the barrier.</a:t>
             </a:r>
-            <a:endParaRPr lang="en-US" sz="1650" dirty="0"/>
-          </a:p>
-        </p:txBody>
-      </p:sp>
-      <p:sp>
-        <p:nvSpPr>
-          <p:cNvPr id="10" name="Text 8"/>
-          <p:cNvSpPr/>
-          <p:nvPr/>
-        </p:nvSpPr>
-        <p:spPr>
-          <a:xfrm>
-            <a:off x="502920" y="6547104"/>
-            <a:ext cx="11155680" cy="182880"/>
-          </a:xfrm>
-          <a:prstGeom prst="rect">
-            <a:avLst/>
-          </a:prstGeom>
-          <a:noFill/>
-          <a:ln/>
-        </p:spPr>
-        <p:txBody>
-          <a:bodyPr wrap="square" lIns="0" tIns="0" rIns="0" bIns="0" rtlCol="0" anchor="ctr"/>
-          <a:lstStyle/>
-          <a:p>
-            <a:pPr marL="0" indent="0" algn="r">
-              <a:buNone/>
-            </a:pPr>
-            <a:r>
-              <a:rPr lang="en-US" sz="850" dirty="0">
-                <a:solidFill>
-                  <a:srgbClr val="7B8491"/>
+          </a:p>
+          <a:p>
+            <a:pPr marL="177800" indent="-177800">
+              <a:buSzPct val="100000"/>
+              <a:buChar char="•"/>
+            </a:pPr>
+            <a:r>
+              <a:rPr lang="en-US" sz="1650" dirty="0">
+                <a:solidFill>
+                  <a:srgbClr val="1A1A1A"/>
                 </a:solidFill>
                 <a:latin typeface="Roboto" pitchFamily="34" charset="0"/>
                 <a:ea typeface="Roboto" pitchFamily="34" charset="-122"/>
                 <a:cs typeface="Roboto" pitchFamily="34" charset="-120"/>
               </a:rPr>
-              <a:t>Smart Parking System  |  5</a:t>
+              <a:t>LCD is used for debug only</a:t>
+            </a:r>
+            <a:endParaRPr lang="en-US" sz="1650" dirty="0"/>
+          </a:p>
+        </p:txBody>
+      </p:sp>
+      <p:sp>
+        <p:nvSpPr>
+          <p:cNvPr id="10" name="Text 8"/>
+          <p:cNvSpPr/>
+          <p:nvPr/>
+        </p:nvSpPr>
+        <p:spPr>
+          <a:xfrm>
+            <a:off x="502920" y="6547104"/>
+            <a:ext cx="11155680" cy="182880"/>
+          </a:xfrm>
+          <a:prstGeom prst="rect">
+            <a:avLst/>
+          </a:prstGeom>
+          <a:noFill/>
+          <a:ln/>
+        </p:spPr>
+        <p:txBody>
+          <a:bodyPr wrap="square" lIns="0" tIns="0" rIns="0" bIns="0" rtlCol="0" anchor="ctr"/>
+          <a:lstStyle/>
+          <a:p>
+            <a:pPr marL="0" indent="0" algn="r">
+              <a:buNone/>
+            </a:pPr>
+            <a:r>
+              <a:rPr lang="en-US" sz="850" dirty="0">
+                <a:solidFill>
+                  <a:srgbClr val="7B8491"/>
+                </a:solidFill>
+                <a:latin typeface="Roboto" pitchFamily="34" charset="0"/>
+                <a:ea typeface="Roboto" pitchFamily="34" charset="-122"/>
+                <a:cs typeface="Roboto" pitchFamily="34" charset="-120"/>
+              </a:rPr>
+              <a:t>Smart Parking System  |  6</a:t>
             </a:r>
             <a:endParaRPr lang="en-US" sz="850" dirty="0"/>
           </a:p>
         </p:txBody>
       </p:sp>
+      <p:pic>
+        <p:nvPicPr>
+          <p:cNvPr id="12" name="Picture 11">
+            <a:extLst>
+              <a:ext uri="{FF2B5EF4-FFF2-40B4-BE49-F238E27FC236}">
+                <a16:creationId xmlns:a16="http://schemas.microsoft.com/office/drawing/2014/main" id="{0E61140B-A38D-60F5-58C9-735FC1F105ED}"/>
+              </a:ext>
+            </a:extLst>
+          </p:cNvPr>
+          <p:cNvPicPr>
+            <a:picLocks noChangeAspect="1"/>
+          </p:cNvPicPr>
+          <p:nvPr/>
+        </p:nvPicPr>
+        <p:blipFill>
+          <a:blip r:embed="rId3"/>
+          <a:stretch>
+            <a:fillRect/>
+          </a:stretch>
+        </p:blipFill>
+        <p:spPr>
+          <a:xfrm>
+            <a:off x="777240" y="1729855"/>
+            <a:ext cx="6472724" cy="3865497"/>
+          </a:xfrm>
+          <a:prstGeom prst="rect">
+            <a:avLst/>
+          </a:prstGeom>
+        </p:spPr>
+      </p:pic>
+      <p:pic>
+        <p:nvPicPr>
+          <p:cNvPr id="13" name="Picture 12">
+            <a:extLst>
+              <a:ext uri="{FF2B5EF4-FFF2-40B4-BE49-F238E27FC236}">
+                <a16:creationId xmlns:a16="http://schemas.microsoft.com/office/drawing/2014/main" id="{ADB7AA69-F7F5-B933-C4D5-A971A995EFD3}"/>
+              </a:ext>
+            </a:extLst>
+          </p:cNvPr>
+          <p:cNvPicPr>
+            <a:picLocks noChangeAspect="1"/>
+          </p:cNvPicPr>
+          <p:nvPr/>
+        </p:nvPicPr>
+        <p:blipFill>
+          <a:blip r:embed="rId4"/>
+          <a:stretch>
+            <a:fillRect/>
+          </a:stretch>
+        </p:blipFill>
+        <p:spPr>
+          <a:xfrm>
+            <a:off x="9734550" y="44112"/>
+            <a:ext cx="2356685" cy="920580"/>
+          </a:xfrm>
+          <a:prstGeom prst="rect">
+            <a:avLst/>
+          </a:prstGeom>
+        </p:spPr>
+      </p:pic>
     </p:spTree>
   </p:cSld>
   <p:clrMapOvr>
@@ -4936,7 +8808,7 @@
 </p:sld>
 </file>
 
-<file path=ppt/slides/slide6.xml><?xml version="1.0" encoding="utf-8"?>
+<file path=ppt/slides/slide7.xml><?xml version="1.0" encoding="utf-8"?>
 <p:sld xmlns:a="http://schemas.openxmlformats.org/drawingml/2006/main" xmlns:r="http://schemas.openxmlformats.org/officeDocument/2006/relationships" xmlns:p="http://schemas.openxmlformats.org/presentationml/2006/main">
   <p:cSld name="Slide 6">
     <p:spTree>
@@ -4972,7 +8844,7 @@
         </p:spPr>
         <p:txBody>
           <a:bodyPr wrap="square" lIns="0" tIns="0" rIns="0" bIns="0" rtlCol="0" anchor="ctr">
-            <a:normAutofit/>
+            <a:normAutofit lnSpcReduction="10000"/>
           </a:bodyPr>
           <a:lstStyle/>
           <a:p>
@@ -5184,7 +9056,7 @@
         </p:spPr>
         <p:txBody>
           <a:bodyPr wrap="square" lIns="0" tIns="0" rIns="0" bIns="0" rtlCol="0" anchor="ctr">
-            <a:normAutofit/>
+            <a:normAutofit fontScale="92500"/>
           </a:bodyPr>
           <a:lstStyle/>
           <a:p>
@@ -5239,12 +9111,72 @@
                 <a:ea typeface="Roboto" pitchFamily="34" charset="-122"/>
                 <a:cs typeface="Roboto" pitchFamily="34" charset="-120"/>
               </a:rPr>
-              <a:t>Smart Parking System  |  6</a:t>
+              <a:t>Smart Parking System  |  7</a:t>
             </a:r>
             <a:endParaRPr lang="en-US" sz="850" dirty="0"/>
           </a:p>
         </p:txBody>
       </p:sp>
+      <p:pic>
+        <p:nvPicPr>
+          <p:cNvPr id="13" name="Picture 12">
+            <a:extLst>
+              <a:ext uri="{FF2B5EF4-FFF2-40B4-BE49-F238E27FC236}">
+                <a16:creationId xmlns:a16="http://schemas.microsoft.com/office/drawing/2014/main" id="{CB0C498B-2F97-7ED4-7D92-FF1A6AB80CC4}"/>
+              </a:ext>
+            </a:extLst>
+          </p:cNvPr>
+          <p:cNvPicPr>
+            <a:picLocks noChangeAspect="1"/>
+          </p:cNvPicPr>
+          <p:nvPr/>
+        </p:nvPicPr>
+        <p:blipFill>
+          <a:blip r:embed="rId3"/>
+          <a:stretch>
+            <a:fillRect/>
+          </a:stretch>
+        </p:blipFill>
+        <p:spPr>
+          <a:xfrm>
+            <a:off x="822960" y="1519902"/>
+            <a:ext cx="10561320" cy="3891347"/>
+          </a:xfrm>
+          <a:prstGeom prst="rect">
+            <a:avLst/>
+          </a:prstGeom>
+        </p:spPr>
+      </p:pic>
+      <p:pic>
+        <p:nvPicPr>
+          <p:cNvPr id="11" name="Picture 10">
+            <a:extLst>
+              <a:ext uri="{FF2B5EF4-FFF2-40B4-BE49-F238E27FC236}">
+                <a16:creationId xmlns:a16="http://schemas.microsoft.com/office/drawing/2014/main" id="{F54DEB5A-CD3A-D23B-CFB1-E4CF4AF2C8CB}"/>
+              </a:ext>
+            </a:extLst>
+          </p:cNvPr>
+          <p:cNvPicPr>
+            <a:picLocks noChangeAspect="1"/>
+          </p:cNvPicPr>
+          <p:nvPr/>
+        </p:nvPicPr>
+        <p:blipFill>
+          <a:blip r:embed="rId4"/>
+          <a:stretch>
+            <a:fillRect/>
+          </a:stretch>
+        </p:blipFill>
+        <p:spPr>
+          <a:xfrm>
+            <a:off x="9734550" y="44112"/>
+            <a:ext cx="2356685" cy="920580"/>
+          </a:xfrm>
+          <a:prstGeom prst="rect">
+            <a:avLst/>
+          </a:prstGeom>
+        </p:spPr>
+      </p:pic>
     </p:spTree>
   </p:cSld>
   <p:clrMapOvr>
@@ -5253,7 +9185,7 @@
 </p:sld>
 </file>
 
-<file path=ppt/slides/slide7.xml><?xml version="1.0" encoding="utf-8"?>
+<file path=ppt/slides/slide8.xml><?xml version="1.0" encoding="utf-8"?>
 <p:sld xmlns:a="http://schemas.openxmlformats.org/drawingml/2006/main" xmlns:r="http://schemas.openxmlformats.org/officeDocument/2006/relationships" xmlns:p="http://schemas.openxmlformats.org/presentationml/2006/main">
   <p:cSld name="Slide 7">
     <p:spTree>
@@ -5289,7 +9221,7 @@
         </p:spPr>
         <p:txBody>
           <a:bodyPr wrap="square" lIns="0" tIns="0" rIns="0" bIns="0" rtlCol="0" anchor="ctr">
-            <a:normAutofit/>
+            <a:normAutofit lnSpcReduction="10000"/>
           </a:bodyPr>
           <a:lstStyle/>
           <a:p>
@@ -5382,7 +9314,7 @@
         <p:spPr>
           <a:xfrm>
             <a:off x="640080" y="1325880"/>
-            <a:ext cx="7452360" cy="4800600"/>
+            <a:ext cx="11018520" cy="4800600"/>
           </a:xfrm>
           <a:prstGeom prst="rect">
             <a:avLst/>
@@ -5402,14 +9334,14 @@
       </p:sp>
       <p:sp>
         <p:nvSpPr>
-          <p:cNvPr id="6" name="Text 4"/>
-          <p:cNvSpPr/>
-          <p:nvPr/>
-        </p:nvSpPr>
-        <p:spPr>
-          <a:xfrm>
-            <a:off x="777240" y="3506724"/>
-            <a:ext cx="7178040" cy="320040"/>
+          <p:cNvPr id="7" name="Text 5"/>
+          <p:cNvSpPr/>
+          <p:nvPr/>
+        </p:nvSpPr>
+        <p:spPr>
+          <a:xfrm>
+            <a:off x="822960" y="3890772"/>
+            <a:ext cx="7086600" cy="320040"/>
           </a:xfrm>
           <a:prstGeom prst="rect">
             <a:avLst/>
@@ -5427,47 +9359,6 @@
               <a:buNone/>
             </a:pPr>
             <a:r>
-              <a:rPr lang="en-US" sz="1600" b="1" dirty="0">
-                <a:solidFill>
-                  <a:srgbClr val="1F77B4"/>
-                </a:solidFill>
-                <a:latin typeface="Montserrat" pitchFamily="34" charset="0"/>
-                <a:ea typeface="Montserrat" pitchFamily="34" charset="-122"/>
-                <a:cs typeface="Montserrat" pitchFamily="34" charset="-120"/>
-              </a:rPr>
-              <a:t>INSERT HARDWARE CIRCUIT DIAGRAM</a:t>
-            </a:r>
-            <a:endParaRPr lang="en-US" sz="1600" dirty="0"/>
-          </a:p>
-        </p:txBody>
-      </p:sp>
-      <p:sp>
-        <p:nvSpPr>
-          <p:cNvPr id="7" name="Text 5"/>
-          <p:cNvSpPr/>
-          <p:nvPr/>
-        </p:nvSpPr>
-        <p:spPr>
-          <a:xfrm>
-            <a:off x="822960" y="3890772"/>
-            <a:ext cx="7086600" cy="320040"/>
-          </a:xfrm>
-          <a:prstGeom prst="rect">
-            <a:avLst/>
-          </a:prstGeom>
-          <a:noFill/>
-          <a:ln/>
-        </p:spPr>
-        <p:txBody>
-          <a:bodyPr wrap="square" lIns="0" tIns="0" rIns="0" bIns="0" rtlCol="0" anchor="ctr">
-            <a:normAutofit/>
-          </a:bodyPr>
-          <a:lstStyle/>
-          <a:p>
-            <a:pPr marL="0" indent="0" algn="ctr">
-              <a:buNone/>
-            </a:pPr>
-            <a:r>
               <a:rPr lang="en-US" sz="1050" dirty="0">
                 <a:solidFill>
                   <a:srgbClr val="5B6472"/>
@@ -5484,14 +9375,14 @@
       </p:sp>
       <p:sp>
         <p:nvSpPr>
-          <p:cNvPr id="8" name="Text 6"/>
-          <p:cNvSpPr/>
-          <p:nvPr/>
-        </p:nvSpPr>
-        <p:spPr>
-          <a:xfrm>
-            <a:off x="8412480" y="1508760"/>
-            <a:ext cx="2926080" cy="274320"/>
+          <p:cNvPr id="10" name="Text 8"/>
+          <p:cNvSpPr/>
+          <p:nvPr/>
+        </p:nvSpPr>
+        <p:spPr>
+          <a:xfrm>
+            <a:off x="502920" y="6547104"/>
+            <a:ext cx="11155680" cy="182880"/>
           </a:xfrm>
           <a:prstGeom prst="rect">
             <a:avLst/>
@@ -5500,164 +9391,87 @@
           <a:ln/>
         </p:spPr>
         <p:txBody>
-          <a:bodyPr wrap="square" lIns="0" tIns="0" rIns="0" bIns="0" rtlCol="0" anchor="ctr">
-            <a:normAutofit/>
-          </a:bodyPr>
-          <a:lstStyle/>
-          <a:p>
-            <a:pPr marL="0" indent="0">
+          <a:bodyPr wrap="square" lIns="0" tIns="0" rIns="0" bIns="0" rtlCol="0" anchor="ctr"/>
+          <a:lstStyle/>
+          <a:p>
+            <a:pPr marL="0" indent="0" algn="r">
               <a:buNone/>
             </a:pPr>
             <a:r>
-              <a:rPr lang="en-US" sz="1800" b="1" dirty="0">
-                <a:solidFill>
-                  <a:srgbClr val="1F77B4"/>
-                </a:solidFill>
-                <a:latin typeface="Montserrat" pitchFamily="34" charset="0"/>
-                <a:ea typeface="Montserrat" pitchFamily="34" charset="-122"/>
-                <a:cs typeface="Montserrat" pitchFamily="34" charset="-120"/>
-              </a:rPr>
-              <a:t>Key connections</a:t>
-            </a:r>
-            <a:endParaRPr lang="en-US" sz="1800" dirty="0"/>
-          </a:p>
-        </p:txBody>
-      </p:sp>
-      <p:sp>
-        <p:nvSpPr>
-          <p:cNvPr id="9" name="Text 7"/>
-          <p:cNvSpPr/>
-          <p:nvPr/>
-        </p:nvSpPr>
-        <p:spPr>
-          <a:xfrm>
-            <a:off x="8412480" y="2011680"/>
-            <a:ext cx="3154680" cy="3291840"/>
-          </a:xfrm>
-          <a:prstGeom prst="rect">
-            <a:avLst/>
-          </a:prstGeom>
-          <a:noFill/>
-          <a:ln/>
-        </p:spPr>
-        <p:txBody>
-          <a:bodyPr wrap="square" lIns="381" tIns="381" rIns="381" bIns="381" rtlCol="0" anchor="ctr">
-            <a:normAutofit/>
-          </a:bodyPr>
-          <a:lstStyle/>
-          <a:p>
-            <a:pPr marL="177800" indent="-177800">
-              <a:buSzPct val="100000"/>
-              <a:buChar char="•"/>
-            </a:pPr>
-            <a:r>
-              <a:rPr lang="en-US" sz="1620" dirty="0">
-                <a:solidFill>
-                  <a:srgbClr val="1A1A1A"/>
+              <a:rPr lang="en-US" sz="850" dirty="0">
+                <a:solidFill>
+                  <a:srgbClr val="7B8491"/>
                 </a:solidFill>
                 <a:latin typeface="Roboto" pitchFamily="34" charset="0"/>
                 <a:ea typeface="Roboto" pitchFamily="34" charset="-122"/>
                 <a:cs typeface="Roboto" pitchFamily="34" charset="-120"/>
               </a:rPr>
-              <a:t>Master Arduino controls servo, LED, and LCD.</a:t>
-            </a:r>
-            <a:endParaRPr lang="en-US" sz="1620" dirty="0"/>
-          </a:p>
-          <a:p>
-            <a:pPr marL="177800" indent="-177800">
-              <a:buSzPct val="100000"/>
-              <a:buChar char="•"/>
-            </a:pPr>
-            <a:r>
-              <a:rPr lang="en-US" sz="1620" dirty="0">
-                <a:solidFill>
-                  <a:srgbClr val="1A1A1A"/>
-                </a:solidFill>
-                <a:latin typeface="Roboto" pitchFamily="34" charset="0"/>
-                <a:ea typeface="Roboto" pitchFamily="34" charset="-122"/>
-                <a:cs typeface="Roboto" pitchFamily="34" charset="-120"/>
-              </a:rPr>
-              <a:t>Slave Arduino reads HC-SR04 sensor data.</a:t>
-            </a:r>
-            <a:endParaRPr lang="en-US" sz="1620" dirty="0"/>
-          </a:p>
-          <a:p>
-            <a:pPr marL="177800" indent="-177800">
-              <a:buSzPct val="100000"/>
-              <a:buChar char="•"/>
-            </a:pPr>
-            <a:r>
-              <a:rPr lang="en-US" sz="1620" dirty="0">
-                <a:solidFill>
-                  <a:srgbClr val="1A1A1A"/>
-                </a:solidFill>
-                <a:latin typeface="Roboto" pitchFamily="34" charset="0"/>
-                <a:ea typeface="Roboto" pitchFamily="34" charset="-122"/>
-                <a:cs typeface="Roboto" pitchFamily="34" charset="-120"/>
-              </a:rPr>
-              <a:t>ESP32-CAM captures vehicle images.</a:t>
-            </a:r>
-            <a:endParaRPr lang="en-US" sz="1620" dirty="0"/>
-          </a:p>
-          <a:p>
-            <a:pPr marL="177800" indent="-177800">
-              <a:buSzPct val="100000"/>
-              <a:buChar char="•"/>
-            </a:pPr>
-            <a:r>
-              <a:rPr lang="en-US" sz="1620" dirty="0">
-                <a:solidFill>
-                  <a:srgbClr val="1A1A1A"/>
-                </a:solidFill>
-                <a:latin typeface="Roboto" pitchFamily="34" charset="0"/>
-                <a:ea typeface="Roboto" pitchFamily="34" charset="-122"/>
-                <a:cs typeface="Roboto" pitchFamily="34" charset="-120"/>
-              </a:rPr>
-              <a:t>Master and Slave communicate using I2C.</a:t>
-            </a:r>
-            <a:endParaRPr lang="en-US" sz="1620" dirty="0"/>
-          </a:p>
-        </p:txBody>
-      </p:sp>
-      <p:sp>
-        <p:nvSpPr>
-          <p:cNvPr id="10" name="Text 8"/>
-          <p:cNvSpPr/>
-          <p:nvPr/>
-        </p:nvSpPr>
-        <p:spPr>
-          <a:xfrm>
-            <a:off x="502920" y="6547104"/>
-            <a:ext cx="11155680" cy="182880"/>
-          </a:xfrm>
-          <a:prstGeom prst="rect">
-            <a:avLst/>
-          </a:prstGeom>
-          <a:noFill/>
-          <a:ln/>
-        </p:spPr>
-        <p:txBody>
-          <a:bodyPr wrap="square" lIns="0" tIns="0" rIns="0" bIns="0" rtlCol="0" anchor="ctr"/>
-          <a:lstStyle/>
-          <a:p>
-            <a:pPr marL="0" indent="0" algn="r">
-              <a:buNone/>
-            </a:pPr>
-            <a:r>
-              <a:rPr lang="en-US" sz="850" dirty="0">
-                <a:solidFill>
-                  <a:srgbClr val="7B8491"/>
-                </a:solidFill>
-                <a:latin typeface="Roboto" pitchFamily="34" charset="0"/>
-                <a:ea typeface="Roboto" pitchFamily="34" charset="-122"/>
-                <a:cs typeface="Roboto" pitchFamily="34" charset="-120"/>
-              </a:rPr>
-              <a:t>Smart Parking System  |  7</a:t>
+              <a:t>Smart Parking System  |  8</a:t>
             </a:r>
             <a:endParaRPr lang="en-US" sz="850" dirty="0"/>
           </a:p>
         </p:txBody>
       </p:sp>
+      <p:pic>
+        <p:nvPicPr>
+          <p:cNvPr id="12" name="Picture 11">
+            <a:extLst>
+              <a:ext uri="{FF2B5EF4-FFF2-40B4-BE49-F238E27FC236}">
+                <a16:creationId xmlns:a16="http://schemas.microsoft.com/office/drawing/2014/main" id="{DD00ACFD-71CC-7778-8DE7-939AC4393195}"/>
+              </a:ext>
+            </a:extLst>
+          </p:cNvPr>
+          <p:cNvPicPr>
+            <a:picLocks noChangeAspect="1"/>
+          </p:cNvPicPr>
+          <p:nvPr/>
+        </p:nvPicPr>
+        <p:blipFill>
+          <a:blip r:embed="rId3"/>
+          <a:stretch>
+            <a:fillRect/>
+          </a:stretch>
+        </p:blipFill>
+        <p:spPr>
+          <a:xfrm>
+            <a:off x="731016" y="1426464"/>
+            <a:ext cx="10772136" cy="4530867"/>
+          </a:xfrm>
+          <a:prstGeom prst="rect">
+            <a:avLst/>
+          </a:prstGeom>
+        </p:spPr>
+      </p:pic>
+      <p:pic>
+        <p:nvPicPr>
+          <p:cNvPr id="8" name="Picture 7">
+            <a:extLst>
+              <a:ext uri="{FF2B5EF4-FFF2-40B4-BE49-F238E27FC236}">
+                <a16:creationId xmlns:a16="http://schemas.microsoft.com/office/drawing/2014/main" id="{3D5C3610-92D2-A978-5770-4144C6496D0B}"/>
+              </a:ext>
+            </a:extLst>
+          </p:cNvPr>
+          <p:cNvPicPr>
+            <a:picLocks noChangeAspect="1"/>
+          </p:cNvPicPr>
+          <p:nvPr/>
+        </p:nvPicPr>
+        <p:blipFill>
+          <a:blip r:embed="rId4"/>
+          <a:stretch>
+            <a:fillRect/>
+          </a:stretch>
+        </p:blipFill>
+        <p:spPr>
+          <a:xfrm>
+            <a:off x="9734550" y="44112"/>
+            <a:ext cx="2356685" cy="920580"/>
+          </a:xfrm>
+          <a:prstGeom prst="rect">
+            <a:avLst/>
+          </a:prstGeom>
+        </p:spPr>
+      </p:pic>
     </p:spTree>
   </p:cSld>
   <p:clrMapOvr>
@@ -5666,7 +9480,7 @@
 </p:sld>
 </file>
 
-<file path=ppt/slides/slide8.xml><?xml version="1.0" encoding="utf-8"?>
+<file path=ppt/slides/slide9.xml><?xml version="1.0" encoding="utf-8"?>
 <p:sld xmlns:a="http://schemas.openxmlformats.org/drawingml/2006/main" xmlns:r="http://schemas.openxmlformats.org/officeDocument/2006/relationships" xmlns:p="http://schemas.openxmlformats.org/presentationml/2006/main">
   <p:cSld name="Slide 8">
     <p:spTree>
@@ -5702,7 +9516,7 @@
         </p:spPr>
         <p:txBody>
           <a:bodyPr wrap="square" lIns="0" tIns="0" rIns="0" bIns="0" rtlCol="0" anchor="ctr">
-            <a:normAutofit/>
+            <a:normAutofit lnSpcReduction="10000"/>
           </a:bodyPr>
           <a:lstStyle/>
           <a:p>
@@ -5786,43 +9600,312 @@
           </a:ln>
         </p:spPr>
       </p:sp>
-      <p:sp>
-        <p:nvSpPr>
-          <p:cNvPr id="5" name="Shape 3"/>
-          <p:cNvSpPr/>
-          <p:nvPr/>
-        </p:nvSpPr>
-        <p:spPr>
-          <a:xfrm>
-            <a:off x="685800" y="1325880"/>
-            <a:ext cx="7863840" cy="4800600"/>
-          </a:xfrm>
-          <a:prstGeom prst="rect">
-            <a:avLst/>
-          </a:prstGeom>
-          <a:solidFill>
-            <a:srgbClr val="FFFFFF">
-              <a:alpha val="0"/>
-            </a:srgbClr>
-          </a:solidFill>
-          <a:ln w="19050">
-            <a:solidFill>
-              <a:srgbClr val="1F77B4"/>
-            </a:solidFill>
-            <a:prstDash val="solid"/>
-          </a:ln>
-        </p:spPr>
-      </p:sp>
-      <p:sp>
-        <p:nvSpPr>
-          <p:cNvPr id="6" name="Text 4"/>
-          <p:cNvSpPr/>
-          <p:nvPr/>
-        </p:nvSpPr>
-        <p:spPr>
-          <a:xfrm>
-            <a:off x="822960" y="3506724"/>
-            <a:ext cx="7589520" cy="320040"/>
+      <p:grpSp>
+        <p:nvGrpSpPr>
+          <p:cNvPr id="16" name="Group 15">
+            <a:extLst>
+              <a:ext uri="{FF2B5EF4-FFF2-40B4-BE49-F238E27FC236}">
+                <a16:creationId xmlns:a16="http://schemas.microsoft.com/office/drawing/2014/main" id="{28C8F556-8934-A902-10FE-5DC43ED56CBE}"/>
+              </a:ext>
+            </a:extLst>
+          </p:cNvPr>
+          <p:cNvGrpSpPr/>
+          <p:nvPr/>
+        </p:nvGrpSpPr>
+        <p:grpSpPr>
+          <a:xfrm>
+            <a:off x="673895" y="1267048"/>
+            <a:ext cx="2743200" cy="3803904"/>
+            <a:chOff x="8869680" y="1536192"/>
+            <a:chExt cx="2743200" cy="3803904"/>
+          </a:xfrm>
+        </p:grpSpPr>
+        <p:sp>
+          <p:nvSpPr>
+            <p:cNvPr id="8" name="Text 6"/>
+            <p:cNvSpPr/>
+            <p:nvPr/>
+          </p:nvSpPr>
+          <p:spPr>
+            <a:xfrm>
+              <a:off x="8869680" y="1536192"/>
+              <a:ext cx="2743200" cy="274320"/>
+            </a:xfrm>
+            <a:prstGeom prst="rect">
+              <a:avLst/>
+            </a:prstGeom>
+            <a:noFill/>
+            <a:ln/>
+          </p:spPr>
+          <p:txBody>
+            <a:bodyPr wrap="square" lIns="0" tIns="0" rIns="0" bIns="0" rtlCol="0" anchor="ctr">
+              <a:normAutofit/>
+            </a:bodyPr>
+            <a:lstStyle/>
+            <a:p>
+              <a:pPr marL="0" indent="0">
+                <a:buNone/>
+              </a:pPr>
+              <a:r>
+                <a:rPr lang="en-US" sz="1800" b="1" dirty="0">
+                  <a:solidFill>
+                    <a:srgbClr val="1F77B4"/>
+                  </a:solidFill>
+                  <a:latin typeface="Montserrat" pitchFamily="34" charset="0"/>
+                  <a:ea typeface="Montserrat" pitchFamily="34" charset="-122"/>
+                  <a:cs typeface="Montserrat" pitchFamily="34" charset="-120"/>
+                </a:rPr>
+                <a:t>Decision logic</a:t>
+              </a:r>
+              <a:endParaRPr lang="en-US" sz="1800" dirty="0"/>
+            </a:p>
+          </p:txBody>
+        </p:sp>
+        <p:sp>
+          <p:nvSpPr>
+            <p:cNvPr id="9" name="Text 7"/>
+            <p:cNvSpPr/>
+            <p:nvPr/>
+          </p:nvSpPr>
+          <p:spPr>
+            <a:xfrm>
+              <a:off x="8887968" y="2139696"/>
+              <a:ext cx="2377440" cy="274320"/>
+            </a:xfrm>
+            <a:prstGeom prst="rect">
+              <a:avLst/>
+            </a:prstGeom>
+            <a:noFill/>
+            <a:ln/>
+          </p:spPr>
+          <p:txBody>
+            <a:bodyPr wrap="square" lIns="0" tIns="0" rIns="0" bIns="0" rtlCol="0" anchor="ctr"/>
+            <a:lstStyle/>
+            <a:p>
+              <a:pPr marL="0" indent="0">
+                <a:buNone/>
+              </a:pPr>
+              <a:r>
+                <a:rPr lang="en-US" sz="1700" b="1" dirty="0">
+                  <a:solidFill>
+                    <a:srgbClr val="2E7D32"/>
+                  </a:solidFill>
+                  <a:latin typeface="Montserrat" pitchFamily="34" charset="0"/>
+                  <a:ea typeface="Montserrat" pitchFamily="34" charset="-122"/>
+                  <a:cs typeface="Montserrat" pitchFamily="34" charset="-120"/>
+                </a:rPr>
+                <a:t>OPEN</a:t>
+              </a:r>
+              <a:endParaRPr lang="en-US" sz="1700" dirty="0"/>
+            </a:p>
+          </p:txBody>
+        </p:sp>
+        <p:sp>
+          <p:nvSpPr>
+            <p:cNvPr id="10" name="Text 8"/>
+            <p:cNvSpPr/>
+            <p:nvPr/>
+          </p:nvSpPr>
+          <p:spPr>
+            <a:xfrm>
+              <a:off x="8869680" y="2514600"/>
+              <a:ext cx="2651760" cy="1005840"/>
+            </a:xfrm>
+            <a:prstGeom prst="rect">
+              <a:avLst/>
+            </a:prstGeom>
+            <a:noFill/>
+            <a:ln/>
+          </p:spPr>
+          <p:txBody>
+            <a:bodyPr wrap="square" lIns="381" tIns="381" rIns="381" bIns="381" rtlCol="0" anchor="ctr">
+              <a:normAutofit/>
+            </a:bodyPr>
+            <a:lstStyle/>
+            <a:p>
+              <a:pPr marL="177800" indent="-177800">
+                <a:buSzPct val="100000"/>
+                <a:buChar char="•"/>
+              </a:pPr>
+              <a:r>
+                <a:rPr lang="en-US" sz="1550" dirty="0">
+                  <a:solidFill>
+                    <a:srgbClr val="1A1A1A"/>
+                  </a:solidFill>
+                  <a:latin typeface="Roboto" pitchFamily="34" charset="0"/>
+                  <a:ea typeface="Roboto" pitchFamily="34" charset="-122"/>
+                  <a:cs typeface="Roboto" pitchFamily="34" charset="-120"/>
+                </a:rPr>
+                <a:t>Open barrier</a:t>
+              </a:r>
+              <a:endParaRPr lang="en-US" sz="1550" dirty="0"/>
+            </a:p>
+            <a:p>
+              <a:pPr marL="177800" indent="-177800">
+                <a:buSzPct val="100000"/>
+                <a:buChar char="•"/>
+              </a:pPr>
+              <a:r>
+                <a:rPr lang="en-US" sz="1550" dirty="0">
+                  <a:solidFill>
+                    <a:srgbClr val="1A1A1A"/>
+                  </a:solidFill>
+                  <a:latin typeface="Roboto" pitchFamily="34" charset="0"/>
+                  <a:ea typeface="Roboto" pitchFamily="34" charset="-122"/>
+                  <a:cs typeface="Roboto" pitchFamily="34" charset="-120"/>
+                </a:rPr>
+                <a:t>Update LCD</a:t>
+              </a:r>
+              <a:endParaRPr lang="en-US" sz="1550" dirty="0"/>
+            </a:p>
+            <a:p>
+              <a:pPr marL="177800" indent="-177800">
+                <a:buSzPct val="100000"/>
+                <a:buChar char="•"/>
+              </a:pPr>
+              <a:r>
+                <a:rPr lang="en-US" sz="1550" dirty="0">
+                  <a:solidFill>
+                    <a:srgbClr val="1A1A1A"/>
+                  </a:solidFill>
+                  <a:latin typeface="Roboto" pitchFamily="34" charset="0"/>
+                  <a:ea typeface="Roboto" pitchFamily="34" charset="-122"/>
+                  <a:cs typeface="Roboto" pitchFamily="34" charset="-120"/>
+                </a:rPr>
+                <a:t>Save log</a:t>
+              </a:r>
+              <a:endParaRPr lang="en-US" sz="1550" dirty="0"/>
+            </a:p>
+          </p:txBody>
+        </p:sp>
+        <p:sp>
+          <p:nvSpPr>
+            <p:cNvPr id="11" name="Text 9"/>
+            <p:cNvSpPr/>
+            <p:nvPr/>
+          </p:nvSpPr>
+          <p:spPr>
+            <a:xfrm>
+              <a:off x="8887968" y="3959352"/>
+              <a:ext cx="2377440" cy="274320"/>
+            </a:xfrm>
+            <a:prstGeom prst="rect">
+              <a:avLst/>
+            </a:prstGeom>
+            <a:noFill/>
+            <a:ln/>
+          </p:spPr>
+          <p:txBody>
+            <a:bodyPr wrap="square" lIns="0" tIns="0" rIns="0" bIns="0" rtlCol="0" anchor="ctr"/>
+            <a:lstStyle/>
+            <a:p>
+              <a:pPr marL="0" indent="0">
+                <a:buNone/>
+              </a:pPr>
+              <a:r>
+                <a:rPr lang="en-US" sz="1700" b="1" dirty="0">
+                  <a:solidFill>
+                    <a:srgbClr val="C62828"/>
+                  </a:solidFill>
+                  <a:latin typeface="Montserrat" pitchFamily="34" charset="0"/>
+                  <a:ea typeface="Montserrat" pitchFamily="34" charset="-122"/>
+                  <a:cs typeface="Montserrat" pitchFamily="34" charset="-120"/>
+                </a:rPr>
+                <a:t>CLOSE</a:t>
+              </a:r>
+              <a:endParaRPr lang="en-US" sz="1700" dirty="0"/>
+            </a:p>
+          </p:txBody>
+        </p:sp>
+        <p:sp>
+          <p:nvSpPr>
+            <p:cNvPr id="12" name="Text 10"/>
+            <p:cNvSpPr/>
+            <p:nvPr/>
+          </p:nvSpPr>
+          <p:spPr>
+            <a:xfrm>
+              <a:off x="8869680" y="4334256"/>
+              <a:ext cx="2651760" cy="1005840"/>
+            </a:xfrm>
+            <a:prstGeom prst="rect">
+              <a:avLst/>
+            </a:prstGeom>
+            <a:noFill/>
+            <a:ln/>
+          </p:spPr>
+          <p:txBody>
+            <a:bodyPr wrap="square" lIns="381" tIns="381" rIns="381" bIns="381" rtlCol="0" anchor="ctr">
+              <a:normAutofit/>
+            </a:bodyPr>
+            <a:lstStyle/>
+            <a:p>
+              <a:pPr marL="177800" indent="-177800">
+                <a:buSzPct val="100000"/>
+                <a:buChar char="•"/>
+              </a:pPr>
+              <a:r>
+                <a:rPr lang="en-US" sz="1550" dirty="0">
+                  <a:solidFill>
+                    <a:srgbClr val="1A1A1A"/>
+                  </a:solidFill>
+                  <a:latin typeface="Roboto" pitchFamily="34" charset="0"/>
+                  <a:ea typeface="Roboto" pitchFamily="34" charset="-122"/>
+                  <a:cs typeface="Roboto" pitchFamily="34" charset="-120"/>
+                </a:rPr>
+                <a:t>Keep gate closed</a:t>
+              </a:r>
+              <a:endParaRPr lang="en-US" sz="1550" dirty="0"/>
+            </a:p>
+            <a:p>
+              <a:pPr marL="177800" indent="-177800">
+                <a:buSzPct val="100000"/>
+                <a:buChar char="•"/>
+              </a:pPr>
+              <a:r>
+                <a:rPr lang="en-US" sz="1550" dirty="0">
+                  <a:solidFill>
+                    <a:srgbClr val="1A1A1A"/>
+                  </a:solidFill>
+                  <a:latin typeface="Roboto" pitchFamily="34" charset="0"/>
+                  <a:ea typeface="Roboto" pitchFamily="34" charset="-122"/>
+                  <a:cs typeface="Roboto" pitchFamily="34" charset="-120"/>
+                </a:rPr>
+                <a:t>Show status</a:t>
+              </a:r>
+              <a:endParaRPr lang="en-US" sz="1550" dirty="0"/>
+            </a:p>
+            <a:p>
+              <a:pPr marL="177800" indent="-177800">
+                <a:buSzPct val="100000"/>
+                <a:buChar char="•"/>
+              </a:pPr>
+              <a:r>
+                <a:rPr lang="en-US" sz="1550" dirty="0">
+                  <a:solidFill>
+                    <a:srgbClr val="1A1A1A"/>
+                  </a:solidFill>
+                  <a:latin typeface="Roboto" pitchFamily="34" charset="0"/>
+                  <a:ea typeface="Roboto" pitchFamily="34" charset="-122"/>
+                  <a:cs typeface="Roboto" pitchFamily="34" charset="-120"/>
+                </a:rPr>
+                <a:t>Save log</a:t>
+              </a:r>
+              <a:endParaRPr lang="en-US" sz="1550" dirty="0"/>
+            </a:p>
+          </p:txBody>
+        </p:sp>
+      </p:grpSp>
+      <p:sp>
+        <p:nvSpPr>
+          <p:cNvPr id="13" name="Text 11"/>
+          <p:cNvSpPr/>
+          <p:nvPr/>
+        </p:nvSpPr>
+        <p:spPr>
+          <a:xfrm>
+            <a:off x="502920" y="6547104"/>
+            <a:ext cx="11155680" cy="182880"/>
           </a:xfrm>
           <a:prstGeom prst="rect">
             <a:avLst/>
@@ -5831,742 +9914,135 @@
           <a:ln/>
         </p:spPr>
         <p:txBody>
-          <a:bodyPr wrap="square" lIns="0" tIns="0" rIns="0" bIns="0" rtlCol="0" anchor="ctr">
-            <a:normAutofit/>
-          </a:bodyPr>
-          <a:lstStyle/>
-          <a:p>
-            <a:pPr marL="0" indent="0" algn="ctr">
+          <a:bodyPr wrap="square" lIns="0" tIns="0" rIns="0" bIns="0" rtlCol="0" anchor="ctr"/>
+          <a:lstStyle/>
+          <a:p>
+            <a:pPr marL="0" indent="0" algn="r">
               <a:buNone/>
             </a:pPr>
             <a:r>
-              <a:rPr lang="en-US" sz="1600" b="1" dirty="0">
-                <a:solidFill>
-                  <a:srgbClr val="1F77B4"/>
-                </a:solidFill>
-                <a:latin typeface="Montserrat" pitchFamily="34" charset="0"/>
-                <a:ea typeface="Montserrat" pitchFamily="34" charset="-122"/>
-                <a:cs typeface="Montserrat" pitchFamily="34" charset="-120"/>
-              </a:rPr>
-              <a:t>INSERT SYSTEM FLOWCHART</a:t>
-            </a:r>
-            <a:endParaRPr lang="en-US" sz="1600" dirty="0"/>
-          </a:p>
-        </p:txBody>
-      </p:sp>
-      <p:sp>
-        <p:nvSpPr>
-          <p:cNvPr id="7" name="Text 5"/>
-          <p:cNvSpPr/>
-          <p:nvPr/>
-        </p:nvSpPr>
-        <p:spPr>
-          <a:xfrm>
-            <a:off x="868680" y="3890772"/>
-            <a:ext cx="7498080" cy="320040"/>
-          </a:xfrm>
-          <a:prstGeom prst="rect">
-            <a:avLst/>
-          </a:prstGeom>
-          <a:noFill/>
-          <a:ln/>
-        </p:spPr>
-        <p:txBody>
-          <a:bodyPr wrap="square" lIns="0" tIns="0" rIns="0" bIns="0" rtlCol="0" anchor="ctr">
-            <a:normAutofit/>
-          </a:bodyPr>
-          <a:lstStyle/>
-          <a:p>
-            <a:pPr marL="0" indent="0" algn="ctr">
-              <a:buNone/>
-            </a:pPr>
-            <a:r>
-              <a:rPr lang="en-US" sz="1050" dirty="0">
-                <a:solidFill>
-                  <a:srgbClr val="5B6472"/>
+              <a:rPr lang="en-US" sz="850" dirty="0">
+                <a:solidFill>
+                  <a:srgbClr val="7B8491"/>
                 </a:solidFill>
                 <a:latin typeface="Roboto" pitchFamily="34" charset="0"/>
                 <a:ea typeface="Roboto" pitchFamily="34" charset="-122"/>
                 <a:cs typeface="Roboto" pitchFamily="34" charset="-120"/>
               </a:rPr>
-              <a:t>Flow: Start → Vehicle Detected → Capture Image → YOLO Server → Decision → Barrier Control → Save Log.</a:t>
-            </a:r>
-            <a:endParaRPr lang="en-US" sz="1050" dirty="0"/>
-          </a:p>
-        </p:txBody>
-      </p:sp>
-      <p:sp>
-        <p:nvSpPr>
-          <p:cNvPr id="8" name="Text 6"/>
-          <p:cNvSpPr/>
-          <p:nvPr/>
-        </p:nvSpPr>
-        <p:spPr>
-          <a:xfrm>
-            <a:off x="8869680" y="1536192"/>
-            <a:ext cx="2743200" cy="274320"/>
-          </a:xfrm>
-          <a:prstGeom prst="rect">
-            <a:avLst/>
-          </a:prstGeom>
-          <a:noFill/>
-          <a:ln/>
-        </p:spPr>
-        <p:txBody>
-          <a:bodyPr wrap="square" lIns="0" tIns="0" rIns="0" bIns="0" rtlCol="0" anchor="ctr">
-            <a:normAutofit/>
-          </a:bodyPr>
-          <a:lstStyle/>
-          <a:p>
-            <a:pPr marL="0" indent="0">
-              <a:buNone/>
-            </a:pPr>
-            <a:r>
-              <a:rPr lang="en-US" sz="1800" b="1" dirty="0">
-                <a:solidFill>
-                  <a:srgbClr val="1F77B4"/>
-                </a:solidFill>
-                <a:latin typeface="Montserrat" pitchFamily="34" charset="0"/>
-                <a:ea typeface="Montserrat" pitchFamily="34" charset="-122"/>
-                <a:cs typeface="Montserrat" pitchFamily="34" charset="-120"/>
-              </a:rPr>
-              <a:t>Decision logic</a:t>
-            </a:r>
-            <a:endParaRPr lang="en-US" sz="1800" dirty="0"/>
-          </a:p>
-        </p:txBody>
-      </p:sp>
-      <p:sp>
-        <p:nvSpPr>
-          <p:cNvPr id="9" name="Text 7"/>
-          <p:cNvSpPr/>
-          <p:nvPr/>
-        </p:nvSpPr>
-        <p:spPr>
-          <a:xfrm>
-            <a:off x="8887968" y="2139696"/>
-            <a:ext cx="2377440" cy="274320"/>
-          </a:xfrm>
-          <a:prstGeom prst="rect">
-            <a:avLst/>
-          </a:prstGeom>
-          <a:noFill/>
-          <a:ln/>
-        </p:spPr>
-        <p:txBody>
-          <a:bodyPr wrap="square" lIns="0" tIns="0" rIns="0" bIns="0" rtlCol="0" anchor="ctr"/>
-          <a:lstStyle/>
-          <a:p>
-            <a:pPr marL="0" indent="0">
-              <a:buNone/>
-            </a:pPr>
-            <a:r>
-              <a:rPr lang="en-US" sz="1700" b="1" dirty="0">
-                <a:solidFill>
-                  <a:srgbClr val="2E7D32"/>
-                </a:solidFill>
-                <a:latin typeface="Montserrat" pitchFamily="34" charset="0"/>
-                <a:ea typeface="Montserrat" pitchFamily="34" charset="-122"/>
-                <a:cs typeface="Montserrat" pitchFamily="34" charset="-120"/>
-              </a:rPr>
-              <a:t>OPEN</a:t>
-            </a:r>
-            <a:endParaRPr lang="en-US" sz="1700" dirty="0"/>
-          </a:p>
-        </p:txBody>
-      </p:sp>
-      <p:sp>
-        <p:nvSpPr>
-          <p:cNvPr id="10" name="Text 8"/>
-          <p:cNvSpPr/>
-          <p:nvPr/>
-        </p:nvSpPr>
-        <p:spPr>
-          <a:xfrm>
-            <a:off x="8869680" y="2514600"/>
-            <a:ext cx="2651760" cy="1005840"/>
-          </a:xfrm>
-          <a:prstGeom prst="rect">
-            <a:avLst/>
-          </a:prstGeom>
-          <a:noFill/>
-          <a:ln/>
-        </p:spPr>
-        <p:txBody>
-          <a:bodyPr wrap="square" lIns="381" tIns="381" rIns="381" bIns="381" rtlCol="0" anchor="ctr">
-            <a:normAutofit/>
-          </a:bodyPr>
-          <a:lstStyle/>
-          <a:p>
-            <a:pPr marL="177800" indent="-177800">
-              <a:buSzPct val="100000"/>
-              <a:buChar char="•"/>
-            </a:pPr>
-            <a:r>
-              <a:rPr lang="en-US" sz="1550" dirty="0">
-                <a:solidFill>
-                  <a:srgbClr val="1A1A1A"/>
-                </a:solidFill>
-                <a:latin typeface="Roboto" pitchFamily="34" charset="0"/>
-                <a:ea typeface="Roboto" pitchFamily="34" charset="-122"/>
-                <a:cs typeface="Roboto" pitchFamily="34" charset="-120"/>
-              </a:rPr>
-              <a:t>Open barrier</a:t>
-            </a:r>
-            <a:endParaRPr lang="en-US" sz="1550" dirty="0"/>
-          </a:p>
-          <a:p>
-            <a:pPr marL="177800" indent="-177800">
-              <a:buSzPct val="100000"/>
-              <a:buChar char="•"/>
-            </a:pPr>
-            <a:r>
-              <a:rPr lang="en-US" sz="1550" dirty="0">
-                <a:solidFill>
-                  <a:srgbClr val="1A1A1A"/>
-                </a:solidFill>
-                <a:latin typeface="Roboto" pitchFamily="34" charset="0"/>
-                <a:ea typeface="Roboto" pitchFamily="34" charset="-122"/>
-                <a:cs typeface="Roboto" pitchFamily="34" charset="-120"/>
-              </a:rPr>
-              <a:t>Update LCD/LED</a:t>
-            </a:r>
-            <a:endParaRPr lang="en-US" sz="1550" dirty="0"/>
-          </a:p>
-          <a:p>
-            <a:pPr marL="177800" indent="-177800">
-              <a:buSzPct val="100000"/>
-              <a:buChar char="•"/>
-            </a:pPr>
-            <a:r>
-              <a:rPr lang="en-US" sz="1550" dirty="0">
-                <a:solidFill>
-                  <a:srgbClr val="1A1A1A"/>
-                </a:solidFill>
-                <a:latin typeface="Roboto" pitchFamily="34" charset="0"/>
-                <a:ea typeface="Roboto" pitchFamily="34" charset="-122"/>
-                <a:cs typeface="Roboto" pitchFamily="34" charset="-120"/>
-              </a:rPr>
-              <a:t>Save log</a:t>
-            </a:r>
-            <a:endParaRPr lang="en-US" sz="1550" dirty="0"/>
-          </a:p>
-        </p:txBody>
-      </p:sp>
-      <p:sp>
-        <p:nvSpPr>
-          <p:cNvPr id="11" name="Text 9"/>
-          <p:cNvSpPr/>
-          <p:nvPr/>
-        </p:nvSpPr>
-        <p:spPr>
-          <a:xfrm>
-            <a:off x="8887968" y="3959352"/>
-            <a:ext cx="2377440" cy="274320"/>
-          </a:xfrm>
-          <a:prstGeom prst="rect">
-            <a:avLst/>
-          </a:prstGeom>
-          <a:noFill/>
-          <a:ln/>
-        </p:spPr>
-        <p:txBody>
-          <a:bodyPr wrap="square" lIns="0" tIns="0" rIns="0" bIns="0" rtlCol="0" anchor="ctr"/>
-          <a:lstStyle/>
-          <a:p>
-            <a:pPr marL="0" indent="0">
-              <a:buNone/>
-            </a:pPr>
-            <a:r>
-              <a:rPr lang="en-US" sz="1700" b="1" dirty="0">
-                <a:solidFill>
-                  <a:srgbClr val="C62828"/>
-                </a:solidFill>
-                <a:latin typeface="Montserrat" pitchFamily="34" charset="0"/>
-                <a:ea typeface="Montserrat" pitchFamily="34" charset="-122"/>
-                <a:cs typeface="Montserrat" pitchFamily="34" charset="-120"/>
-              </a:rPr>
-              <a:t>CLOSE</a:t>
-            </a:r>
-            <a:endParaRPr lang="en-US" sz="1700" dirty="0"/>
-          </a:p>
-        </p:txBody>
-      </p:sp>
-      <p:sp>
-        <p:nvSpPr>
-          <p:cNvPr id="12" name="Text 10"/>
-          <p:cNvSpPr/>
-          <p:nvPr/>
-        </p:nvSpPr>
-        <p:spPr>
-          <a:xfrm>
-            <a:off x="8869680" y="4334256"/>
-            <a:ext cx="2651760" cy="1005840"/>
-          </a:xfrm>
-          <a:prstGeom prst="rect">
-            <a:avLst/>
-          </a:prstGeom>
-          <a:noFill/>
-          <a:ln/>
-        </p:spPr>
-        <p:txBody>
-          <a:bodyPr wrap="square" lIns="381" tIns="381" rIns="381" bIns="381" rtlCol="0" anchor="ctr">
-            <a:normAutofit/>
-          </a:bodyPr>
-          <a:lstStyle/>
-          <a:p>
-            <a:pPr marL="177800" indent="-177800">
-              <a:buSzPct val="100000"/>
-              <a:buChar char="•"/>
-            </a:pPr>
-            <a:r>
-              <a:rPr lang="en-US" sz="1550" dirty="0">
-                <a:solidFill>
-                  <a:srgbClr val="1A1A1A"/>
-                </a:solidFill>
-                <a:latin typeface="Roboto" pitchFamily="34" charset="0"/>
-                <a:ea typeface="Roboto" pitchFamily="34" charset="-122"/>
-                <a:cs typeface="Roboto" pitchFamily="34" charset="-120"/>
-              </a:rPr>
-              <a:t>Keep gate closed</a:t>
-            </a:r>
-            <a:endParaRPr lang="en-US" sz="1550" dirty="0"/>
-          </a:p>
-          <a:p>
-            <a:pPr marL="177800" indent="-177800">
-              <a:buSzPct val="100000"/>
-              <a:buChar char="•"/>
-            </a:pPr>
-            <a:r>
-              <a:rPr lang="en-US" sz="1550" dirty="0">
-                <a:solidFill>
-                  <a:srgbClr val="1A1A1A"/>
-                </a:solidFill>
-                <a:latin typeface="Roboto" pitchFamily="34" charset="0"/>
-                <a:ea typeface="Roboto" pitchFamily="34" charset="-122"/>
-                <a:cs typeface="Roboto" pitchFamily="34" charset="-120"/>
-              </a:rPr>
-              <a:t>Show status</a:t>
-            </a:r>
-            <a:endParaRPr lang="en-US" sz="1550" dirty="0"/>
-          </a:p>
-          <a:p>
-            <a:pPr marL="177800" indent="-177800">
-              <a:buSzPct val="100000"/>
-              <a:buChar char="•"/>
-            </a:pPr>
-            <a:r>
-              <a:rPr lang="en-US" sz="1550" dirty="0">
-                <a:solidFill>
-                  <a:srgbClr val="1A1A1A"/>
-                </a:solidFill>
-                <a:latin typeface="Roboto" pitchFamily="34" charset="0"/>
-                <a:ea typeface="Roboto" pitchFamily="34" charset="-122"/>
-                <a:cs typeface="Roboto" pitchFamily="34" charset="-120"/>
-              </a:rPr>
-              <a:t>Save log</a:t>
-            </a:r>
-            <a:endParaRPr lang="en-US" sz="1550" dirty="0"/>
-          </a:p>
-        </p:txBody>
-      </p:sp>
-      <p:sp>
-        <p:nvSpPr>
-          <p:cNvPr id="13" name="Text 11"/>
-          <p:cNvSpPr/>
-          <p:nvPr/>
-        </p:nvSpPr>
-        <p:spPr>
-          <a:xfrm>
-            <a:off x="502920" y="6547104"/>
-            <a:ext cx="11155680" cy="182880"/>
-          </a:xfrm>
-          <a:prstGeom prst="rect">
-            <a:avLst/>
-          </a:prstGeom>
-          <a:noFill/>
-          <a:ln/>
-        </p:spPr>
-        <p:txBody>
-          <a:bodyPr wrap="square" lIns="0" tIns="0" rIns="0" bIns="0" rtlCol="0" anchor="ctr"/>
-          <a:lstStyle/>
-          <a:p>
-            <a:pPr marL="0" indent="0" algn="r">
-              <a:buNone/>
-            </a:pPr>
-            <a:r>
-              <a:rPr lang="en-US" sz="850" dirty="0">
-                <a:solidFill>
-                  <a:srgbClr val="7B8491"/>
-                </a:solidFill>
-                <a:latin typeface="Roboto" pitchFamily="34" charset="0"/>
-                <a:ea typeface="Roboto" pitchFamily="34" charset="-122"/>
-                <a:cs typeface="Roboto" pitchFamily="34" charset="-120"/>
-              </a:rPr>
-              <a:t>Smart Parking System  |  8</a:t>
+              <a:t>Smart Parking System  |  9</a:t>
             </a:r>
             <a:endParaRPr lang="en-US" sz="850" dirty="0"/>
           </a:p>
         </p:txBody>
       </p:sp>
-    </p:spTree>
-  </p:cSld>
-  <p:clrMapOvr>
-    <a:masterClrMapping/>
-  </p:clrMapOvr>
-</p:sld>
-</file>
-
-<file path=ppt/slides/slide9.xml><?xml version="1.0" encoding="utf-8"?>
-<p:sld xmlns:a="http://schemas.openxmlformats.org/drawingml/2006/main" xmlns:r="http://schemas.openxmlformats.org/officeDocument/2006/relationships" xmlns:p="http://schemas.openxmlformats.org/presentationml/2006/main">
-  <p:cSld name="Slide 9">
-    <p:spTree>
-      <p:nvGrpSpPr>
-        <p:cNvPr id="1" name=""/>
-        <p:cNvGrpSpPr/>
-        <p:nvPr/>
-      </p:nvGrpSpPr>
-      <p:grpSpPr>
-        <a:xfrm>
-          <a:off x="0" y="0"/>
-          <a:ext cx="0" cy="0"/>
-          <a:chOff x="0" y="0"/>
-          <a:chExt cx="0" cy="0"/>
-        </a:xfrm>
-      </p:grpSpPr>
-      <p:sp>
-        <p:nvSpPr>
-          <p:cNvPr id="2" name="Text 0"/>
-          <p:cNvSpPr/>
-          <p:nvPr/>
-        </p:nvSpPr>
-        <p:spPr>
-          <a:xfrm>
-            <a:off x="502920" y="320040"/>
-            <a:ext cx="11155680" cy="411480"/>
-          </a:xfrm>
-          <a:prstGeom prst="rect">
-            <a:avLst/>
-          </a:prstGeom>
-          <a:noFill/>
-          <a:ln/>
-        </p:spPr>
-        <p:txBody>
-          <a:bodyPr wrap="square" lIns="0" tIns="0" rIns="0" bIns="0" rtlCol="0" anchor="ctr">
-            <a:normAutofit/>
-          </a:bodyPr>
-          <a:lstStyle/>
-          <a:p>
-            <a:pPr marL="0" indent="0">
-              <a:buNone/>
-            </a:pPr>
-            <a:r>
-              <a:rPr lang="en-US" sz="3000" b="1" dirty="0">
-                <a:solidFill>
-                  <a:srgbClr val="0B1F3A"/>
-                </a:solidFill>
-                <a:latin typeface="Montserrat" pitchFamily="34" charset="0"/>
-                <a:ea typeface="Montserrat" pitchFamily="34" charset="-122"/>
-                <a:cs typeface="Montserrat" pitchFamily="34" charset="-120"/>
-              </a:rPr>
-              <a:t>Web Dashboard Interface</a:t>
-            </a:r>
-            <a:endParaRPr lang="en-US" sz="3000" dirty="0"/>
-          </a:p>
-        </p:txBody>
-      </p:sp>
-      <p:sp>
-        <p:nvSpPr>
-          <p:cNvPr id="3" name="Text 1"/>
-          <p:cNvSpPr/>
-          <p:nvPr/>
-        </p:nvSpPr>
-        <p:spPr>
-          <a:xfrm>
-            <a:off x="530352" y="777240"/>
-            <a:ext cx="10972800" cy="228600"/>
-          </a:xfrm>
-          <a:prstGeom prst="rect">
-            <a:avLst/>
-          </a:prstGeom>
-          <a:noFill/>
-          <a:ln/>
-        </p:spPr>
-        <p:txBody>
-          <a:bodyPr wrap="square" lIns="0" tIns="0" rIns="0" bIns="0" rtlCol="0" anchor="ctr"/>
-          <a:lstStyle/>
-          <a:p>
-            <a:pPr marL="0" indent="0">
-              <a:buNone/>
-            </a:pPr>
-            <a:r>
-              <a:rPr lang="en-US" sz="1250" dirty="0">
-                <a:solidFill>
-                  <a:srgbClr val="5B6472"/>
-                </a:solidFill>
-                <a:latin typeface="Roboto" pitchFamily="34" charset="0"/>
-                <a:ea typeface="Roboto" pitchFamily="34" charset="-122"/>
-                <a:cs typeface="Roboto" pitchFamily="34" charset="-120"/>
-              </a:rPr>
-              <a:t>Real-time monitoring for parking management.</a:t>
-            </a:r>
-            <a:endParaRPr lang="en-US" sz="1250" dirty="0"/>
-          </a:p>
-        </p:txBody>
-      </p:sp>
-      <p:sp>
-        <p:nvSpPr>
-          <p:cNvPr id="4" name="Shape 2"/>
-          <p:cNvSpPr/>
-          <p:nvPr/>
-        </p:nvSpPr>
-        <p:spPr>
-          <a:xfrm>
-            <a:off x="502920" y="1078992"/>
-            <a:ext cx="11155680" cy="0"/>
-          </a:xfrm>
-          <a:prstGeom prst="line">
-            <a:avLst/>
-          </a:prstGeom>
-          <a:noFill/>
-          <a:ln w="12700">
+      <p:grpSp>
+        <p:nvGrpSpPr>
+          <p:cNvPr id="22" name="Group 21">
+            <a:extLst>
+              <a:ext uri="{FF2B5EF4-FFF2-40B4-BE49-F238E27FC236}">
+                <a16:creationId xmlns:a16="http://schemas.microsoft.com/office/drawing/2014/main" id="{771B820D-9F6A-ED13-BA9F-E92FC73725CC}"/>
+              </a:ext>
+            </a:extLst>
+          </p:cNvPr>
+          <p:cNvGrpSpPr/>
+          <p:nvPr/>
+        </p:nvGrpSpPr>
+        <p:grpSpPr>
+          <a:xfrm>
+            <a:off x="5167222" y="1195450"/>
+            <a:ext cx="6008298" cy="5029198"/>
+            <a:chOff x="8107036" y="128016"/>
+            <a:chExt cx="3919864" cy="6601968"/>
+          </a:xfrm>
+        </p:grpSpPr>
+        <p:sp>
+          <p:nvSpPr>
+            <p:cNvPr id="5" name="Shape 3"/>
+            <p:cNvSpPr/>
+            <p:nvPr/>
+          </p:nvSpPr>
+          <p:spPr>
+            <a:xfrm flipH="1">
+              <a:off x="8107036" y="128016"/>
+              <a:ext cx="3919864" cy="6601968"/>
+            </a:xfrm>
+            <a:prstGeom prst="rect">
+              <a:avLst/>
+            </a:prstGeom>
             <a:solidFill>
-              <a:srgbClr val="B9C2CF"/>
+              <a:srgbClr val="FFFFFF">
+                <a:alpha val="0"/>
+              </a:srgbClr>
             </a:solidFill>
-            <a:prstDash val="solid"/>
-          </a:ln>
-        </p:spPr>
-      </p:sp>
-      <p:sp>
-        <p:nvSpPr>
-          <p:cNvPr id="5" name="Shape 3"/>
-          <p:cNvSpPr/>
-          <p:nvPr/>
-        </p:nvSpPr>
-        <p:spPr>
-          <a:xfrm>
-            <a:off x="731520" y="1325880"/>
-            <a:ext cx="10744200" cy="4069080"/>
-          </a:xfrm>
-          <a:prstGeom prst="rect">
-            <a:avLst/>
-          </a:prstGeom>
-          <a:solidFill>
-            <a:srgbClr val="FFFFFF">
-              <a:alpha val="0"/>
-            </a:srgbClr>
-          </a:solidFill>
-          <a:ln w="19050">
-            <a:solidFill>
-              <a:srgbClr val="1F77B4"/>
-            </a:solidFill>
-            <a:prstDash val="solid"/>
-          </a:ln>
-        </p:spPr>
-      </p:sp>
-      <p:sp>
-        <p:nvSpPr>
-          <p:cNvPr id="6" name="Text 4"/>
-          <p:cNvSpPr/>
-          <p:nvPr/>
-        </p:nvSpPr>
-        <p:spPr>
-          <a:xfrm>
-            <a:off x="868680" y="3140964"/>
-            <a:ext cx="10469880" cy="320040"/>
-          </a:xfrm>
-          <a:prstGeom prst="rect">
-            <a:avLst/>
-          </a:prstGeom>
-          <a:noFill/>
-          <a:ln/>
-        </p:spPr>
-        <p:txBody>
-          <a:bodyPr wrap="square" lIns="0" tIns="0" rIns="0" bIns="0" rtlCol="0" anchor="ctr">
-            <a:normAutofit/>
-          </a:bodyPr>
-          <a:lstStyle/>
-          <a:p>
-            <a:pPr marL="0" indent="0" algn="ctr">
-              <a:buNone/>
-            </a:pPr>
-            <a:r>
-              <a:rPr lang="en-US" sz="1600" b="1" dirty="0">
-                <a:solidFill>
-                  <a:srgbClr val="1F77B4"/>
-                </a:solidFill>
-                <a:latin typeface="Montserrat" pitchFamily="34" charset="0"/>
-                <a:ea typeface="Montserrat" pitchFamily="34" charset="-122"/>
-                <a:cs typeface="Montserrat" pitchFamily="34" charset="-120"/>
-              </a:rPr>
-              <a:t>INSERT WEB DASHBOARD SCREENSHOT / MOCKUP</a:t>
-            </a:r>
-            <a:endParaRPr lang="en-US" sz="1600" dirty="0"/>
-          </a:p>
-        </p:txBody>
-      </p:sp>
-      <p:sp>
-        <p:nvSpPr>
-          <p:cNvPr id="7" name="Text 5"/>
-          <p:cNvSpPr/>
-          <p:nvPr/>
-        </p:nvSpPr>
-        <p:spPr>
-          <a:xfrm>
-            <a:off x="914400" y="3525012"/>
-            <a:ext cx="10378440" cy="320040"/>
-          </a:xfrm>
-          <a:prstGeom prst="rect">
-            <a:avLst/>
-          </a:prstGeom>
-          <a:noFill/>
-          <a:ln/>
-        </p:spPr>
-        <p:txBody>
-          <a:bodyPr wrap="square" lIns="0" tIns="0" rIns="0" bIns="0" rtlCol="0" anchor="ctr">
-            <a:normAutofit/>
-          </a:bodyPr>
-          <a:lstStyle/>
-          <a:p>
-            <a:pPr marL="0" indent="0" algn="ctr">
-              <a:buNone/>
-            </a:pPr>
-            <a:r>
-              <a:rPr lang="en-US" sz="1050" dirty="0">
-                <a:solidFill>
-                  <a:srgbClr val="5B6472"/>
-                </a:solidFill>
-                <a:latin typeface="Roboto" pitchFamily="34" charset="0"/>
-                <a:ea typeface="Roboto" pitchFamily="34" charset="-122"/>
-                <a:cs typeface="Roboto" pitchFamily="34" charset="-120"/>
-              </a:rPr>
-              <a:t>Insert the final dashboard image, or a mockup if the implementation is not finished.</a:t>
-            </a:r>
-            <a:endParaRPr lang="en-US" sz="1050" dirty="0"/>
-          </a:p>
-        </p:txBody>
-      </p:sp>
-      <p:sp>
-        <p:nvSpPr>
-          <p:cNvPr id="8" name="Text 6"/>
-          <p:cNvSpPr/>
-          <p:nvPr/>
-        </p:nvSpPr>
-        <p:spPr>
-          <a:xfrm>
-            <a:off x="777240" y="5623560"/>
-            <a:ext cx="2468880" cy="274320"/>
-          </a:xfrm>
-          <a:prstGeom prst="rect">
-            <a:avLst/>
-          </a:prstGeom>
-          <a:noFill/>
-          <a:ln/>
-        </p:spPr>
-        <p:txBody>
-          <a:bodyPr wrap="square" lIns="0" tIns="0" rIns="0" bIns="0" rtlCol="0" anchor="ctr">
-            <a:normAutofit/>
-          </a:bodyPr>
-          <a:lstStyle/>
-          <a:p>
-            <a:pPr marL="0" indent="0">
-              <a:buNone/>
-            </a:pPr>
-            <a:r>
-              <a:rPr lang="en-US" sz="1800" b="1" dirty="0">
-                <a:solidFill>
-                  <a:srgbClr val="1F77B4"/>
-                </a:solidFill>
-                <a:latin typeface="Montserrat" pitchFamily="34" charset="0"/>
-                <a:ea typeface="Montserrat" pitchFamily="34" charset="-122"/>
-                <a:cs typeface="Montserrat" pitchFamily="34" charset="-120"/>
-              </a:rPr>
-              <a:t>Dashboard includes</a:t>
-            </a:r>
-            <a:endParaRPr lang="en-US" sz="1800" dirty="0"/>
-          </a:p>
-        </p:txBody>
-      </p:sp>
-      <p:sp>
-        <p:nvSpPr>
-          <p:cNvPr id="9" name="Text 7"/>
-          <p:cNvSpPr/>
-          <p:nvPr/>
-        </p:nvSpPr>
-        <p:spPr>
-          <a:xfrm>
-            <a:off x="3429000" y="5614416"/>
-            <a:ext cx="7909560" cy="320040"/>
-          </a:xfrm>
-          <a:prstGeom prst="rect">
-            <a:avLst/>
-          </a:prstGeom>
-          <a:noFill/>
-          <a:ln/>
-        </p:spPr>
-        <p:txBody>
-          <a:bodyPr wrap="square" lIns="0" tIns="0" rIns="0" bIns="0" rtlCol="0" anchor="ctr">
-            <a:normAutofit/>
-          </a:bodyPr>
-          <a:lstStyle/>
-          <a:p>
-            <a:pPr marL="0" indent="0">
-              <a:buNone/>
-            </a:pPr>
-            <a:r>
-              <a:rPr lang="en-US" sz="1450" dirty="0">
-                <a:solidFill>
-                  <a:srgbClr val="1A1A1A"/>
-                </a:solidFill>
-                <a:latin typeface="Roboto" pitchFamily="34" charset="0"/>
-                <a:ea typeface="Roboto" pitchFamily="34" charset="-122"/>
-                <a:cs typeface="Roboto" pitchFamily="34" charset="-120"/>
-              </a:rPr>
-              <a:t>Total vehicles  •  Entries today  •  Exits today  •  Gate status  •  Parking logs  •  Latest captured images</a:t>
-            </a:r>
-            <a:endParaRPr lang="en-US" sz="1450" dirty="0"/>
-          </a:p>
-        </p:txBody>
-      </p:sp>
-      <p:sp>
-        <p:nvSpPr>
-          <p:cNvPr id="10" name="Text 8"/>
-          <p:cNvSpPr/>
-          <p:nvPr/>
-        </p:nvSpPr>
-        <p:spPr>
-          <a:xfrm>
-            <a:off x="502920" y="6547104"/>
-            <a:ext cx="11155680" cy="182880"/>
-          </a:xfrm>
-          <a:prstGeom prst="rect">
-            <a:avLst/>
-          </a:prstGeom>
-          <a:noFill/>
-          <a:ln/>
-        </p:spPr>
-        <p:txBody>
-          <a:bodyPr wrap="square" lIns="0" tIns="0" rIns="0" bIns="0" rtlCol="0" anchor="ctr"/>
-          <a:lstStyle/>
-          <a:p>
-            <a:pPr marL="0" indent="0" algn="r">
-              <a:buNone/>
-            </a:pPr>
-            <a:r>
-              <a:rPr lang="en-US" sz="850" dirty="0">
-                <a:solidFill>
-                  <a:srgbClr val="7B8491"/>
-                </a:solidFill>
-                <a:latin typeface="Roboto" pitchFamily="34" charset="0"/>
-                <a:ea typeface="Roboto" pitchFamily="34" charset="-122"/>
-                <a:cs typeface="Roboto" pitchFamily="34" charset="-120"/>
-              </a:rPr>
-              <a:t>Smart Parking System  |  9</a:t>
-            </a:r>
-            <a:endParaRPr lang="en-US" sz="850" dirty="0"/>
-          </a:p>
-        </p:txBody>
-      </p:sp>
+            <a:ln w="19050">
+              <a:solidFill>
+                <a:srgbClr val="1F77B4"/>
+              </a:solidFill>
+              <a:prstDash val="solid"/>
+            </a:ln>
+          </p:spPr>
+        </p:sp>
+        <p:pic>
+          <p:nvPicPr>
+            <p:cNvPr id="21" name="Picture 20">
+              <a:extLst>
+                <a:ext uri="{FF2B5EF4-FFF2-40B4-BE49-F238E27FC236}">
+                  <a16:creationId xmlns:a16="http://schemas.microsoft.com/office/drawing/2014/main" id="{B8E9A458-9BC5-89D8-3C32-351669DD56F1}"/>
+                </a:ext>
+              </a:extLst>
+            </p:cNvPr>
+            <p:cNvPicPr>
+              <a:picLocks noChangeAspect="1"/>
+            </p:cNvPicPr>
+            <p:nvPr/>
+          </p:nvPicPr>
+          <p:blipFill>
+            <a:blip r:embed="rId3"/>
+            <a:stretch>
+              <a:fillRect/>
+            </a:stretch>
+          </p:blipFill>
+          <p:spPr>
+            <a:xfrm>
+              <a:off x="8198476" y="221856"/>
+              <a:ext cx="3721902" cy="6436119"/>
+            </a:xfrm>
+            <a:prstGeom prst="rect">
+              <a:avLst/>
+            </a:prstGeom>
+          </p:spPr>
+        </p:pic>
+      </p:grpSp>
+      <p:pic>
+        <p:nvPicPr>
+          <p:cNvPr id="15" name="Picture 14">
+            <a:extLst>
+              <a:ext uri="{FF2B5EF4-FFF2-40B4-BE49-F238E27FC236}">
+                <a16:creationId xmlns:a16="http://schemas.microsoft.com/office/drawing/2014/main" id="{3A4B5E3C-1453-E31E-BB60-2F9649D54C0B}"/>
+              </a:ext>
+            </a:extLst>
+          </p:cNvPr>
+          <p:cNvPicPr>
+            <a:picLocks noChangeAspect="1"/>
+          </p:cNvPicPr>
+          <p:nvPr/>
+        </p:nvPicPr>
+        <p:blipFill>
+          <a:blip r:embed="rId4"/>
+          <a:stretch>
+            <a:fillRect/>
+          </a:stretch>
+        </p:blipFill>
+        <p:spPr>
+          <a:xfrm>
+            <a:off x="9734550" y="44112"/>
+            <a:ext cx="2356685" cy="920580"/>
+          </a:xfrm>
+          <a:prstGeom prst="rect">
+            <a:avLst/>
+          </a:prstGeom>
+        </p:spPr>
+      </p:pic>
     </p:spTree>
   </p:cSld>
   <p:clrMapOvr>
